--- a/Assignment.pptx
+++ b/Assignment.pptx
@@ -5,20 +5,20 @@
     <p:sldMasterId id="2147483648" r:id="rId1"/>
   </p:sldMasterIdLst>
   <p:sldIdLst>
-    <p:sldId id="256" r:id="rId7"/>
-    <p:sldId id="257" r:id="rId8"/>
-    <p:sldId id="258" r:id="rId9"/>
-    <p:sldId id="259" r:id="rId10"/>
-    <p:sldId id="260" r:id="rId11"/>
-    <p:sldId id="261" r:id="rId12"/>
-    <p:sldId id="262" r:id="rId13"/>
-    <p:sldId id="263" r:id="rId14"/>
-    <p:sldId id="264" r:id="rId15"/>
-    <p:sldId id="265" r:id="rId16"/>
-    <p:sldId id="266" r:id="rId17"/>
-    <p:sldId id="267" r:id="rId18"/>
+    <p:sldId id="256" r:id="rId2"/>
+    <p:sldId id="257" r:id="rId3"/>
+    <p:sldId id="258" r:id="rId4"/>
+    <p:sldId id="259" r:id="rId5"/>
+    <p:sldId id="260" r:id="rId6"/>
+    <p:sldId id="261" r:id="rId7"/>
+    <p:sldId id="262" r:id="rId8"/>
+    <p:sldId id="263" r:id="rId9"/>
+    <p:sldId id="264" r:id="rId10"/>
+    <p:sldId id="265" r:id="rId11"/>
+    <p:sldId id="266" r:id="rId12"/>
+    <p:sldId id="267" r:id="rId13"/>
   </p:sldIdLst>
-  <p:sldSz cx="12191695" cy="6858000" type="screen4x3"/>
+  <p:sldSz cx="12192000" cy="6858000"/>
   <p:notesSz cx="6858000" cy="9144000"/>
   <p:defaultTextStyle>
     <a:defPPr>
@@ -115,6 +115,22 @@
       </a:defRPr>
     </a:lvl9pPr>
   </p:defaultTextStyle>
+  <p:extLst>
+    <p:ext uri="{EFAFB233-063F-42B5-8137-9DF3F51BA10A}">
+      <p15:sldGuideLst xmlns:p15="http://schemas.microsoft.com/office/powerpoint/2012/main">
+        <p15:guide id="1" orient="horz" pos="2160">
+          <p15:clr>
+            <a:srgbClr val="A4A3A4"/>
+          </p15:clr>
+        </p15:guide>
+        <p15:guide id="2" pos="2880">
+          <p15:clr>
+            <a:srgbClr val="A4A3A4"/>
+          </p15:clr>
+        </p15:guide>
+      </p15:sldGuideLst>
+    </p:ext>
+  </p:extLst>
 </p:presentation>
 </file>
 
@@ -156,10 +172,9 @@
           <a:lstStyle/>
           <a:p>
             <a:r>
-              <a:rPr lang="en-US" smtClean="0"/>
+              <a:rPr lang="en-US"/>
               <a:t>Click to edit Master title style</a:t>
             </a:r>
-            <a:endParaRPr lang="en-US"/>
           </a:p>
         </p:txBody>
       </p:sp>
@@ -275,10 +290,9 @@
           </a:lstStyle>
           <a:p>
             <a:r>
-              <a:rPr lang="en-US" smtClean="0"/>
+              <a:rPr lang="en-US"/>
               <a:t>Click to edit Master subtitle style</a:t>
             </a:r>
-            <a:endParaRPr lang="en-US"/>
           </a:p>
         </p:txBody>
       </p:sp>
@@ -299,7 +313,7 @@
           <a:p>
             <a:fld id="{5BCAD085-E8A6-8845-BD4E-CB4CCA059FC4}" type="datetimeFigureOut">
               <a:rPr lang="en-US" smtClean="0"/>
-              <a:t>1/27/13</a:t>
+              <a:t>10/29/2026</a:t>
             </a:fld>
             <a:endParaRPr lang="en-US"/>
           </a:p>
@@ -393,10 +407,9 @@
           <a:lstStyle/>
           <a:p>
             <a:r>
-              <a:rPr lang="en-US" smtClean="0"/>
+              <a:rPr lang="en-US"/>
               <a:t>Click to edit Master title style</a:t>
             </a:r>
-            <a:endParaRPr lang="en-US"/>
           </a:p>
         </p:txBody>
       </p:sp>
@@ -417,38 +430,37 @@
           <a:p>
             <a:pPr lvl="0"/>
             <a:r>
-              <a:rPr lang="en-US" smtClean="0"/>
+              <a:rPr lang="en-US"/>
               <a:t>Click to edit Master text styles</a:t>
             </a:r>
           </a:p>
           <a:p>
             <a:pPr lvl="1"/>
             <a:r>
-              <a:rPr lang="en-US" smtClean="0"/>
+              <a:rPr lang="en-US"/>
               <a:t>Second level</a:t>
             </a:r>
           </a:p>
           <a:p>
             <a:pPr lvl="2"/>
             <a:r>
-              <a:rPr lang="en-US" smtClean="0"/>
+              <a:rPr lang="en-US"/>
               <a:t>Third level</a:t>
             </a:r>
           </a:p>
           <a:p>
             <a:pPr lvl="3"/>
             <a:r>
-              <a:rPr lang="en-US" smtClean="0"/>
+              <a:rPr lang="en-US"/>
               <a:t>Fourth level</a:t>
             </a:r>
           </a:p>
           <a:p>
             <a:pPr lvl="4"/>
             <a:r>
-              <a:rPr lang="en-US" smtClean="0"/>
+              <a:rPr lang="en-US"/>
               <a:t>Fifth level</a:t>
             </a:r>
-            <a:endParaRPr lang="en-US"/>
           </a:p>
         </p:txBody>
       </p:sp>
@@ -469,7 +481,7 @@
           <a:p>
             <a:fld id="{5BCAD085-E8A6-8845-BD4E-CB4CCA059FC4}" type="datetimeFigureOut">
               <a:rPr lang="en-US" smtClean="0"/>
-              <a:t>1/27/13</a:t>
+              <a:t>10/29/2026</a:t>
             </a:fld>
             <a:endParaRPr lang="en-US"/>
           </a:p>
@@ -568,10 +580,9 @@
           <a:lstStyle/>
           <a:p>
             <a:r>
-              <a:rPr lang="en-US" smtClean="0"/>
+              <a:rPr lang="en-US"/>
               <a:t>Click to edit Master title style</a:t>
             </a:r>
-            <a:endParaRPr lang="en-US"/>
           </a:p>
         </p:txBody>
       </p:sp>
@@ -597,38 +608,37 @@
           <a:p>
             <a:pPr lvl="0"/>
             <a:r>
-              <a:rPr lang="en-US" smtClean="0"/>
+              <a:rPr lang="en-US"/>
               <a:t>Click to edit Master text styles</a:t>
             </a:r>
           </a:p>
           <a:p>
             <a:pPr lvl="1"/>
             <a:r>
-              <a:rPr lang="en-US" smtClean="0"/>
+              <a:rPr lang="en-US"/>
               <a:t>Second level</a:t>
             </a:r>
           </a:p>
           <a:p>
             <a:pPr lvl="2"/>
             <a:r>
-              <a:rPr lang="en-US" smtClean="0"/>
+              <a:rPr lang="en-US"/>
               <a:t>Third level</a:t>
             </a:r>
           </a:p>
           <a:p>
             <a:pPr lvl="3"/>
             <a:r>
-              <a:rPr lang="en-US" smtClean="0"/>
+              <a:rPr lang="en-US"/>
               <a:t>Fourth level</a:t>
             </a:r>
           </a:p>
           <a:p>
             <a:pPr lvl="4"/>
             <a:r>
-              <a:rPr lang="en-US" smtClean="0"/>
+              <a:rPr lang="en-US"/>
               <a:t>Fifth level</a:t>
             </a:r>
-            <a:endParaRPr lang="en-US"/>
           </a:p>
         </p:txBody>
       </p:sp>
@@ -649,7 +659,7 @@
           <a:p>
             <a:fld id="{5BCAD085-E8A6-8845-BD4E-CB4CCA059FC4}" type="datetimeFigureOut">
               <a:rPr lang="en-US" smtClean="0"/>
-              <a:t>1/27/13</a:t>
+              <a:t>10/29/2026</a:t>
             </a:fld>
             <a:endParaRPr lang="en-US"/>
           </a:p>
@@ -743,10 +753,9 @@
           <a:lstStyle/>
           <a:p>
             <a:r>
-              <a:rPr lang="en-US" smtClean="0"/>
+              <a:rPr lang="en-US"/>
               <a:t>Click to edit Master title style</a:t>
             </a:r>
-            <a:endParaRPr lang="en-US"/>
           </a:p>
         </p:txBody>
       </p:sp>
@@ -767,38 +776,37 @@
           <a:p>
             <a:pPr lvl="0"/>
             <a:r>
-              <a:rPr lang="en-US" smtClean="0"/>
+              <a:rPr lang="en-US"/>
               <a:t>Click to edit Master text styles</a:t>
             </a:r>
           </a:p>
           <a:p>
             <a:pPr lvl="1"/>
             <a:r>
-              <a:rPr lang="en-US" smtClean="0"/>
+              <a:rPr lang="en-US"/>
               <a:t>Second level</a:t>
             </a:r>
           </a:p>
           <a:p>
             <a:pPr lvl="2"/>
             <a:r>
-              <a:rPr lang="en-US" smtClean="0"/>
+              <a:rPr lang="en-US"/>
               <a:t>Third level</a:t>
             </a:r>
           </a:p>
           <a:p>
             <a:pPr lvl="3"/>
             <a:r>
-              <a:rPr lang="en-US" smtClean="0"/>
+              <a:rPr lang="en-US"/>
               <a:t>Fourth level</a:t>
             </a:r>
           </a:p>
           <a:p>
             <a:pPr lvl="4"/>
             <a:r>
-              <a:rPr lang="en-US" smtClean="0"/>
+              <a:rPr lang="en-US"/>
               <a:t>Fifth level</a:t>
             </a:r>
-            <a:endParaRPr lang="en-US"/>
           </a:p>
         </p:txBody>
       </p:sp>
@@ -819,7 +827,7 @@
           <a:p>
             <a:fld id="{5BCAD085-E8A6-8845-BD4E-CB4CCA059FC4}" type="datetimeFigureOut">
               <a:rPr lang="en-US" smtClean="0"/>
-              <a:t>1/27/13</a:t>
+              <a:t>10/29/2026</a:t>
             </a:fld>
             <a:endParaRPr lang="en-US"/>
           </a:p>
@@ -922,10 +930,9 @@
           </a:lstStyle>
           <a:p>
             <a:r>
-              <a:rPr lang="en-US" smtClean="0"/>
+              <a:rPr lang="en-US"/>
               <a:t>Click to edit Master title style</a:t>
             </a:r>
-            <a:endParaRPr lang="en-US"/>
           </a:p>
         </p:txBody>
       </p:sp>
@@ -1042,7 +1049,7 @@
           <a:p>
             <a:pPr lvl="0"/>
             <a:r>
-              <a:rPr lang="en-US" smtClean="0"/>
+              <a:rPr lang="en-US"/>
               <a:t>Click to edit Master text styles</a:t>
             </a:r>
           </a:p>
@@ -1065,7 +1072,7 @@
           <a:p>
             <a:fld id="{5BCAD085-E8A6-8845-BD4E-CB4CCA059FC4}" type="datetimeFigureOut">
               <a:rPr lang="en-US" smtClean="0"/>
-              <a:t>1/27/13</a:t>
+              <a:t>10/29/2026</a:t>
             </a:fld>
             <a:endParaRPr lang="en-US"/>
           </a:p>
@@ -1159,10 +1166,9 @@
           <a:lstStyle/>
           <a:p>
             <a:r>
-              <a:rPr lang="en-US" smtClean="0"/>
+              <a:rPr lang="en-US"/>
               <a:t>Click to edit Master title style</a:t>
             </a:r>
-            <a:endParaRPr lang="en-US"/>
           </a:p>
         </p:txBody>
       </p:sp>
@@ -1216,38 +1222,37 @@
           <a:p>
             <a:pPr lvl="0"/>
             <a:r>
-              <a:rPr lang="en-US" smtClean="0"/>
+              <a:rPr lang="en-US"/>
               <a:t>Click to edit Master text styles</a:t>
             </a:r>
           </a:p>
           <a:p>
             <a:pPr lvl="1"/>
             <a:r>
-              <a:rPr lang="en-US" smtClean="0"/>
+              <a:rPr lang="en-US"/>
               <a:t>Second level</a:t>
             </a:r>
           </a:p>
           <a:p>
             <a:pPr lvl="2"/>
             <a:r>
-              <a:rPr lang="en-US" smtClean="0"/>
+              <a:rPr lang="en-US"/>
               <a:t>Third level</a:t>
             </a:r>
           </a:p>
           <a:p>
             <a:pPr lvl="3"/>
             <a:r>
-              <a:rPr lang="en-US" smtClean="0"/>
+              <a:rPr lang="en-US"/>
               <a:t>Fourth level</a:t>
             </a:r>
           </a:p>
           <a:p>
             <a:pPr lvl="4"/>
             <a:r>
-              <a:rPr lang="en-US" smtClean="0"/>
+              <a:rPr lang="en-US"/>
               <a:t>Fifth level</a:t>
             </a:r>
-            <a:endParaRPr lang="en-US"/>
           </a:p>
         </p:txBody>
       </p:sp>
@@ -1301,38 +1306,37 @@
           <a:p>
             <a:pPr lvl="0"/>
             <a:r>
-              <a:rPr lang="en-US" smtClean="0"/>
+              <a:rPr lang="en-US"/>
               <a:t>Click to edit Master text styles</a:t>
             </a:r>
           </a:p>
           <a:p>
             <a:pPr lvl="1"/>
             <a:r>
-              <a:rPr lang="en-US" smtClean="0"/>
+              <a:rPr lang="en-US"/>
               <a:t>Second level</a:t>
             </a:r>
           </a:p>
           <a:p>
             <a:pPr lvl="2"/>
             <a:r>
-              <a:rPr lang="en-US" smtClean="0"/>
+              <a:rPr lang="en-US"/>
               <a:t>Third level</a:t>
             </a:r>
           </a:p>
           <a:p>
             <a:pPr lvl="3"/>
             <a:r>
-              <a:rPr lang="en-US" smtClean="0"/>
+              <a:rPr lang="en-US"/>
               <a:t>Fourth level</a:t>
             </a:r>
           </a:p>
           <a:p>
             <a:pPr lvl="4"/>
             <a:r>
-              <a:rPr lang="en-US" smtClean="0"/>
+              <a:rPr lang="en-US"/>
               <a:t>Fifth level</a:t>
             </a:r>
-            <a:endParaRPr lang="en-US"/>
           </a:p>
         </p:txBody>
       </p:sp>
@@ -1353,7 +1357,7 @@
           <a:p>
             <a:fld id="{5BCAD085-E8A6-8845-BD4E-CB4CCA059FC4}" type="datetimeFigureOut">
               <a:rPr lang="en-US" smtClean="0"/>
-              <a:t>1/27/13</a:t>
+              <a:t>10/29/2026</a:t>
             </a:fld>
             <a:endParaRPr lang="en-US"/>
           </a:p>
@@ -1451,10 +1455,9 @@
           </a:lstStyle>
           <a:p>
             <a:r>
-              <a:rPr lang="en-US" smtClean="0"/>
+              <a:rPr lang="en-US"/>
               <a:t>Click to edit Master title style</a:t>
             </a:r>
-            <a:endParaRPr lang="en-US"/>
           </a:p>
         </p:txBody>
       </p:sp>
@@ -1517,7 +1520,7 @@
           <a:p>
             <a:pPr lvl="0"/>
             <a:r>
-              <a:rPr lang="en-US" smtClean="0"/>
+              <a:rPr lang="en-US"/>
               <a:t>Click to edit Master text styles</a:t>
             </a:r>
           </a:p>
@@ -1573,38 +1576,37 @@
           <a:p>
             <a:pPr lvl="0"/>
             <a:r>
-              <a:rPr lang="en-US" smtClean="0"/>
+              <a:rPr lang="en-US"/>
               <a:t>Click to edit Master text styles</a:t>
             </a:r>
           </a:p>
           <a:p>
             <a:pPr lvl="1"/>
             <a:r>
-              <a:rPr lang="en-US" smtClean="0"/>
+              <a:rPr lang="en-US"/>
               <a:t>Second level</a:t>
             </a:r>
           </a:p>
           <a:p>
             <a:pPr lvl="2"/>
             <a:r>
-              <a:rPr lang="en-US" smtClean="0"/>
+              <a:rPr lang="en-US"/>
               <a:t>Third level</a:t>
             </a:r>
           </a:p>
           <a:p>
             <a:pPr lvl="3"/>
             <a:r>
-              <a:rPr lang="en-US" smtClean="0"/>
+              <a:rPr lang="en-US"/>
               <a:t>Fourth level</a:t>
             </a:r>
           </a:p>
           <a:p>
             <a:pPr lvl="4"/>
             <a:r>
-              <a:rPr lang="en-US" smtClean="0"/>
+              <a:rPr lang="en-US"/>
               <a:t>Fifth level</a:t>
             </a:r>
-            <a:endParaRPr lang="en-US"/>
           </a:p>
         </p:txBody>
       </p:sp>
@@ -1667,7 +1669,7 @@
           <a:p>
             <a:pPr lvl="0"/>
             <a:r>
-              <a:rPr lang="en-US" smtClean="0"/>
+              <a:rPr lang="en-US"/>
               <a:t>Click to edit Master text styles</a:t>
             </a:r>
           </a:p>
@@ -1723,38 +1725,37 @@
           <a:p>
             <a:pPr lvl="0"/>
             <a:r>
-              <a:rPr lang="en-US" smtClean="0"/>
+              <a:rPr lang="en-US"/>
               <a:t>Click to edit Master text styles</a:t>
             </a:r>
           </a:p>
           <a:p>
             <a:pPr lvl="1"/>
             <a:r>
-              <a:rPr lang="en-US" smtClean="0"/>
+              <a:rPr lang="en-US"/>
               <a:t>Second level</a:t>
             </a:r>
           </a:p>
           <a:p>
             <a:pPr lvl="2"/>
             <a:r>
-              <a:rPr lang="en-US" smtClean="0"/>
+              <a:rPr lang="en-US"/>
               <a:t>Third level</a:t>
             </a:r>
           </a:p>
           <a:p>
             <a:pPr lvl="3"/>
             <a:r>
-              <a:rPr lang="en-US" smtClean="0"/>
+              <a:rPr lang="en-US"/>
               <a:t>Fourth level</a:t>
             </a:r>
           </a:p>
           <a:p>
             <a:pPr lvl="4"/>
             <a:r>
-              <a:rPr lang="en-US" smtClean="0"/>
+              <a:rPr lang="en-US"/>
               <a:t>Fifth level</a:t>
             </a:r>
-            <a:endParaRPr lang="en-US"/>
           </a:p>
         </p:txBody>
       </p:sp>
@@ -1775,7 +1776,7 @@
           <a:p>
             <a:fld id="{5BCAD085-E8A6-8845-BD4E-CB4CCA059FC4}" type="datetimeFigureOut">
               <a:rPr lang="en-US" smtClean="0"/>
-              <a:t>1/27/13</a:t>
+              <a:t>10/29/2026</a:t>
             </a:fld>
             <a:endParaRPr lang="en-US"/>
           </a:p>
@@ -1869,10 +1870,9 @@
           <a:lstStyle/>
           <a:p>
             <a:r>
-              <a:rPr lang="en-US" smtClean="0"/>
+              <a:rPr lang="en-US"/>
               <a:t>Click to edit Master title style</a:t>
             </a:r>
-            <a:endParaRPr lang="en-US"/>
           </a:p>
         </p:txBody>
       </p:sp>
@@ -1893,7 +1893,7 @@
           <a:p>
             <a:fld id="{5BCAD085-E8A6-8845-BD4E-CB4CCA059FC4}" type="datetimeFigureOut">
               <a:rPr lang="en-US" smtClean="0"/>
-              <a:t>1/27/13</a:t>
+              <a:t>10/29/2026</a:t>
             </a:fld>
             <a:endParaRPr lang="en-US"/>
           </a:p>
@@ -1988,7 +1988,7 @@
           <a:p>
             <a:fld id="{5BCAD085-E8A6-8845-BD4E-CB4CCA059FC4}" type="datetimeFigureOut">
               <a:rPr lang="en-US" smtClean="0"/>
-              <a:t>1/27/13</a:t>
+              <a:t>10/29/2026</a:t>
             </a:fld>
             <a:endParaRPr lang="en-US"/>
           </a:p>
@@ -2091,10 +2091,9 @@
           </a:lstStyle>
           <a:p>
             <a:r>
-              <a:rPr lang="en-US" smtClean="0"/>
+              <a:rPr lang="en-US"/>
               <a:t>Click to edit Master title style</a:t>
             </a:r>
-            <a:endParaRPr lang="en-US"/>
           </a:p>
         </p:txBody>
       </p:sp>
@@ -2148,38 +2147,37 @@
           <a:p>
             <a:pPr lvl="0"/>
             <a:r>
-              <a:rPr lang="en-US" smtClean="0"/>
+              <a:rPr lang="en-US"/>
               <a:t>Click to edit Master text styles</a:t>
             </a:r>
           </a:p>
           <a:p>
             <a:pPr lvl="1"/>
             <a:r>
-              <a:rPr lang="en-US" smtClean="0"/>
+              <a:rPr lang="en-US"/>
               <a:t>Second level</a:t>
             </a:r>
           </a:p>
           <a:p>
             <a:pPr lvl="2"/>
             <a:r>
-              <a:rPr lang="en-US" smtClean="0"/>
+              <a:rPr lang="en-US"/>
               <a:t>Third level</a:t>
             </a:r>
           </a:p>
           <a:p>
             <a:pPr lvl="3"/>
             <a:r>
-              <a:rPr lang="en-US" smtClean="0"/>
+              <a:rPr lang="en-US"/>
               <a:t>Fourth level</a:t>
             </a:r>
           </a:p>
           <a:p>
             <a:pPr lvl="4"/>
             <a:r>
-              <a:rPr lang="en-US" smtClean="0"/>
+              <a:rPr lang="en-US"/>
               <a:t>Fifth level</a:t>
             </a:r>
-            <a:endParaRPr lang="en-US"/>
           </a:p>
         </p:txBody>
       </p:sp>
@@ -2242,7 +2240,7 @@
           <a:p>
             <a:pPr lvl="0"/>
             <a:r>
-              <a:rPr lang="en-US" smtClean="0"/>
+              <a:rPr lang="en-US"/>
               <a:t>Click to edit Master text styles</a:t>
             </a:r>
           </a:p>
@@ -2265,7 +2263,7 @@
           <a:p>
             <a:fld id="{5BCAD085-E8A6-8845-BD4E-CB4CCA059FC4}" type="datetimeFigureOut">
               <a:rPr lang="en-US" smtClean="0"/>
-              <a:t>1/27/13</a:t>
+              <a:t>10/29/2026</a:t>
             </a:fld>
             <a:endParaRPr lang="en-US"/>
           </a:p>
@@ -2368,10 +2366,9 @@
           </a:lstStyle>
           <a:p>
             <a:r>
-              <a:rPr lang="en-US" smtClean="0"/>
+              <a:rPr lang="en-US"/>
               <a:t>Click to edit Master title style</a:t>
             </a:r>
-            <a:endParaRPr lang="en-US"/>
           </a:p>
         </p:txBody>
       </p:sp>
@@ -2495,7 +2492,7 @@
           <a:p>
             <a:pPr lvl="0"/>
             <a:r>
-              <a:rPr lang="en-US" smtClean="0"/>
+              <a:rPr lang="en-US"/>
               <a:t>Click to edit Master text styles</a:t>
             </a:r>
           </a:p>
@@ -2518,7 +2515,7 @@
           <a:p>
             <a:fld id="{5BCAD085-E8A6-8845-BD4E-CB4CCA059FC4}" type="datetimeFigureOut">
               <a:rPr lang="en-US" smtClean="0"/>
-              <a:t>1/27/13</a:t>
+              <a:t>10/29/2026</a:t>
             </a:fld>
             <a:endParaRPr lang="en-US"/>
           </a:p>
@@ -2627,10 +2624,9 @@
           <a:lstStyle/>
           <a:p>
             <a:r>
-              <a:rPr lang="en-US" smtClean="0"/>
+              <a:rPr lang="en-US"/>
               <a:t>Click to edit Master title style</a:t>
             </a:r>
-            <a:endParaRPr lang="en-US"/>
           </a:p>
         </p:txBody>
       </p:sp>
@@ -2661,38 +2657,37 @@
           <a:p>
             <a:pPr lvl="0"/>
             <a:r>
-              <a:rPr lang="en-US" smtClean="0"/>
+              <a:rPr lang="en-US"/>
               <a:t>Click to edit Master text styles</a:t>
             </a:r>
           </a:p>
           <a:p>
             <a:pPr lvl="1"/>
             <a:r>
-              <a:rPr lang="en-US" smtClean="0"/>
+              <a:rPr lang="en-US"/>
               <a:t>Second level</a:t>
             </a:r>
           </a:p>
           <a:p>
             <a:pPr lvl="2"/>
             <a:r>
-              <a:rPr lang="en-US" smtClean="0"/>
+              <a:rPr lang="en-US"/>
               <a:t>Third level</a:t>
             </a:r>
           </a:p>
           <a:p>
             <a:pPr lvl="3"/>
             <a:r>
-              <a:rPr lang="en-US" smtClean="0"/>
+              <a:rPr lang="en-US"/>
               <a:t>Fourth level</a:t>
             </a:r>
           </a:p>
           <a:p>
             <a:pPr lvl="4"/>
             <a:r>
-              <a:rPr lang="en-US" smtClean="0"/>
+              <a:rPr lang="en-US"/>
               <a:t>Fifth level</a:t>
             </a:r>
-            <a:endParaRPr lang="en-US"/>
           </a:p>
         </p:txBody>
       </p:sp>
@@ -2731,7 +2726,7 @@
           <a:p>
             <a:fld id="{5BCAD085-E8A6-8845-BD4E-CB4CCA059FC4}" type="datetimeFigureOut">
               <a:rPr lang="en-US" smtClean="0"/>
-              <a:t>1/27/13</a:t>
+              <a:t>10/29/2026</a:t>
             </a:fld>
             <a:endParaRPr lang="en-US"/>
           </a:p>
@@ -3090,7 +3085,7 @@
 </file>
 
 <file path=ppt/slides/slide1.xml><?xml version="1.0" encoding="utf-8"?>
-<p:sld xmlns:a="http://schemas.openxmlformats.org/drawingml/2006/main" xmlns:p="http://schemas.openxmlformats.org/presentationml/2006/main" xmlns:r="http://schemas.openxmlformats.org/officeDocument/2006/relationships">
+<p:sld xmlns:a="http://schemas.openxmlformats.org/drawingml/2006/main" xmlns:r="http://schemas.openxmlformats.org/officeDocument/2006/relationships" xmlns:p="http://schemas.openxmlformats.org/presentationml/2006/main">
   <p:cSld>
     <p:spTree>
       <p:nvGrpSpPr>
@@ -3098,7 +3093,14 @@
         <p:cNvGrpSpPr/>
         <p:nvPr/>
       </p:nvGrpSpPr>
-      <p:grpSpPr/>
+      <p:grpSpPr>
+        <a:xfrm>
+          <a:off x="0" y="0"/>
+          <a:ext cx="0" cy="0"/>
+          <a:chOff x="0" y="0"/>
+          <a:chExt cx="0" cy="0"/>
+        </a:xfrm>
+      </p:grpSpPr>
       <p:sp>
         <p:nvSpPr>
           <p:cNvPr id="2" name="Rectangle 1"/>
@@ -3139,6 +3141,7 @@
           <a:lstStyle/>
           <a:p>
             <a:pPr algn="ctr"/>
+            <a:endParaRPr/>
           </a:p>
         </p:txBody>
       </p:sp>
@@ -3184,6 +3187,7 @@
           <a:lstStyle/>
           <a:p>
             <a:pPr algn="ctr"/>
+            <a:endParaRPr/>
           </a:p>
         </p:txBody>
       </p:sp>
@@ -3364,7 +3368,7 @@
 </file>
 
 <file path=ppt/slides/slide10.xml><?xml version="1.0" encoding="utf-8"?>
-<p:sld xmlns:a="http://schemas.openxmlformats.org/drawingml/2006/main" xmlns:p="http://schemas.openxmlformats.org/presentationml/2006/main" xmlns:r="http://schemas.openxmlformats.org/officeDocument/2006/relationships">
+<p:sld xmlns:a="http://schemas.openxmlformats.org/drawingml/2006/main" xmlns:r="http://schemas.openxmlformats.org/officeDocument/2006/relationships" xmlns:p="http://schemas.openxmlformats.org/presentationml/2006/main">
   <p:cSld>
     <p:spTree>
       <p:nvGrpSpPr>
@@ -3372,7 +3376,14 @@
         <p:cNvGrpSpPr/>
         <p:nvPr/>
       </p:nvGrpSpPr>
-      <p:grpSpPr/>
+      <p:grpSpPr>
+        <a:xfrm>
+          <a:off x="0" y="0"/>
+          <a:ext cx="0" cy="0"/>
+          <a:chOff x="0" y="0"/>
+          <a:chExt cx="0" cy="0"/>
+        </a:xfrm>
+      </p:grpSpPr>
       <p:sp>
         <p:nvSpPr>
           <p:cNvPr id="2" name="TextBox 1"/>
@@ -3487,6 +3498,7 @@
           <a:lstStyle/>
           <a:p>
             <a:pPr algn="ctr"/>
+            <a:endParaRPr/>
           </a:p>
         </p:txBody>
       </p:sp>
@@ -3532,6 +3544,7 @@
           <a:lstStyle/>
           <a:p>
             <a:pPr algn="ctr"/>
+            <a:endParaRPr/>
           </a:p>
         </p:txBody>
       </p:sp>
@@ -3574,7 +3587,7 @@
               <a:spcAft>
                 <a:spcPts val="200"/>
               </a:spcAft>
-              <a:defRPr b="1" sz="950">
+              <a:defRPr sz="950" b="1">
                 <a:solidFill>
                   <a:srgbClr val="DC2626"/>
                 </a:solidFill>
@@ -3594,7 +3607,7 @@
           </a:p>
           <a:p>
             <a:pPr>
-              <a:defRPr b="1" sz="950">
+              <a:defRPr sz="950" b="1">
                 <a:solidFill>
                   <a:srgbClr val="16A34A"/>
                 </a:solidFill>
@@ -3656,6 +3669,7 @@
           <a:lstStyle/>
           <a:p>
             <a:pPr algn="ctr"/>
+            <a:endParaRPr/>
           </a:p>
         </p:txBody>
       </p:sp>
@@ -3698,7 +3712,7 @@
               <a:spcAft>
                 <a:spcPts val="200"/>
               </a:spcAft>
-              <a:defRPr b="1" sz="950">
+              <a:defRPr sz="950" b="1">
                 <a:solidFill>
                   <a:srgbClr val="DC2626"/>
                 </a:solidFill>
@@ -3718,7 +3732,7 @@
           </a:p>
           <a:p>
             <a:pPr>
-              <a:defRPr b="1" sz="950">
+              <a:defRPr sz="950" b="1">
                 <a:solidFill>
                   <a:srgbClr val="16A34A"/>
                 </a:solidFill>
@@ -3780,6 +3794,7 @@
           <a:lstStyle/>
           <a:p>
             <a:pPr algn="ctr"/>
+            <a:endParaRPr/>
           </a:p>
         </p:txBody>
       </p:sp>
@@ -3822,7 +3837,7 @@
               <a:spcAft>
                 <a:spcPts val="200"/>
               </a:spcAft>
-              <a:defRPr b="1" sz="950">
+              <a:defRPr sz="950" b="1">
                 <a:solidFill>
                   <a:srgbClr val="DC2626"/>
                 </a:solidFill>
@@ -3842,7 +3857,7 @@
           </a:p>
           <a:p>
             <a:pPr>
-              <a:defRPr b="1" sz="950">
+              <a:defRPr sz="950" b="1">
                 <a:solidFill>
                   <a:srgbClr val="16A34A"/>
                 </a:solidFill>
@@ -3904,6 +3919,7 @@
           <a:lstStyle/>
           <a:p>
             <a:pPr algn="ctr"/>
+            <a:endParaRPr/>
           </a:p>
         </p:txBody>
       </p:sp>
@@ -3946,7 +3962,7 @@
               <a:spcAft>
                 <a:spcPts val="200"/>
               </a:spcAft>
-              <a:defRPr b="1" sz="950">
+              <a:defRPr sz="950" b="1">
                 <a:solidFill>
                   <a:srgbClr val="DC2626"/>
                 </a:solidFill>
@@ -3966,7 +3982,7 @@
           </a:p>
           <a:p>
             <a:pPr>
-              <a:defRPr b="1" sz="950">
+              <a:defRPr sz="950" b="1">
                 <a:solidFill>
                   <a:srgbClr val="16A34A"/>
                 </a:solidFill>
@@ -3995,7 +4011,7 @@
 </file>
 
 <file path=ppt/slides/slide11.xml><?xml version="1.0" encoding="utf-8"?>
-<p:sld xmlns:a="http://schemas.openxmlformats.org/drawingml/2006/main" xmlns:p="http://schemas.openxmlformats.org/presentationml/2006/main" xmlns:r="http://schemas.openxmlformats.org/officeDocument/2006/relationships">
+<p:sld xmlns:a="http://schemas.openxmlformats.org/drawingml/2006/main" xmlns:r="http://schemas.openxmlformats.org/officeDocument/2006/relationships" xmlns:p="http://schemas.openxmlformats.org/presentationml/2006/main">
   <p:cSld>
     <p:spTree>
       <p:nvGrpSpPr>
@@ -4003,7 +4019,14 @@
         <p:cNvGrpSpPr/>
         <p:nvPr/>
       </p:nvGrpSpPr>
-      <p:grpSpPr/>
+      <p:grpSpPr>
+        <a:xfrm>
+          <a:off x="0" y="0"/>
+          <a:ext cx="0" cy="0"/>
+          <a:chOff x="0" y="0"/>
+          <a:chExt cx="0" cy="0"/>
+        </a:xfrm>
+      </p:grpSpPr>
       <p:sp>
         <p:nvSpPr>
           <p:cNvPr id="2" name="TextBox 1"/>
@@ -4118,6 +4141,7 @@
           <a:lstStyle/>
           <a:p>
             <a:pPr algn="ctr"/>
+            <a:endParaRPr/>
           </a:p>
         </p:txBody>
       </p:sp>
@@ -4163,6 +4187,7 @@
           <a:lstStyle/>
           <a:p>
             <a:pPr algn="ctr"/>
+            <a:endParaRPr/>
           </a:p>
         </p:txBody>
       </p:sp>
@@ -4292,6 +4317,7 @@
           <a:lstStyle/>
           <a:p>
             <a:pPr algn="ctr"/>
+            <a:endParaRPr/>
           </a:p>
         </p:txBody>
       </p:sp>
@@ -4421,6 +4447,7 @@
           <a:lstStyle/>
           <a:p>
             <a:pPr algn="ctr"/>
+            <a:endParaRPr/>
           </a:p>
         </p:txBody>
       </p:sp>
@@ -4550,6 +4577,7 @@
           <a:lstStyle/>
           <a:p>
             <a:pPr algn="ctr"/>
+            <a:endParaRPr/>
           </a:p>
         </p:txBody>
       </p:sp>
@@ -4646,7 +4674,7 @@
 </file>
 
 <file path=ppt/slides/slide12.xml><?xml version="1.0" encoding="utf-8"?>
-<p:sld xmlns:a="http://schemas.openxmlformats.org/drawingml/2006/main" xmlns:p="http://schemas.openxmlformats.org/presentationml/2006/main" xmlns:r="http://schemas.openxmlformats.org/officeDocument/2006/relationships">
+<p:sld xmlns:a="http://schemas.openxmlformats.org/drawingml/2006/main" xmlns:r="http://schemas.openxmlformats.org/officeDocument/2006/relationships" xmlns:p="http://schemas.openxmlformats.org/presentationml/2006/main">
   <p:cSld>
     <p:spTree>
       <p:nvGrpSpPr>
@@ -4654,7 +4682,14 @@
         <p:cNvGrpSpPr/>
         <p:nvPr/>
       </p:nvGrpSpPr>
-      <p:grpSpPr/>
+      <p:grpSpPr>
+        <a:xfrm>
+          <a:off x="0" y="0"/>
+          <a:ext cx="0" cy="0"/>
+          <a:chOff x="0" y="0"/>
+          <a:chExt cx="0" cy="0"/>
+        </a:xfrm>
+      </p:grpSpPr>
       <p:sp>
         <p:nvSpPr>
           <p:cNvPr id="2" name="Rectangle 1"/>
@@ -4695,6 +4730,7 @@
           <a:lstStyle/>
           <a:p>
             <a:pPr algn="ctr"/>
+            <a:endParaRPr/>
           </a:p>
         </p:txBody>
       </p:sp>
@@ -4740,6 +4776,7 @@
           <a:lstStyle/>
           <a:p>
             <a:pPr algn="ctr"/>
+            <a:endParaRPr/>
           </a:p>
         </p:txBody>
       </p:sp>
@@ -4939,14 +4976,6 @@
           </a:p>
           <a:p>
             <a:br/>
-            <a:pPr algn="ctr">
-              <a:defRPr sz="1600" b="1">
-                <a:solidFill>
-                  <a:srgbClr val="0284C7"/>
-                </a:solidFill>
-                <a:latin typeface="Segoe UI"/>
-              </a:defRPr>
-            </a:pPr>
             <a:r>
               <a:t>Thank You!  —  Questions &amp; Discussion</a:t>
             </a:r>
@@ -4962,7 +4991,7 @@
 </file>
 
 <file path=ppt/slides/slide2.xml><?xml version="1.0" encoding="utf-8"?>
-<p:sld xmlns:a="http://schemas.openxmlformats.org/drawingml/2006/main" xmlns:p="http://schemas.openxmlformats.org/presentationml/2006/main" xmlns:r="http://schemas.openxmlformats.org/officeDocument/2006/relationships">
+<p:sld xmlns:a="http://schemas.openxmlformats.org/drawingml/2006/main" xmlns:r="http://schemas.openxmlformats.org/officeDocument/2006/relationships" xmlns:p="http://schemas.openxmlformats.org/presentationml/2006/main">
   <p:cSld>
     <p:spTree>
       <p:nvGrpSpPr>
@@ -4970,7 +4999,14 @@
         <p:cNvGrpSpPr/>
         <p:nvPr/>
       </p:nvGrpSpPr>
-      <p:grpSpPr/>
+      <p:grpSpPr>
+        <a:xfrm>
+          <a:off x="0" y="0"/>
+          <a:ext cx="0" cy="0"/>
+          <a:chOff x="0" y="0"/>
+          <a:chExt cx="0" cy="0"/>
+        </a:xfrm>
+      </p:grpSpPr>
       <p:sp>
         <p:nvSpPr>
           <p:cNvPr id="2" name="TextBox 1"/>
@@ -5085,6 +5121,7 @@
           <a:lstStyle/>
           <a:p>
             <a:pPr algn="ctr"/>
+            <a:endParaRPr/>
           </a:p>
         </p:txBody>
       </p:sp>
@@ -5130,6 +5167,7 @@
           <a:lstStyle/>
           <a:p>
             <a:pPr algn="ctr"/>
+            <a:endParaRPr/>
           </a:p>
         </p:txBody>
       </p:sp>
@@ -5275,6 +5313,7 @@
           <a:lstStyle/>
           <a:p>
             <a:pPr algn="ctr"/>
+            <a:endParaRPr/>
           </a:p>
         </p:txBody>
       </p:sp>
@@ -5420,6 +5459,7 @@
           <a:lstStyle/>
           <a:p>
             <a:pPr algn="ctr"/>
+            <a:endParaRPr/>
           </a:p>
         </p:txBody>
       </p:sp>
@@ -5565,6 +5605,7 @@
           <a:lstStyle/>
           <a:p>
             <a:pPr algn="ctr"/>
+            <a:endParaRPr/>
           </a:p>
         </p:txBody>
       </p:sp>
@@ -5677,7 +5718,7 @@
 </file>
 
 <file path=ppt/slides/slide3.xml><?xml version="1.0" encoding="utf-8"?>
-<p:sld xmlns:a="http://schemas.openxmlformats.org/drawingml/2006/main" xmlns:p="http://schemas.openxmlformats.org/presentationml/2006/main" xmlns:r="http://schemas.openxmlformats.org/officeDocument/2006/relationships">
+<p:sld xmlns:a="http://schemas.openxmlformats.org/drawingml/2006/main" xmlns:r="http://schemas.openxmlformats.org/officeDocument/2006/relationships" xmlns:p="http://schemas.openxmlformats.org/presentationml/2006/main">
   <p:cSld>
     <p:spTree>
       <p:nvGrpSpPr>
@@ -5685,7 +5726,14 @@
         <p:cNvGrpSpPr/>
         <p:nvPr/>
       </p:nvGrpSpPr>
-      <p:grpSpPr/>
+      <p:grpSpPr>
+        <a:xfrm>
+          <a:off x="0" y="0"/>
+          <a:ext cx="0" cy="0"/>
+          <a:chOff x="0" y="0"/>
+          <a:chExt cx="0" cy="0"/>
+        </a:xfrm>
+      </p:grpSpPr>
       <p:sp>
         <p:nvSpPr>
           <p:cNvPr id="2" name="TextBox 1"/>
@@ -5800,6 +5848,7 @@
           <a:lstStyle/>
           <a:p>
             <a:pPr algn="ctr"/>
+            <a:endParaRPr/>
           </a:p>
         </p:txBody>
       </p:sp>
@@ -5845,6 +5894,7 @@
           <a:lstStyle/>
           <a:p>
             <a:pPr algn="ctr"/>
+            <a:endParaRPr/>
           </a:p>
         </p:txBody>
       </p:sp>
@@ -6094,6 +6144,7 @@
           <a:lstStyle/>
           <a:p>
             <a:pPr algn="ctr"/>
+            <a:endParaRPr/>
           </a:p>
         </p:txBody>
       </p:sp>
@@ -6130,7 +6181,7 @@
 </file>
 
 <file path=ppt/slides/slide4.xml><?xml version="1.0" encoding="utf-8"?>
-<p:sld xmlns:a="http://schemas.openxmlformats.org/drawingml/2006/main" xmlns:p="http://schemas.openxmlformats.org/presentationml/2006/main" xmlns:r="http://schemas.openxmlformats.org/officeDocument/2006/relationships">
+<p:sld xmlns:a="http://schemas.openxmlformats.org/drawingml/2006/main" xmlns:r="http://schemas.openxmlformats.org/officeDocument/2006/relationships" xmlns:p="http://schemas.openxmlformats.org/presentationml/2006/main">
   <p:cSld>
     <p:spTree>
       <p:nvGrpSpPr>
@@ -6138,7 +6189,14 @@
         <p:cNvGrpSpPr/>
         <p:nvPr/>
       </p:nvGrpSpPr>
-      <p:grpSpPr/>
+      <p:grpSpPr>
+        <a:xfrm>
+          <a:off x="0" y="0"/>
+          <a:ext cx="0" cy="0"/>
+          <a:chOff x="0" y="0"/>
+          <a:chExt cx="0" cy="0"/>
+        </a:xfrm>
+      </p:grpSpPr>
       <p:sp>
         <p:nvSpPr>
           <p:cNvPr id="2" name="TextBox 1"/>
@@ -6253,6 +6311,7 @@
           <a:lstStyle/>
           <a:p>
             <a:pPr algn="ctr"/>
+            <a:endParaRPr/>
           </a:p>
         </p:txBody>
       </p:sp>
@@ -6298,6 +6357,7 @@
           <a:lstStyle/>
           <a:p>
             <a:pPr algn="ctr"/>
+            <a:endParaRPr/>
           </a:p>
         </p:txBody>
       </p:sp>
@@ -6499,6 +6559,7 @@
           <a:lstStyle/>
           <a:p>
             <a:pPr algn="ctr"/>
+            <a:endParaRPr/>
           </a:p>
         </p:txBody>
       </p:sp>
@@ -6535,7 +6596,7 @@
 </file>
 
 <file path=ppt/slides/slide5.xml><?xml version="1.0" encoding="utf-8"?>
-<p:sld xmlns:a="http://schemas.openxmlformats.org/drawingml/2006/main" xmlns:p="http://schemas.openxmlformats.org/presentationml/2006/main" xmlns:r="http://schemas.openxmlformats.org/officeDocument/2006/relationships">
+<p:sld xmlns:a="http://schemas.openxmlformats.org/drawingml/2006/main" xmlns:r="http://schemas.openxmlformats.org/officeDocument/2006/relationships" xmlns:p="http://schemas.openxmlformats.org/presentationml/2006/main">
   <p:cSld>
     <p:spTree>
       <p:nvGrpSpPr>
@@ -6543,7 +6604,14 @@
         <p:cNvGrpSpPr/>
         <p:nvPr/>
       </p:nvGrpSpPr>
-      <p:grpSpPr/>
+      <p:grpSpPr>
+        <a:xfrm>
+          <a:off x="0" y="0"/>
+          <a:ext cx="0" cy="0"/>
+          <a:chOff x="0" y="0"/>
+          <a:chExt cx="0" cy="0"/>
+        </a:xfrm>
+      </p:grpSpPr>
       <p:sp>
         <p:nvSpPr>
           <p:cNvPr id="2" name="TextBox 1"/>
@@ -6611,7 +6679,16 @@
               </a:defRPr>
             </a:pPr>
             <a:r>
-              <a:t>Production Dockerfile &amp; Security Hardening</a:t>
+              <a:rPr dirty="0"/>
+              <a:t>Production </a:t>
+            </a:r>
+            <a:r>
+              <a:rPr dirty="0" err="1"/>
+              <a:t>Dockerfile</a:t>
+            </a:r>
+            <a:r>
+              <a:rPr dirty="0"/>
+              <a:t> &amp; Security Hardening</a:t>
             </a:r>
           </a:p>
         </p:txBody>
@@ -6658,6 +6735,7 @@
           <a:lstStyle/>
           <a:p>
             <a:pPr algn="ctr"/>
+            <a:endParaRPr/>
           </a:p>
         </p:txBody>
       </p:sp>
@@ -6703,6 +6781,7 @@
           <a:lstStyle/>
           <a:p>
             <a:pPr algn="ctr"/>
+            <a:endParaRPr/>
           </a:p>
         </p:txBody>
       </p:sp>
@@ -6737,6 +6816,7 @@
               </a:defRPr>
             </a:pPr>
             <a:r>
+              <a:rPr dirty="0"/>
               <a:t>Containerization Standards</a:t>
             </a:r>
           </a:p>
@@ -6753,10 +6833,11 @@
               </a:defRPr>
             </a:pPr>
             <a:r>
+              <a:rPr dirty="0"/>
               <a:t>• Multi-Stage Build Pattern: </a:t>
             </a:r>
             <a:r>
-              <a:rPr b="0">
+              <a:rPr b="0" dirty="0">
                 <a:solidFill>
                   <a:srgbClr val="64748B"/>
                 </a:solidFill>
@@ -6777,15 +6858,64 @@
               </a:defRPr>
             </a:pPr>
             <a:r>
+              <a:rPr dirty="0"/>
               <a:t>• Non-Root Security Context: </a:t>
             </a:r>
             <a:r>
-              <a:rPr b="0">
+              <a:rPr b="0" dirty="0">
                 <a:solidFill>
                   <a:srgbClr val="64748B"/>
                 </a:solidFill>
               </a:rPr>
-              <a:t>Runs as dedicated appuser (UID 1000) with chown -R appuser:appuser /app to mitigate container breakout risks.</a:t>
+              <a:t>Runs as dedicated </a:t>
+            </a:r>
+            <a:r>
+              <a:rPr b="0" dirty="0" err="1">
+                <a:solidFill>
+                  <a:srgbClr val="64748B"/>
+                </a:solidFill>
+              </a:rPr>
+              <a:t>appuser</a:t>
+            </a:r>
+            <a:r>
+              <a:rPr b="0" dirty="0">
+                <a:solidFill>
+                  <a:srgbClr val="64748B"/>
+                </a:solidFill>
+              </a:rPr>
+              <a:t> (UID 1000) with </a:t>
+            </a:r>
+            <a:r>
+              <a:rPr b="0" dirty="0" err="1">
+                <a:solidFill>
+                  <a:srgbClr val="64748B"/>
+                </a:solidFill>
+              </a:rPr>
+              <a:t>chown</a:t>
+            </a:r>
+            <a:r>
+              <a:rPr b="0" dirty="0">
+                <a:solidFill>
+                  <a:srgbClr val="64748B"/>
+                </a:solidFill>
+              </a:rPr>
+              <a:t> -R </a:t>
+            </a:r>
+            <a:r>
+              <a:rPr b="0" dirty="0" err="1">
+                <a:solidFill>
+                  <a:srgbClr val="64748B"/>
+                </a:solidFill>
+              </a:rPr>
+              <a:t>appuser:appuser</a:t>
+            </a:r>
+            <a:r>
+              <a:rPr b="0" dirty="0">
+                <a:solidFill>
+                  <a:srgbClr val="64748B"/>
+                </a:solidFill>
+              </a:rPr>
+              <a:t> /app to mitigate container breakout risks.</a:t>
             </a:r>
           </a:p>
           <a:p>
@@ -6801,10 +6931,19 @@
               </a:defRPr>
             </a:pPr>
             <a:r>
-              <a:t>• Container Healthcheck: </a:t>
-            </a:r>
-            <a:r>
-              <a:rPr b="0">
+              <a:rPr dirty="0"/>
+              <a:t>• Container </a:t>
+            </a:r>
+            <a:r>
+              <a:rPr dirty="0" err="1"/>
+              <a:t>Healthcheck</a:t>
+            </a:r>
+            <a:r>
+              <a:rPr dirty="0"/>
+              <a:t>: </a:t>
+            </a:r>
+            <a:r>
+              <a:rPr b="0" dirty="0">
                 <a:solidFill>
                   <a:srgbClr val="64748B"/>
                 </a:solidFill>
@@ -6825,15 +6964,32 @@
               </a:defRPr>
             </a:pPr>
             <a:r>
+              <a:rPr dirty="0"/>
               <a:t>• Local Multi-Service Compose: </a:t>
             </a:r>
             <a:r>
-              <a:rPr b="0">
+              <a:rPr b="0" dirty="0">
                 <a:solidFill>
                   <a:srgbClr val="64748B"/>
                 </a:solidFill>
               </a:rPr>
-              <a:t>docker-compose.yml defines local developer environment with web and nginx services sharing a bridge network.</a:t>
+              <a:t>docker-</a:t>
+            </a:r>
+            <a:r>
+              <a:rPr b="0" dirty="0" err="1">
+                <a:solidFill>
+                  <a:srgbClr val="64748B"/>
+                </a:solidFill>
+              </a:rPr>
+              <a:t>compose.yml</a:t>
+            </a:r>
+            <a:r>
+              <a:rPr b="0" dirty="0">
+                <a:solidFill>
+                  <a:srgbClr val="64748B"/>
+                </a:solidFill>
+              </a:rPr>
+              <a:t> defines local developer environment with web and nginx services sharing a bridge network.</a:t>
             </a:r>
           </a:p>
           <a:p>
@@ -6849,15 +7005,32 @@
               </a:defRPr>
             </a:pPr>
             <a:r>
+              <a:rPr dirty="0"/>
               <a:t>• Minimal Image Footprint: </a:t>
             </a:r>
             <a:r>
-              <a:rPr b="0">
+              <a:rPr b="0" dirty="0">
                 <a:solidFill>
                   <a:srgbClr val="64748B"/>
                 </a:solidFill>
               </a:rPr>
-              <a:t>Utilizes .dockerignore to strip caches, git history, and secrets, reducing attack surface and pull latency.</a:t>
+              <a:t>Utilizes .</a:t>
+            </a:r>
+            <a:r>
+              <a:rPr b="0" dirty="0" err="1">
+                <a:solidFill>
+                  <a:srgbClr val="64748B"/>
+                </a:solidFill>
+              </a:rPr>
+              <a:t>dockerignore</a:t>
+            </a:r>
+            <a:r>
+              <a:rPr b="0" dirty="0">
+                <a:solidFill>
+                  <a:srgbClr val="64748B"/>
+                </a:solidFill>
+              </a:rPr>
+              <a:t> to strip caches, git history, and secrets, reducing attack surface and pull latency.</a:t>
             </a:r>
           </a:p>
         </p:txBody>
@@ -6904,6 +7077,7 @@
           <a:lstStyle/>
           <a:p>
             <a:pPr algn="ctr"/>
+            <a:endParaRPr/>
           </a:p>
         </p:txBody>
       </p:sp>
@@ -6940,7 +7114,7 @@
 </file>
 
 <file path=ppt/slides/slide6.xml><?xml version="1.0" encoding="utf-8"?>
-<p:sld xmlns:a="http://schemas.openxmlformats.org/drawingml/2006/main" xmlns:p="http://schemas.openxmlformats.org/presentationml/2006/main" xmlns:r="http://schemas.openxmlformats.org/officeDocument/2006/relationships">
+<p:sld xmlns:a="http://schemas.openxmlformats.org/drawingml/2006/main" xmlns:r="http://schemas.openxmlformats.org/officeDocument/2006/relationships" xmlns:p="http://schemas.openxmlformats.org/presentationml/2006/main">
   <p:cSld>
     <p:spTree>
       <p:nvGrpSpPr>
@@ -6948,7 +7122,14 @@
         <p:cNvGrpSpPr/>
         <p:nvPr/>
       </p:nvGrpSpPr>
-      <p:grpSpPr/>
+      <p:grpSpPr>
+        <a:xfrm>
+          <a:off x="0" y="0"/>
+          <a:ext cx="0" cy="0"/>
+          <a:chOff x="0" y="0"/>
+          <a:chExt cx="0" cy="0"/>
+        </a:xfrm>
+      </p:grpSpPr>
       <p:sp>
         <p:nvSpPr>
           <p:cNvPr id="2" name="TextBox 1"/>
@@ -7063,6 +7244,7 @@
           <a:lstStyle/>
           <a:p>
             <a:pPr algn="ctr"/>
+            <a:endParaRPr/>
           </a:p>
         </p:txBody>
       </p:sp>
@@ -7108,6 +7290,7 @@
           <a:lstStyle/>
           <a:p>
             <a:pPr algn="ctr"/>
+            <a:endParaRPr/>
           </a:p>
         </p:txBody>
       </p:sp>
@@ -7309,12 +7492,19 @@
           <a:lstStyle/>
           <a:p>
             <a:pPr algn="ctr"/>
+            <a:endParaRPr/>
           </a:p>
         </p:txBody>
       </p:sp>
       <p:pic>
         <p:nvPicPr>
-          <p:cNvPr id="8" name="Picture 7" descr="jenkins_build_success_live.png"/>
+          <p:cNvPr id="10" name="Picture 9">
+            <a:extLst>
+              <a:ext uri="{FF2B5EF4-FFF2-40B4-BE49-F238E27FC236}">
+                <a16:creationId xmlns:a16="http://schemas.microsoft.com/office/drawing/2014/main" id="{20293E02-B906-278D-D238-340C9A6A7DD4}"/>
+              </a:ext>
+            </a:extLst>
+          </p:cNvPr>
           <p:cNvPicPr>
             <a:picLocks noChangeAspect="1"/>
           </p:cNvPicPr>
@@ -7328,8 +7518,8 @@
         </p:blipFill>
         <p:spPr>
           <a:xfrm>
-            <a:off x="5897880" y="1874519"/>
-            <a:ext cx="5394960" cy="2355026"/>
+            <a:off x="5760720" y="2280719"/>
+            <a:ext cx="5669280" cy="2931361"/>
           </a:xfrm>
           <a:prstGeom prst="rect">
             <a:avLst/>
@@ -7345,7 +7535,7 @@
 </file>
 
 <file path=ppt/slides/slide7.xml><?xml version="1.0" encoding="utf-8"?>
-<p:sld xmlns:a="http://schemas.openxmlformats.org/drawingml/2006/main" xmlns:p="http://schemas.openxmlformats.org/presentationml/2006/main" xmlns:r="http://schemas.openxmlformats.org/officeDocument/2006/relationships">
+<p:sld xmlns:a="http://schemas.openxmlformats.org/drawingml/2006/main" xmlns:r="http://schemas.openxmlformats.org/officeDocument/2006/relationships" xmlns:p="http://schemas.openxmlformats.org/presentationml/2006/main">
   <p:cSld>
     <p:spTree>
       <p:nvGrpSpPr>
@@ -7353,7 +7543,14 @@
         <p:cNvGrpSpPr/>
         <p:nvPr/>
       </p:nvGrpSpPr>
-      <p:grpSpPr/>
+      <p:grpSpPr>
+        <a:xfrm>
+          <a:off x="0" y="0"/>
+          <a:ext cx="0" cy="0"/>
+          <a:chOff x="0" y="0"/>
+          <a:chExt cx="0" cy="0"/>
+        </a:xfrm>
+      </p:grpSpPr>
       <p:sp>
         <p:nvSpPr>
           <p:cNvPr id="2" name="TextBox 1"/>
@@ -7468,6 +7665,7 @@
           <a:lstStyle/>
           <a:p>
             <a:pPr algn="ctr"/>
+            <a:endParaRPr/>
           </a:p>
         </p:txBody>
       </p:sp>
@@ -7513,6 +7711,7 @@
           <a:lstStyle/>
           <a:p>
             <a:pPr algn="ctr"/>
+            <a:endParaRPr/>
           </a:p>
         </p:txBody>
       </p:sp>
@@ -7714,6 +7913,7 @@
           <a:lstStyle/>
           <a:p>
             <a:pPr algn="ctr"/>
+            <a:endParaRPr/>
           </a:p>
         </p:txBody>
       </p:sp>
@@ -7733,8 +7933,38 @@
         </p:blipFill>
         <p:spPr>
           <a:xfrm>
-            <a:off x="6080760" y="2011680"/>
+            <a:off x="5897880" y="584835"/>
             <a:ext cx="5212080" cy="3231490"/>
+          </a:xfrm>
+          <a:prstGeom prst="rect">
+            <a:avLst/>
+          </a:prstGeom>
+        </p:spPr>
+      </p:pic>
+      <p:pic>
+        <p:nvPicPr>
+          <p:cNvPr id="10" name="Picture 9">
+            <a:extLst>
+              <a:ext uri="{FF2B5EF4-FFF2-40B4-BE49-F238E27FC236}">
+                <a16:creationId xmlns:a16="http://schemas.microsoft.com/office/drawing/2014/main" id="{DEB5341B-1C71-6C95-AD6E-3710A753F23A}"/>
+              </a:ext>
+            </a:extLst>
+          </p:cNvPr>
+          <p:cNvPicPr>
+            <a:picLocks noChangeAspect="1"/>
+          </p:cNvPicPr>
+          <p:nvPr/>
+        </p:nvPicPr>
+        <p:blipFill>
+          <a:blip r:embed="rId3"/>
+          <a:stretch>
+            <a:fillRect/>
+          </a:stretch>
+        </p:blipFill>
+        <p:spPr>
+          <a:xfrm>
+            <a:off x="1643434" y="3977640"/>
+            <a:ext cx="8326012" cy="1333686"/>
           </a:xfrm>
           <a:prstGeom prst="rect">
             <a:avLst/>
@@ -7750,7 +7980,7 @@
 </file>
 
 <file path=ppt/slides/slide8.xml><?xml version="1.0" encoding="utf-8"?>
-<p:sld xmlns:a="http://schemas.openxmlformats.org/drawingml/2006/main" xmlns:p="http://schemas.openxmlformats.org/presentationml/2006/main" xmlns:r="http://schemas.openxmlformats.org/officeDocument/2006/relationships">
+<p:sld xmlns:a="http://schemas.openxmlformats.org/drawingml/2006/main" xmlns:r="http://schemas.openxmlformats.org/officeDocument/2006/relationships" xmlns:p="http://schemas.openxmlformats.org/presentationml/2006/main">
   <p:cSld>
     <p:spTree>
       <p:nvGrpSpPr>
@@ -7758,7 +7988,14 @@
         <p:cNvGrpSpPr/>
         <p:nvPr/>
       </p:nvGrpSpPr>
-      <p:grpSpPr/>
+      <p:grpSpPr>
+        <a:xfrm>
+          <a:off x="0" y="0"/>
+          <a:ext cx="0" cy="0"/>
+          <a:chOff x="0" y="0"/>
+          <a:chExt cx="0" cy="0"/>
+        </a:xfrm>
+      </p:grpSpPr>
       <p:sp>
         <p:nvSpPr>
           <p:cNvPr id="2" name="TextBox 1"/>
@@ -7873,6 +8110,7 @@
           <a:lstStyle/>
           <a:p>
             <a:pPr algn="ctr"/>
+            <a:endParaRPr/>
           </a:p>
         </p:txBody>
       </p:sp>
@@ -7918,6 +8156,7 @@
           <a:lstStyle/>
           <a:p>
             <a:pPr algn="ctr"/>
+            <a:endParaRPr/>
           </a:p>
         </p:txBody>
       </p:sp>
@@ -8143,6 +8382,7 @@
           <a:lstStyle/>
           <a:p>
             <a:pPr algn="ctr"/>
+            <a:endParaRPr/>
           </a:p>
         </p:txBody>
       </p:sp>
@@ -8179,7 +8419,7 @@
 </file>
 
 <file path=ppt/slides/slide9.xml><?xml version="1.0" encoding="utf-8"?>
-<p:sld xmlns:a="http://schemas.openxmlformats.org/drawingml/2006/main" xmlns:p="http://schemas.openxmlformats.org/presentationml/2006/main" xmlns:r="http://schemas.openxmlformats.org/officeDocument/2006/relationships">
+<p:sld xmlns:a="http://schemas.openxmlformats.org/drawingml/2006/main" xmlns:r="http://schemas.openxmlformats.org/officeDocument/2006/relationships" xmlns:p="http://schemas.openxmlformats.org/presentationml/2006/main">
   <p:cSld>
     <p:spTree>
       <p:nvGrpSpPr>
@@ -8187,7 +8427,14 @@
         <p:cNvGrpSpPr/>
         <p:nvPr/>
       </p:nvGrpSpPr>
-      <p:grpSpPr/>
+      <p:grpSpPr>
+        <a:xfrm>
+          <a:off x="0" y="0"/>
+          <a:ext cx="0" cy="0"/>
+          <a:chOff x="0" y="0"/>
+          <a:chExt cx="0" cy="0"/>
+        </a:xfrm>
+      </p:grpSpPr>
       <p:sp>
         <p:nvSpPr>
           <p:cNvPr id="2" name="TextBox 1"/>
@@ -8302,6 +8549,7 @@
           <a:lstStyle/>
           <a:p>
             <a:pPr algn="ctr"/>
+            <a:endParaRPr/>
           </a:p>
         </p:txBody>
       </p:sp>
@@ -8347,6 +8595,7 @@
           <a:lstStyle/>
           <a:p>
             <a:pPr algn="ctr"/>
+            <a:endParaRPr/>
           </a:p>
         </p:txBody>
       </p:sp>
@@ -8548,12 +8797,19 @@
           <a:lstStyle/>
           <a:p>
             <a:pPr algn="ctr"/>
+            <a:endParaRPr/>
           </a:p>
         </p:txBody>
       </p:sp>
       <p:pic>
         <p:nvPicPr>
-          <p:cNvPr id="8" name="Picture 7" descr="telegram_notification.png"/>
+          <p:cNvPr id="10" name="Picture 9">
+            <a:extLst>
+              <a:ext uri="{FF2B5EF4-FFF2-40B4-BE49-F238E27FC236}">
+                <a16:creationId xmlns:a16="http://schemas.microsoft.com/office/drawing/2014/main" id="{AE7A94BB-38F3-BA23-E39F-09AE0562E8CE}"/>
+              </a:ext>
+            </a:extLst>
+          </p:cNvPr>
           <p:cNvPicPr>
             <a:picLocks noChangeAspect="1"/>
           </p:cNvPicPr>
@@ -8567,8 +8823,8 @@
         </p:blipFill>
         <p:spPr>
           <a:xfrm>
-            <a:off x="6080760" y="2011680"/>
-            <a:ext cx="5212080" cy="4039362"/>
+            <a:off x="6511400" y="2209800"/>
+            <a:ext cx="4071143" cy="3164205"/>
           </a:xfrm>
           <a:prstGeom prst="rect">
             <a:avLst/>

--- a/Assignment.pptx
+++ b/Assignment.pptx
@@ -5,20 +5,20 @@
     <p:sldMasterId id="2147483648" r:id="rId1"/>
   </p:sldMasterIdLst>
   <p:sldIdLst>
-    <p:sldId id="256" r:id="rId2"/>
-    <p:sldId id="257" r:id="rId3"/>
-    <p:sldId id="258" r:id="rId4"/>
-    <p:sldId id="259" r:id="rId5"/>
-    <p:sldId id="260" r:id="rId6"/>
-    <p:sldId id="261" r:id="rId7"/>
-    <p:sldId id="262" r:id="rId8"/>
-    <p:sldId id="263" r:id="rId9"/>
-    <p:sldId id="264" r:id="rId10"/>
-    <p:sldId id="265" r:id="rId11"/>
-    <p:sldId id="266" r:id="rId12"/>
-    <p:sldId id="267" r:id="rId13"/>
+    <p:sldId id="256" r:id="rId7"/>
+    <p:sldId id="257" r:id="rId8"/>
+    <p:sldId id="258" r:id="rId9"/>
+    <p:sldId id="259" r:id="rId10"/>
+    <p:sldId id="260" r:id="rId11"/>
+    <p:sldId id="261" r:id="rId12"/>
+    <p:sldId id="262" r:id="rId13"/>
+    <p:sldId id="263" r:id="rId14"/>
+    <p:sldId id="264" r:id="rId15"/>
+    <p:sldId id="265" r:id="rId16"/>
+    <p:sldId id="266" r:id="rId17"/>
+    <p:sldId id="267" r:id="rId18"/>
   </p:sldIdLst>
-  <p:sldSz cx="12192000" cy="6858000"/>
+  <p:sldSz cx="12191695" cy="6858000" type="screen4x3"/>
   <p:notesSz cx="6858000" cy="9144000"/>
   <p:defaultTextStyle>
     <a:defPPr>
@@ -115,22 +115,6 @@
       </a:defRPr>
     </a:lvl9pPr>
   </p:defaultTextStyle>
-  <p:extLst>
-    <p:ext uri="{EFAFB233-063F-42B5-8137-9DF3F51BA10A}">
-      <p15:sldGuideLst xmlns:p15="http://schemas.microsoft.com/office/powerpoint/2012/main">
-        <p15:guide id="1" orient="horz" pos="2160">
-          <p15:clr>
-            <a:srgbClr val="A4A3A4"/>
-          </p15:clr>
-        </p15:guide>
-        <p15:guide id="2" pos="2880">
-          <p15:clr>
-            <a:srgbClr val="A4A3A4"/>
-          </p15:clr>
-        </p15:guide>
-      </p15:sldGuideLst>
-    </p:ext>
-  </p:extLst>
 </p:presentation>
 </file>
 
@@ -172,9 +156,10 @@
           <a:lstStyle/>
           <a:p>
             <a:r>
-              <a:rPr lang="en-US"/>
+              <a:rPr lang="en-US" smtClean="0"/>
               <a:t>Click to edit Master title style</a:t>
             </a:r>
+            <a:endParaRPr lang="en-US"/>
           </a:p>
         </p:txBody>
       </p:sp>
@@ -290,9 +275,10 @@
           </a:lstStyle>
           <a:p>
             <a:r>
-              <a:rPr lang="en-US"/>
+              <a:rPr lang="en-US" smtClean="0"/>
               <a:t>Click to edit Master subtitle style</a:t>
             </a:r>
+            <a:endParaRPr lang="en-US"/>
           </a:p>
         </p:txBody>
       </p:sp>
@@ -313,7 +299,7 @@
           <a:p>
             <a:fld id="{5BCAD085-E8A6-8845-BD4E-CB4CCA059FC4}" type="datetimeFigureOut">
               <a:rPr lang="en-US" smtClean="0"/>
-              <a:t>10/29/2026</a:t>
+              <a:t>1/27/13</a:t>
             </a:fld>
             <a:endParaRPr lang="en-US"/>
           </a:p>
@@ -407,9 +393,10 @@
           <a:lstStyle/>
           <a:p>
             <a:r>
-              <a:rPr lang="en-US"/>
+              <a:rPr lang="en-US" smtClean="0"/>
               <a:t>Click to edit Master title style</a:t>
             </a:r>
+            <a:endParaRPr lang="en-US"/>
           </a:p>
         </p:txBody>
       </p:sp>
@@ -430,37 +417,38 @@
           <a:p>
             <a:pPr lvl="0"/>
             <a:r>
-              <a:rPr lang="en-US"/>
+              <a:rPr lang="en-US" smtClean="0"/>
               <a:t>Click to edit Master text styles</a:t>
             </a:r>
           </a:p>
           <a:p>
             <a:pPr lvl="1"/>
             <a:r>
-              <a:rPr lang="en-US"/>
+              <a:rPr lang="en-US" smtClean="0"/>
               <a:t>Second level</a:t>
             </a:r>
           </a:p>
           <a:p>
             <a:pPr lvl="2"/>
             <a:r>
-              <a:rPr lang="en-US"/>
+              <a:rPr lang="en-US" smtClean="0"/>
               <a:t>Third level</a:t>
             </a:r>
           </a:p>
           <a:p>
             <a:pPr lvl="3"/>
             <a:r>
-              <a:rPr lang="en-US"/>
+              <a:rPr lang="en-US" smtClean="0"/>
               <a:t>Fourth level</a:t>
             </a:r>
           </a:p>
           <a:p>
             <a:pPr lvl="4"/>
             <a:r>
-              <a:rPr lang="en-US"/>
+              <a:rPr lang="en-US" smtClean="0"/>
               <a:t>Fifth level</a:t>
             </a:r>
+            <a:endParaRPr lang="en-US"/>
           </a:p>
         </p:txBody>
       </p:sp>
@@ -481,7 +469,7 @@
           <a:p>
             <a:fld id="{5BCAD085-E8A6-8845-BD4E-CB4CCA059FC4}" type="datetimeFigureOut">
               <a:rPr lang="en-US" smtClean="0"/>
-              <a:t>10/29/2026</a:t>
+              <a:t>1/27/13</a:t>
             </a:fld>
             <a:endParaRPr lang="en-US"/>
           </a:p>
@@ -580,9 +568,10 @@
           <a:lstStyle/>
           <a:p>
             <a:r>
-              <a:rPr lang="en-US"/>
+              <a:rPr lang="en-US" smtClean="0"/>
               <a:t>Click to edit Master title style</a:t>
             </a:r>
+            <a:endParaRPr lang="en-US"/>
           </a:p>
         </p:txBody>
       </p:sp>
@@ -608,37 +597,38 @@
           <a:p>
             <a:pPr lvl="0"/>
             <a:r>
-              <a:rPr lang="en-US"/>
+              <a:rPr lang="en-US" smtClean="0"/>
               <a:t>Click to edit Master text styles</a:t>
             </a:r>
           </a:p>
           <a:p>
             <a:pPr lvl="1"/>
             <a:r>
-              <a:rPr lang="en-US"/>
+              <a:rPr lang="en-US" smtClean="0"/>
               <a:t>Second level</a:t>
             </a:r>
           </a:p>
           <a:p>
             <a:pPr lvl="2"/>
             <a:r>
-              <a:rPr lang="en-US"/>
+              <a:rPr lang="en-US" smtClean="0"/>
               <a:t>Third level</a:t>
             </a:r>
           </a:p>
           <a:p>
             <a:pPr lvl="3"/>
             <a:r>
-              <a:rPr lang="en-US"/>
+              <a:rPr lang="en-US" smtClean="0"/>
               <a:t>Fourth level</a:t>
             </a:r>
           </a:p>
           <a:p>
             <a:pPr lvl="4"/>
             <a:r>
-              <a:rPr lang="en-US"/>
+              <a:rPr lang="en-US" smtClean="0"/>
               <a:t>Fifth level</a:t>
             </a:r>
+            <a:endParaRPr lang="en-US"/>
           </a:p>
         </p:txBody>
       </p:sp>
@@ -659,7 +649,7 @@
           <a:p>
             <a:fld id="{5BCAD085-E8A6-8845-BD4E-CB4CCA059FC4}" type="datetimeFigureOut">
               <a:rPr lang="en-US" smtClean="0"/>
-              <a:t>10/29/2026</a:t>
+              <a:t>1/27/13</a:t>
             </a:fld>
             <a:endParaRPr lang="en-US"/>
           </a:p>
@@ -753,9 +743,10 @@
           <a:lstStyle/>
           <a:p>
             <a:r>
-              <a:rPr lang="en-US"/>
+              <a:rPr lang="en-US" smtClean="0"/>
               <a:t>Click to edit Master title style</a:t>
             </a:r>
+            <a:endParaRPr lang="en-US"/>
           </a:p>
         </p:txBody>
       </p:sp>
@@ -776,37 +767,38 @@
           <a:p>
             <a:pPr lvl="0"/>
             <a:r>
-              <a:rPr lang="en-US"/>
+              <a:rPr lang="en-US" smtClean="0"/>
               <a:t>Click to edit Master text styles</a:t>
             </a:r>
           </a:p>
           <a:p>
             <a:pPr lvl="1"/>
             <a:r>
-              <a:rPr lang="en-US"/>
+              <a:rPr lang="en-US" smtClean="0"/>
               <a:t>Second level</a:t>
             </a:r>
           </a:p>
           <a:p>
             <a:pPr lvl="2"/>
             <a:r>
-              <a:rPr lang="en-US"/>
+              <a:rPr lang="en-US" smtClean="0"/>
               <a:t>Third level</a:t>
             </a:r>
           </a:p>
           <a:p>
             <a:pPr lvl="3"/>
             <a:r>
-              <a:rPr lang="en-US"/>
+              <a:rPr lang="en-US" smtClean="0"/>
               <a:t>Fourth level</a:t>
             </a:r>
           </a:p>
           <a:p>
             <a:pPr lvl="4"/>
             <a:r>
-              <a:rPr lang="en-US"/>
+              <a:rPr lang="en-US" smtClean="0"/>
               <a:t>Fifth level</a:t>
             </a:r>
+            <a:endParaRPr lang="en-US"/>
           </a:p>
         </p:txBody>
       </p:sp>
@@ -827,7 +819,7 @@
           <a:p>
             <a:fld id="{5BCAD085-E8A6-8845-BD4E-CB4CCA059FC4}" type="datetimeFigureOut">
               <a:rPr lang="en-US" smtClean="0"/>
-              <a:t>10/29/2026</a:t>
+              <a:t>1/27/13</a:t>
             </a:fld>
             <a:endParaRPr lang="en-US"/>
           </a:p>
@@ -930,9 +922,10 @@
           </a:lstStyle>
           <a:p>
             <a:r>
-              <a:rPr lang="en-US"/>
+              <a:rPr lang="en-US" smtClean="0"/>
               <a:t>Click to edit Master title style</a:t>
             </a:r>
+            <a:endParaRPr lang="en-US"/>
           </a:p>
         </p:txBody>
       </p:sp>
@@ -1049,7 +1042,7 @@
           <a:p>
             <a:pPr lvl="0"/>
             <a:r>
-              <a:rPr lang="en-US"/>
+              <a:rPr lang="en-US" smtClean="0"/>
               <a:t>Click to edit Master text styles</a:t>
             </a:r>
           </a:p>
@@ -1072,7 +1065,7 @@
           <a:p>
             <a:fld id="{5BCAD085-E8A6-8845-BD4E-CB4CCA059FC4}" type="datetimeFigureOut">
               <a:rPr lang="en-US" smtClean="0"/>
-              <a:t>10/29/2026</a:t>
+              <a:t>1/27/13</a:t>
             </a:fld>
             <a:endParaRPr lang="en-US"/>
           </a:p>
@@ -1166,9 +1159,10 @@
           <a:lstStyle/>
           <a:p>
             <a:r>
-              <a:rPr lang="en-US"/>
+              <a:rPr lang="en-US" smtClean="0"/>
               <a:t>Click to edit Master title style</a:t>
             </a:r>
+            <a:endParaRPr lang="en-US"/>
           </a:p>
         </p:txBody>
       </p:sp>
@@ -1222,37 +1216,38 @@
           <a:p>
             <a:pPr lvl="0"/>
             <a:r>
-              <a:rPr lang="en-US"/>
+              <a:rPr lang="en-US" smtClean="0"/>
               <a:t>Click to edit Master text styles</a:t>
             </a:r>
           </a:p>
           <a:p>
             <a:pPr lvl="1"/>
             <a:r>
-              <a:rPr lang="en-US"/>
+              <a:rPr lang="en-US" smtClean="0"/>
               <a:t>Second level</a:t>
             </a:r>
           </a:p>
           <a:p>
             <a:pPr lvl="2"/>
             <a:r>
-              <a:rPr lang="en-US"/>
+              <a:rPr lang="en-US" smtClean="0"/>
               <a:t>Third level</a:t>
             </a:r>
           </a:p>
           <a:p>
             <a:pPr lvl="3"/>
             <a:r>
-              <a:rPr lang="en-US"/>
+              <a:rPr lang="en-US" smtClean="0"/>
               <a:t>Fourth level</a:t>
             </a:r>
           </a:p>
           <a:p>
             <a:pPr lvl="4"/>
             <a:r>
-              <a:rPr lang="en-US"/>
+              <a:rPr lang="en-US" smtClean="0"/>
               <a:t>Fifth level</a:t>
             </a:r>
+            <a:endParaRPr lang="en-US"/>
           </a:p>
         </p:txBody>
       </p:sp>
@@ -1306,37 +1301,38 @@
           <a:p>
             <a:pPr lvl="0"/>
             <a:r>
-              <a:rPr lang="en-US"/>
+              <a:rPr lang="en-US" smtClean="0"/>
               <a:t>Click to edit Master text styles</a:t>
             </a:r>
           </a:p>
           <a:p>
             <a:pPr lvl="1"/>
             <a:r>
-              <a:rPr lang="en-US"/>
+              <a:rPr lang="en-US" smtClean="0"/>
               <a:t>Second level</a:t>
             </a:r>
           </a:p>
           <a:p>
             <a:pPr lvl="2"/>
             <a:r>
-              <a:rPr lang="en-US"/>
+              <a:rPr lang="en-US" smtClean="0"/>
               <a:t>Third level</a:t>
             </a:r>
           </a:p>
           <a:p>
             <a:pPr lvl="3"/>
             <a:r>
-              <a:rPr lang="en-US"/>
+              <a:rPr lang="en-US" smtClean="0"/>
               <a:t>Fourth level</a:t>
             </a:r>
           </a:p>
           <a:p>
             <a:pPr lvl="4"/>
             <a:r>
-              <a:rPr lang="en-US"/>
+              <a:rPr lang="en-US" smtClean="0"/>
               <a:t>Fifth level</a:t>
             </a:r>
+            <a:endParaRPr lang="en-US"/>
           </a:p>
         </p:txBody>
       </p:sp>
@@ -1357,7 +1353,7 @@
           <a:p>
             <a:fld id="{5BCAD085-E8A6-8845-BD4E-CB4CCA059FC4}" type="datetimeFigureOut">
               <a:rPr lang="en-US" smtClean="0"/>
-              <a:t>10/29/2026</a:t>
+              <a:t>1/27/13</a:t>
             </a:fld>
             <a:endParaRPr lang="en-US"/>
           </a:p>
@@ -1455,9 +1451,10 @@
           </a:lstStyle>
           <a:p>
             <a:r>
-              <a:rPr lang="en-US"/>
+              <a:rPr lang="en-US" smtClean="0"/>
               <a:t>Click to edit Master title style</a:t>
             </a:r>
+            <a:endParaRPr lang="en-US"/>
           </a:p>
         </p:txBody>
       </p:sp>
@@ -1520,7 +1517,7 @@
           <a:p>
             <a:pPr lvl="0"/>
             <a:r>
-              <a:rPr lang="en-US"/>
+              <a:rPr lang="en-US" smtClean="0"/>
               <a:t>Click to edit Master text styles</a:t>
             </a:r>
           </a:p>
@@ -1576,37 +1573,38 @@
           <a:p>
             <a:pPr lvl="0"/>
             <a:r>
-              <a:rPr lang="en-US"/>
+              <a:rPr lang="en-US" smtClean="0"/>
               <a:t>Click to edit Master text styles</a:t>
             </a:r>
           </a:p>
           <a:p>
             <a:pPr lvl="1"/>
             <a:r>
-              <a:rPr lang="en-US"/>
+              <a:rPr lang="en-US" smtClean="0"/>
               <a:t>Second level</a:t>
             </a:r>
           </a:p>
           <a:p>
             <a:pPr lvl="2"/>
             <a:r>
-              <a:rPr lang="en-US"/>
+              <a:rPr lang="en-US" smtClean="0"/>
               <a:t>Third level</a:t>
             </a:r>
           </a:p>
           <a:p>
             <a:pPr lvl="3"/>
             <a:r>
-              <a:rPr lang="en-US"/>
+              <a:rPr lang="en-US" smtClean="0"/>
               <a:t>Fourth level</a:t>
             </a:r>
           </a:p>
           <a:p>
             <a:pPr lvl="4"/>
             <a:r>
-              <a:rPr lang="en-US"/>
+              <a:rPr lang="en-US" smtClean="0"/>
               <a:t>Fifth level</a:t>
             </a:r>
+            <a:endParaRPr lang="en-US"/>
           </a:p>
         </p:txBody>
       </p:sp>
@@ -1669,7 +1667,7 @@
           <a:p>
             <a:pPr lvl="0"/>
             <a:r>
-              <a:rPr lang="en-US"/>
+              <a:rPr lang="en-US" smtClean="0"/>
               <a:t>Click to edit Master text styles</a:t>
             </a:r>
           </a:p>
@@ -1725,37 +1723,38 @@
           <a:p>
             <a:pPr lvl="0"/>
             <a:r>
-              <a:rPr lang="en-US"/>
+              <a:rPr lang="en-US" smtClean="0"/>
               <a:t>Click to edit Master text styles</a:t>
             </a:r>
           </a:p>
           <a:p>
             <a:pPr lvl="1"/>
             <a:r>
-              <a:rPr lang="en-US"/>
+              <a:rPr lang="en-US" smtClean="0"/>
               <a:t>Second level</a:t>
             </a:r>
           </a:p>
           <a:p>
             <a:pPr lvl="2"/>
             <a:r>
-              <a:rPr lang="en-US"/>
+              <a:rPr lang="en-US" smtClean="0"/>
               <a:t>Third level</a:t>
             </a:r>
           </a:p>
           <a:p>
             <a:pPr lvl="3"/>
             <a:r>
-              <a:rPr lang="en-US"/>
+              <a:rPr lang="en-US" smtClean="0"/>
               <a:t>Fourth level</a:t>
             </a:r>
           </a:p>
           <a:p>
             <a:pPr lvl="4"/>
             <a:r>
-              <a:rPr lang="en-US"/>
+              <a:rPr lang="en-US" smtClean="0"/>
               <a:t>Fifth level</a:t>
             </a:r>
+            <a:endParaRPr lang="en-US"/>
           </a:p>
         </p:txBody>
       </p:sp>
@@ -1776,7 +1775,7 @@
           <a:p>
             <a:fld id="{5BCAD085-E8A6-8845-BD4E-CB4CCA059FC4}" type="datetimeFigureOut">
               <a:rPr lang="en-US" smtClean="0"/>
-              <a:t>10/29/2026</a:t>
+              <a:t>1/27/13</a:t>
             </a:fld>
             <a:endParaRPr lang="en-US"/>
           </a:p>
@@ -1870,9 +1869,10 @@
           <a:lstStyle/>
           <a:p>
             <a:r>
-              <a:rPr lang="en-US"/>
+              <a:rPr lang="en-US" smtClean="0"/>
               <a:t>Click to edit Master title style</a:t>
             </a:r>
+            <a:endParaRPr lang="en-US"/>
           </a:p>
         </p:txBody>
       </p:sp>
@@ -1893,7 +1893,7 @@
           <a:p>
             <a:fld id="{5BCAD085-E8A6-8845-BD4E-CB4CCA059FC4}" type="datetimeFigureOut">
               <a:rPr lang="en-US" smtClean="0"/>
-              <a:t>10/29/2026</a:t>
+              <a:t>1/27/13</a:t>
             </a:fld>
             <a:endParaRPr lang="en-US"/>
           </a:p>
@@ -1988,7 +1988,7 @@
           <a:p>
             <a:fld id="{5BCAD085-E8A6-8845-BD4E-CB4CCA059FC4}" type="datetimeFigureOut">
               <a:rPr lang="en-US" smtClean="0"/>
-              <a:t>10/29/2026</a:t>
+              <a:t>1/27/13</a:t>
             </a:fld>
             <a:endParaRPr lang="en-US"/>
           </a:p>
@@ -2091,9 +2091,10 @@
           </a:lstStyle>
           <a:p>
             <a:r>
-              <a:rPr lang="en-US"/>
+              <a:rPr lang="en-US" smtClean="0"/>
               <a:t>Click to edit Master title style</a:t>
             </a:r>
+            <a:endParaRPr lang="en-US"/>
           </a:p>
         </p:txBody>
       </p:sp>
@@ -2147,37 +2148,38 @@
           <a:p>
             <a:pPr lvl="0"/>
             <a:r>
-              <a:rPr lang="en-US"/>
+              <a:rPr lang="en-US" smtClean="0"/>
               <a:t>Click to edit Master text styles</a:t>
             </a:r>
           </a:p>
           <a:p>
             <a:pPr lvl="1"/>
             <a:r>
-              <a:rPr lang="en-US"/>
+              <a:rPr lang="en-US" smtClean="0"/>
               <a:t>Second level</a:t>
             </a:r>
           </a:p>
           <a:p>
             <a:pPr lvl="2"/>
             <a:r>
-              <a:rPr lang="en-US"/>
+              <a:rPr lang="en-US" smtClean="0"/>
               <a:t>Third level</a:t>
             </a:r>
           </a:p>
           <a:p>
             <a:pPr lvl="3"/>
             <a:r>
-              <a:rPr lang="en-US"/>
+              <a:rPr lang="en-US" smtClean="0"/>
               <a:t>Fourth level</a:t>
             </a:r>
           </a:p>
           <a:p>
             <a:pPr lvl="4"/>
             <a:r>
-              <a:rPr lang="en-US"/>
+              <a:rPr lang="en-US" smtClean="0"/>
               <a:t>Fifth level</a:t>
             </a:r>
+            <a:endParaRPr lang="en-US"/>
           </a:p>
         </p:txBody>
       </p:sp>
@@ -2240,7 +2242,7 @@
           <a:p>
             <a:pPr lvl="0"/>
             <a:r>
-              <a:rPr lang="en-US"/>
+              <a:rPr lang="en-US" smtClean="0"/>
               <a:t>Click to edit Master text styles</a:t>
             </a:r>
           </a:p>
@@ -2263,7 +2265,7 @@
           <a:p>
             <a:fld id="{5BCAD085-E8A6-8845-BD4E-CB4CCA059FC4}" type="datetimeFigureOut">
               <a:rPr lang="en-US" smtClean="0"/>
-              <a:t>10/29/2026</a:t>
+              <a:t>1/27/13</a:t>
             </a:fld>
             <a:endParaRPr lang="en-US"/>
           </a:p>
@@ -2366,9 +2368,10 @@
           </a:lstStyle>
           <a:p>
             <a:r>
-              <a:rPr lang="en-US"/>
+              <a:rPr lang="en-US" smtClean="0"/>
               <a:t>Click to edit Master title style</a:t>
             </a:r>
+            <a:endParaRPr lang="en-US"/>
           </a:p>
         </p:txBody>
       </p:sp>
@@ -2492,7 +2495,7 @@
           <a:p>
             <a:pPr lvl="0"/>
             <a:r>
-              <a:rPr lang="en-US"/>
+              <a:rPr lang="en-US" smtClean="0"/>
               <a:t>Click to edit Master text styles</a:t>
             </a:r>
           </a:p>
@@ -2515,7 +2518,7 @@
           <a:p>
             <a:fld id="{5BCAD085-E8A6-8845-BD4E-CB4CCA059FC4}" type="datetimeFigureOut">
               <a:rPr lang="en-US" smtClean="0"/>
-              <a:t>10/29/2026</a:t>
+              <a:t>1/27/13</a:t>
             </a:fld>
             <a:endParaRPr lang="en-US"/>
           </a:p>
@@ -2624,9 +2627,10 @@
           <a:lstStyle/>
           <a:p>
             <a:r>
-              <a:rPr lang="en-US"/>
+              <a:rPr lang="en-US" smtClean="0"/>
               <a:t>Click to edit Master title style</a:t>
             </a:r>
+            <a:endParaRPr lang="en-US"/>
           </a:p>
         </p:txBody>
       </p:sp>
@@ -2657,37 +2661,38 @@
           <a:p>
             <a:pPr lvl="0"/>
             <a:r>
-              <a:rPr lang="en-US"/>
+              <a:rPr lang="en-US" smtClean="0"/>
               <a:t>Click to edit Master text styles</a:t>
             </a:r>
           </a:p>
           <a:p>
             <a:pPr lvl="1"/>
             <a:r>
-              <a:rPr lang="en-US"/>
+              <a:rPr lang="en-US" smtClean="0"/>
               <a:t>Second level</a:t>
             </a:r>
           </a:p>
           <a:p>
             <a:pPr lvl="2"/>
             <a:r>
-              <a:rPr lang="en-US"/>
+              <a:rPr lang="en-US" smtClean="0"/>
               <a:t>Third level</a:t>
             </a:r>
           </a:p>
           <a:p>
             <a:pPr lvl="3"/>
             <a:r>
-              <a:rPr lang="en-US"/>
+              <a:rPr lang="en-US" smtClean="0"/>
               <a:t>Fourth level</a:t>
             </a:r>
           </a:p>
           <a:p>
             <a:pPr lvl="4"/>
             <a:r>
-              <a:rPr lang="en-US"/>
+              <a:rPr lang="en-US" smtClean="0"/>
               <a:t>Fifth level</a:t>
             </a:r>
+            <a:endParaRPr lang="en-US"/>
           </a:p>
         </p:txBody>
       </p:sp>
@@ -2726,7 +2731,7 @@
           <a:p>
             <a:fld id="{5BCAD085-E8A6-8845-BD4E-CB4CCA059FC4}" type="datetimeFigureOut">
               <a:rPr lang="en-US" smtClean="0"/>
-              <a:t>10/29/2026</a:t>
+              <a:t>1/27/13</a:t>
             </a:fld>
             <a:endParaRPr lang="en-US"/>
           </a:p>
@@ -3085,7 +3090,7 @@
 </file>
 
 <file path=ppt/slides/slide1.xml><?xml version="1.0" encoding="utf-8"?>
-<p:sld xmlns:a="http://schemas.openxmlformats.org/drawingml/2006/main" xmlns:r="http://schemas.openxmlformats.org/officeDocument/2006/relationships" xmlns:p="http://schemas.openxmlformats.org/presentationml/2006/main">
+<p:sld xmlns:a="http://schemas.openxmlformats.org/drawingml/2006/main" xmlns:p="http://schemas.openxmlformats.org/presentationml/2006/main" xmlns:r="http://schemas.openxmlformats.org/officeDocument/2006/relationships">
   <p:cSld>
     <p:spTree>
       <p:nvGrpSpPr>
@@ -3093,14 +3098,7 @@
         <p:cNvGrpSpPr/>
         <p:nvPr/>
       </p:nvGrpSpPr>
-      <p:grpSpPr>
-        <a:xfrm>
-          <a:off x="0" y="0"/>
-          <a:ext cx="0" cy="0"/>
-          <a:chOff x="0" y="0"/>
-          <a:chExt cx="0" cy="0"/>
-        </a:xfrm>
-      </p:grpSpPr>
+      <p:grpSpPr/>
       <p:sp>
         <p:nvSpPr>
           <p:cNvPr id="2" name="Rectangle 1"/>
@@ -3141,7 +3139,6 @@
           <a:lstStyle/>
           <a:p>
             <a:pPr algn="ctr"/>
-            <a:endParaRPr/>
           </a:p>
         </p:txBody>
       </p:sp>
@@ -3187,7 +3184,6 @@
           <a:lstStyle/>
           <a:p>
             <a:pPr algn="ctr"/>
-            <a:endParaRPr/>
           </a:p>
         </p:txBody>
       </p:sp>
@@ -3354,7 +3350,7 @@
               </a:defRPr>
             </a:pPr>
             <a:r>
-              <a:t>Verification: Jenkins Pipeline #4 Passed  |  Live Cluster IP: 54.253.170.114  |  October 2026</a:t>
+              <a:t>Verification: Jenkins Pipeline #4 Passed  |  Live Cluster IP: 3.104.55.68  |  October 2026</a:t>
             </a:r>
           </a:p>
         </p:txBody>
@@ -3368,7 +3364,7 @@
 </file>
 
 <file path=ppt/slides/slide10.xml><?xml version="1.0" encoding="utf-8"?>
-<p:sld xmlns:a="http://schemas.openxmlformats.org/drawingml/2006/main" xmlns:r="http://schemas.openxmlformats.org/officeDocument/2006/relationships" xmlns:p="http://schemas.openxmlformats.org/presentationml/2006/main">
+<p:sld xmlns:a="http://schemas.openxmlformats.org/drawingml/2006/main" xmlns:p="http://schemas.openxmlformats.org/presentationml/2006/main" xmlns:r="http://schemas.openxmlformats.org/officeDocument/2006/relationships">
   <p:cSld>
     <p:spTree>
       <p:nvGrpSpPr>
@@ -3376,14 +3372,7 @@
         <p:cNvGrpSpPr/>
         <p:nvPr/>
       </p:nvGrpSpPr>
-      <p:grpSpPr>
-        <a:xfrm>
-          <a:off x="0" y="0"/>
-          <a:ext cx="0" cy="0"/>
-          <a:chOff x="0" y="0"/>
-          <a:chExt cx="0" cy="0"/>
-        </a:xfrm>
-      </p:grpSpPr>
+      <p:grpSpPr/>
       <p:sp>
         <p:nvSpPr>
           <p:cNvPr id="2" name="TextBox 1"/>
@@ -3498,7 +3487,6 @@
           <a:lstStyle/>
           <a:p>
             <a:pPr algn="ctr"/>
-            <a:endParaRPr/>
           </a:p>
         </p:txBody>
       </p:sp>
@@ -3544,7 +3532,6 @@
           <a:lstStyle/>
           <a:p>
             <a:pPr algn="ctr"/>
-            <a:endParaRPr/>
           </a:p>
         </p:txBody>
       </p:sp>
@@ -3587,7 +3574,7 @@
               <a:spcAft>
                 <a:spcPts val="200"/>
               </a:spcAft>
-              <a:defRPr sz="950" b="1">
+              <a:defRPr b="1" sz="950">
                 <a:solidFill>
                   <a:srgbClr val="DC2626"/>
                 </a:solidFill>
@@ -3607,7 +3594,7 @@
           </a:p>
           <a:p>
             <a:pPr>
-              <a:defRPr sz="950" b="1">
+              <a:defRPr b="1" sz="950">
                 <a:solidFill>
                   <a:srgbClr val="16A34A"/>
                 </a:solidFill>
@@ -3669,7 +3656,6 @@
           <a:lstStyle/>
           <a:p>
             <a:pPr algn="ctr"/>
-            <a:endParaRPr/>
           </a:p>
         </p:txBody>
       </p:sp>
@@ -3712,7 +3698,7 @@
               <a:spcAft>
                 <a:spcPts val="200"/>
               </a:spcAft>
-              <a:defRPr sz="950" b="1">
+              <a:defRPr b="1" sz="950">
                 <a:solidFill>
                   <a:srgbClr val="DC2626"/>
                 </a:solidFill>
@@ -3732,7 +3718,7 @@
           </a:p>
           <a:p>
             <a:pPr>
-              <a:defRPr sz="950" b="1">
+              <a:defRPr b="1" sz="950">
                 <a:solidFill>
                   <a:srgbClr val="16A34A"/>
                 </a:solidFill>
@@ -3794,7 +3780,6 @@
           <a:lstStyle/>
           <a:p>
             <a:pPr algn="ctr"/>
-            <a:endParaRPr/>
           </a:p>
         </p:txBody>
       </p:sp>
@@ -3837,7 +3822,7 @@
               <a:spcAft>
                 <a:spcPts val="200"/>
               </a:spcAft>
-              <a:defRPr sz="950" b="1">
+              <a:defRPr b="1" sz="950">
                 <a:solidFill>
                   <a:srgbClr val="DC2626"/>
                 </a:solidFill>
@@ -3857,7 +3842,7 @@
           </a:p>
           <a:p>
             <a:pPr>
-              <a:defRPr sz="950" b="1">
+              <a:defRPr b="1" sz="950">
                 <a:solidFill>
                   <a:srgbClr val="16A34A"/>
                 </a:solidFill>
@@ -3919,7 +3904,6 @@
           <a:lstStyle/>
           <a:p>
             <a:pPr algn="ctr"/>
-            <a:endParaRPr/>
           </a:p>
         </p:txBody>
       </p:sp>
@@ -3962,7 +3946,7 @@
               <a:spcAft>
                 <a:spcPts val="200"/>
               </a:spcAft>
-              <a:defRPr sz="950" b="1">
+              <a:defRPr b="1" sz="950">
                 <a:solidFill>
                   <a:srgbClr val="DC2626"/>
                 </a:solidFill>
@@ -3982,7 +3966,7 @@
           </a:p>
           <a:p>
             <a:pPr>
-              <a:defRPr sz="950" b="1">
+              <a:defRPr b="1" sz="950">
                 <a:solidFill>
                   <a:srgbClr val="16A34A"/>
                 </a:solidFill>
@@ -4011,7 +3995,7 @@
 </file>
 
 <file path=ppt/slides/slide11.xml><?xml version="1.0" encoding="utf-8"?>
-<p:sld xmlns:a="http://schemas.openxmlformats.org/drawingml/2006/main" xmlns:r="http://schemas.openxmlformats.org/officeDocument/2006/relationships" xmlns:p="http://schemas.openxmlformats.org/presentationml/2006/main">
+<p:sld xmlns:a="http://schemas.openxmlformats.org/drawingml/2006/main" xmlns:p="http://schemas.openxmlformats.org/presentationml/2006/main" xmlns:r="http://schemas.openxmlformats.org/officeDocument/2006/relationships">
   <p:cSld>
     <p:spTree>
       <p:nvGrpSpPr>
@@ -4019,14 +4003,7 @@
         <p:cNvGrpSpPr/>
         <p:nvPr/>
       </p:nvGrpSpPr>
-      <p:grpSpPr>
-        <a:xfrm>
-          <a:off x="0" y="0"/>
-          <a:ext cx="0" cy="0"/>
-          <a:chOff x="0" y="0"/>
-          <a:chExt cx="0" cy="0"/>
-        </a:xfrm>
-      </p:grpSpPr>
+      <p:grpSpPr/>
       <p:sp>
         <p:nvSpPr>
           <p:cNvPr id="2" name="TextBox 1"/>
@@ -4141,7 +4118,6 @@
           <a:lstStyle/>
           <a:p>
             <a:pPr algn="ctr"/>
-            <a:endParaRPr/>
           </a:p>
         </p:txBody>
       </p:sp>
@@ -4187,7 +4163,6 @@
           <a:lstStyle/>
           <a:p>
             <a:pPr algn="ctr"/>
-            <a:endParaRPr/>
           </a:p>
         </p:txBody>
       </p:sp>
@@ -4238,7 +4213,7 @@
               </a:defRPr>
             </a:pPr>
             <a:r>
-              <a:t>•  Open browser: http://54.253.170.114</a:t>
+              <a:t>•  Open browser: http://3.104.55.68</a:t>
             </a:r>
           </a:p>
           <a:p>
@@ -4317,7 +4292,6 @@
           <a:lstStyle/>
           <a:p>
             <a:pPr algn="ctr"/>
-            <a:endParaRPr/>
           </a:p>
         </p:txBody>
       </p:sp>
@@ -4368,7 +4342,7 @@
               </a:defRPr>
             </a:pPr>
             <a:r>
-              <a:t>•  curl -s http://54.253.170.114/health  -&gt; Returns {"status": "healthy", "version": "1.0.0"}</a:t>
+              <a:t>•  curl -s http://3.104.55.68/health  -&gt; Returns {"status": "healthy", "version": "1.0.0"}</a:t>
             </a:r>
           </a:p>
           <a:p>
@@ -4384,7 +4358,7 @@
               </a:defRPr>
             </a:pPr>
             <a:r>
-              <a:t>•  curl -s http://54.253.170.114/api/info -&gt; Demonstrates round-robin hostname switching across replicas</a:t>
+              <a:t>•  curl -s http://3.104.55.68/api/info -&gt; Demonstrates round-robin hostname switching across replicas</a:t>
             </a:r>
           </a:p>
           <a:p>
@@ -4400,7 +4374,7 @@
               </a:defRPr>
             </a:pPr>
             <a:r>
-              <a:t>•  curl -s http://54.253.170.114/nginx-health -&gt; Confirms load balancer routing integrity</a:t>
+              <a:t>•  curl -s http://3.104.55.68/nginx-health -&gt; Confirms load balancer routing integrity</a:t>
             </a:r>
           </a:p>
         </p:txBody>
@@ -4447,7 +4421,6 @@
           <a:lstStyle/>
           <a:p>
             <a:pPr algn="ctr"/>
-            <a:endParaRPr/>
           </a:p>
         </p:txBody>
       </p:sp>
@@ -4577,7 +4550,6 @@
           <a:lstStyle/>
           <a:p>
             <a:pPr algn="ctr"/>
-            <a:endParaRPr/>
           </a:p>
         </p:txBody>
       </p:sp>
@@ -4628,7 +4600,7 @@
               </a:defRPr>
             </a:pPr>
             <a:r>
-              <a:t>•  ssh -i chamroeunsaran.pem ubuntu@54.253.170.114</a:t>
+              <a:t>•  ssh -i chamroeunsaran.pem ubuntu@3.104.55.68</a:t>
             </a:r>
           </a:p>
           <a:p>
@@ -4674,7 +4646,7 @@
 </file>
 
 <file path=ppt/slides/slide12.xml><?xml version="1.0" encoding="utf-8"?>
-<p:sld xmlns:a="http://schemas.openxmlformats.org/drawingml/2006/main" xmlns:r="http://schemas.openxmlformats.org/officeDocument/2006/relationships" xmlns:p="http://schemas.openxmlformats.org/presentationml/2006/main">
+<p:sld xmlns:a="http://schemas.openxmlformats.org/drawingml/2006/main" xmlns:p="http://schemas.openxmlformats.org/presentationml/2006/main" xmlns:r="http://schemas.openxmlformats.org/officeDocument/2006/relationships">
   <p:cSld>
     <p:spTree>
       <p:nvGrpSpPr>
@@ -4682,14 +4654,7 @@
         <p:cNvGrpSpPr/>
         <p:nvPr/>
       </p:nvGrpSpPr>
-      <p:grpSpPr>
-        <a:xfrm>
-          <a:off x="0" y="0"/>
-          <a:ext cx="0" cy="0"/>
-          <a:chOff x="0" y="0"/>
-          <a:chExt cx="0" cy="0"/>
-        </a:xfrm>
-      </p:grpSpPr>
+      <p:grpSpPr/>
       <p:sp>
         <p:nvSpPr>
           <p:cNvPr id="2" name="Rectangle 1"/>
@@ -4730,7 +4695,6 @@
           <a:lstStyle/>
           <a:p>
             <a:pPr algn="ctr"/>
-            <a:endParaRPr/>
           </a:p>
         </p:txBody>
       </p:sp>
@@ -4776,7 +4740,6 @@
           <a:lstStyle/>
           <a:p>
             <a:pPr algn="ctr"/>
-            <a:endParaRPr/>
           </a:p>
         </p:txBody>
       </p:sp>
@@ -4976,6 +4939,14 @@
           </a:p>
           <a:p>
             <a:br/>
+            <a:pPr algn="ctr">
+              <a:defRPr sz="1600" b="1">
+                <a:solidFill>
+                  <a:srgbClr val="0284C7"/>
+                </a:solidFill>
+                <a:latin typeface="Segoe UI"/>
+              </a:defRPr>
+            </a:pPr>
             <a:r>
               <a:t>Thank You!  —  Questions &amp; Discussion</a:t>
             </a:r>
@@ -4991,7 +4962,7 @@
 </file>
 
 <file path=ppt/slides/slide2.xml><?xml version="1.0" encoding="utf-8"?>
-<p:sld xmlns:a="http://schemas.openxmlformats.org/drawingml/2006/main" xmlns:r="http://schemas.openxmlformats.org/officeDocument/2006/relationships" xmlns:p="http://schemas.openxmlformats.org/presentationml/2006/main">
+<p:sld xmlns:a="http://schemas.openxmlformats.org/drawingml/2006/main" xmlns:p="http://schemas.openxmlformats.org/presentationml/2006/main" xmlns:r="http://schemas.openxmlformats.org/officeDocument/2006/relationships">
   <p:cSld>
     <p:spTree>
       <p:nvGrpSpPr>
@@ -4999,14 +4970,7 @@
         <p:cNvGrpSpPr/>
         <p:nvPr/>
       </p:nvGrpSpPr>
-      <p:grpSpPr>
-        <a:xfrm>
-          <a:off x="0" y="0"/>
-          <a:ext cx="0" cy="0"/>
-          <a:chOff x="0" y="0"/>
-          <a:chExt cx="0" cy="0"/>
-        </a:xfrm>
-      </p:grpSpPr>
+      <p:grpSpPr/>
       <p:sp>
         <p:nvSpPr>
           <p:cNvPr id="2" name="TextBox 1"/>
@@ -5121,7 +5085,6 @@
           <a:lstStyle/>
           <a:p>
             <a:pPr algn="ctr"/>
-            <a:endParaRPr/>
           </a:p>
         </p:txBody>
       </p:sp>
@@ -5167,7 +5130,6 @@
           <a:lstStyle/>
           <a:p>
             <a:pPr algn="ctr"/>
-            <a:endParaRPr/>
           </a:p>
         </p:txBody>
       </p:sp>
@@ -5313,7 +5275,6 @@
           <a:lstStyle/>
           <a:p>
             <a:pPr algn="ctr"/>
-            <a:endParaRPr/>
           </a:p>
         </p:txBody>
       </p:sp>
@@ -5459,7 +5420,6 @@
           <a:lstStyle/>
           <a:p>
             <a:pPr algn="ctr"/>
-            <a:endParaRPr/>
           </a:p>
         </p:txBody>
       </p:sp>
@@ -5605,7 +5565,6 @@
           <a:lstStyle/>
           <a:p>
             <a:pPr algn="ctr"/>
-            <a:endParaRPr/>
           </a:p>
         </p:txBody>
       </p:sp>
@@ -5718,7 +5677,7 @@
 </file>
 
 <file path=ppt/slides/slide3.xml><?xml version="1.0" encoding="utf-8"?>
-<p:sld xmlns:a="http://schemas.openxmlformats.org/drawingml/2006/main" xmlns:r="http://schemas.openxmlformats.org/officeDocument/2006/relationships" xmlns:p="http://schemas.openxmlformats.org/presentationml/2006/main">
+<p:sld xmlns:a="http://schemas.openxmlformats.org/drawingml/2006/main" xmlns:p="http://schemas.openxmlformats.org/presentationml/2006/main" xmlns:r="http://schemas.openxmlformats.org/officeDocument/2006/relationships">
   <p:cSld>
     <p:spTree>
       <p:nvGrpSpPr>
@@ -5726,14 +5685,7 @@
         <p:cNvGrpSpPr/>
         <p:nvPr/>
       </p:nvGrpSpPr>
-      <p:grpSpPr>
-        <a:xfrm>
-          <a:off x="0" y="0"/>
-          <a:ext cx="0" cy="0"/>
-          <a:chOff x="0" y="0"/>
-          <a:chExt cx="0" cy="0"/>
-        </a:xfrm>
-      </p:grpSpPr>
+      <p:grpSpPr/>
       <p:sp>
         <p:nvSpPr>
           <p:cNvPr id="2" name="TextBox 1"/>
@@ -5848,7 +5800,6 @@
           <a:lstStyle/>
           <a:p>
             <a:pPr algn="ctr"/>
-            <a:endParaRPr/>
           </a:p>
         </p:txBody>
       </p:sp>
@@ -5894,7 +5845,6 @@
           <a:lstStyle/>
           <a:p>
             <a:pPr algn="ctr"/>
-            <a:endParaRPr/>
           </a:p>
         </p:txBody>
       </p:sp>
@@ -6144,7 +6094,6 @@
           <a:lstStyle/>
           <a:p>
             <a:pPr algn="ctr"/>
-            <a:endParaRPr/>
           </a:p>
         </p:txBody>
       </p:sp>
@@ -6181,7 +6130,7 @@
 </file>
 
 <file path=ppt/slides/slide4.xml><?xml version="1.0" encoding="utf-8"?>
-<p:sld xmlns:a="http://schemas.openxmlformats.org/drawingml/2006/main" xmlns:r="http://schemas.openxmlformats.org/officeDocument/2006/relationships" xmlns:p="http://schemas.openxmlformats.org/presentationml/2006/main">
+<p:sld xmlns:a="http://schemas.openxmlformats.org/drawingml/2006/main" xmlns:p="http://schemas.openxmlformats.org/presentationml/2006/main" xmlns:r="http://schemas.openxmlformats.org/officeDocument/2006/relationships">
   <p:cSld>
     <p:spTree>
       <p:nvGrpSpPr>
@@ -6189,14 +6138,7 @@
         <p:cNvGrpSpPr/>
         <p:nvPr/>
       </p:nvGrpSpPr>
-      <p:grpSpPr>
-        <a:xfrm>
-          <a:off x="0" y="0"/>
-          <a:ext cx="0" cy="0"/>
-          <a:chOff x="0" y="0"/>
-          <a:chExt cx="0" cy="0"/>
-        </a:xfrm>
-      </p:grpSpPr>
+      <p:grpSpPr/>
       <p:sp>
         <p:nvSpPr>
           <p:cNvPr id="2" name="TextBox 1"/>
@@ -6311,7 +6253,6 @@
           <a:lstStyle/>
           <a:p>
             <a:pPr algn="ctr"/>
-            <a:endParaRPr/>
           </a:p>
         </p:txBody>
       </p:sp>
@@ -6357,7 +6298,6 @@
           <a:lstStyle/>
           <a:p>
             <a:pPr algn="ctr"/>
-            <a:endParaRPr/>
           </a:p>
         </p:txBody>
       </p:sp>
@@ -6559,7 +6499,6 @@
           <a:lstStyle/>
           <a:p>
             <a:pPr algn="ctr"/>
-            <a:endParaRPr/>
           </a:p>
         </p:txBody>
       </p:sp>
@@ -6596,7 +6535,7 @@
 </file>
 
 <file path=ppt/slides/slide5.xml><?xml version="1.0" encoding="utf-8"?>
-<p:sld xmlns:a="http://schemas.openxmlformats.org/drawingml/2006/main" xmlns:r="http://schemas.openxmlformats.org/officeDocument/2006/relationships" xmlns:p="http://schemas.openxmlformats.org/presentationml/2006/main">
+<p:sld xmlns:a="http://schemas.openxmlformats.org/drawingml/2006/main" xmlns:p="http://schemas.openxmlformats.org/presentationml/2006/main" xmlns:r="http://schemas.openxmlformats.org/officeDocument/2006/relationships">
   <p:cSld>
     <p:spTree>
       <p:nvGrpSpPr>
@@ -6604,14 +6543,7 @@
         <p:cNvGrpSpPr/>
         <p:nvPr/>
       </p:nvGrpSpPr>
-      <p:grpSpPr>
-        <a:xfrm>
-          <a:off x="0" y="0"/>
-          <a:ext cx="0" cy="0"/>
-          <a:chOff x="0" y="0"/>
-          <a:chExt cx="0" cy="0"/>
-        </a:xfrm>
-      </p:grpSpPr>
+      <p:grpSpPr/>
       <p:sp>
         <p:nvSpPr>
           <p:cNvPr id="2" name="TextBox 1"/>
@@ -6679,16 +6611,7 @@
               </a:defRPr>
             </a:pPr>
             <a:r>
-              <a:rPr dirty="0"/>
-              <a:t>Production </a:t>
-            </a:r>
-            <a:r>
-              <a:rPr dirty="0" err="1"/>
-              <a:t>Dockerfile</a:t>
-            </a:r>
-            <a:r>
-              <a:rPr dirty="0"/>
-              <a:t> &amp; Security Hardening</a:t>
+              <a:t>Production Dockerfile &amp; Security Hardening</a:t>
             </a:r>
           </a:p>
         </p:txBody>
@@ -6735,7 +6658,6 @@
           <a:lstStyle/>
           <a:p>
             <a:pPr algn="ctr"/>
-            <a:endParaRPr/>
           </a:p>
         </p:txBody>
       </p:sp>
@@ -6781,7 +6703,6 @@
           <a:lstStyle/>
           <a:p>
             <a:pPr algn="ctr"/>
-            <a:endParaRPr/>
           </a:p>
         </p:txBody>
       </p:sp>
@@ -6816,7 +6737,6 @@
               </a:defRPr>
             </a:pPr>
             <a:r>
-              <a:rPr dirty="0"/>
               <a:t>Containerization Standards</a:t>
             </a:r>
           </a:p>
@@ -6833,11 +6753,10 @@
               </a:defRPr>
             </a:pPr>
             <a:r>
-              <a:rPr dirty="0"/>
               <a:t>• Multi-Stage Build Pattern: </a:t>
             </a:r>
             <a:r>
-              <a:rPr b="0" dirty="0">
+              <a:rPr b="0">
                 <a:solidFill>
                   <a:srgbClr val="64748B"/>
                 </a:solidFill>
@@ -6858,64 +6777,15 @@
               </a:defRPr>
             </a:pPr>
             <a:r>
-              <a:rPr dirty="0"/>
               <a:t>• Non-Root Security Context: </a:t>
             </a:r>
             <a:r>
-              <a:rPr b="0" dirty="0">
+              <a:rPr b="0">
                 <a:solidFill>
                   <a:srgbClr val="64748B"/>
                 </a:solidFill>
               </a:rPr>
-              <a:t>Runs as dedicated </a:t>
-            </a:r>
-            <a:r>
-              <a:rPr b="0" dirty="0" err="1">
-                <a:solidFill>
-                  <a:srgbClr val="64748B"/>
-                </a:solidFill>
-              </a:rPr>
-              <a:t>appuser</a:t>
-            </a:r>
-            <a:r>
-              <a:rPr b="0" dirty="0">
-                <a:solidFill>
-                  <a:srgbClr val="64748B"/>
-                </a:solidFill>
-              </a:rPr>
-              <a:t> (UID 1000) with </a:t>
-            </a:r>
-            <a:r>
-              <a:rPr b="0" dirty="0" err="1">
-                <a:solidFill>
-                  <a:srgbClr val="64748B"/>
-                </a:solidFill>
-              </a:rPr>
-              <a:t>chown</a:t>
-            </a:r>
-            <a:r>
-              <a:rPr b="0" dirty="0">
-                <a:solidFill>
-                  <a:srgbClr val="64748B"/>
-                </a:solidFill>
-              </a:rPr>
-              <a:t> -R </a:t>
-            </a:r>
-            <a:r>
-              <a:rPr b="0" dirty="0" err="1">
-                <a:solidFill>
-                  <a:srgbClr val="64748B"/>
-                </a:solidFill>
-              </a:rPr>
-              <a:t>appuser:appuser</a:t>
-            </a:r>
-            <a:r>
-              <a:rPr b="0" dirty="0">
-                <a:solidFill>
-                  <a:srgbClr val="64748B"/>
-                </a:solidFill>
-              </a:rPr>
-              <a:t> /app to mitigate container breakout risks.</a:t>
+              <a:t>Runs as dedicated appuser (UID 1000) with chown -R appuser:appuser /app to mitigate container breakout risks.</a:t>
             </a:r>
           </a:p>
           <a:p>
@@ -6931,19 +6801,10 @@
               </a:defRPr>
             </a:pPr>
             <a:r>
-              <a:rPr dirty="0"/>
-              <a:t>• Container </a:t>
-            </a:r>
-            <a:r>
-              <a:rPr dirty="0" err="1"/>
-              <a:t>Healthcheck</a:t>
-            </a:r>
-            <a:r>
-              <a:rPr dirty="0"/>
-              <a:t>: </a:t>
-            </a:r>
-            <a:r>
-              <a:rPr b="0" dirty="0">
+              <a:t>• Container Healthcheck: </a:t>
+            </a:r>
+            <a:r>
+              <a:rPr b="0">
                 <a:solidFill>
                   <a:srgbClr val="64748B"/>
                 </a:solidFill>
@@ -6964,32 +6825,15 @@
               </a:defRPr>
             </a:pPr>
             <a:r>
-              <a:rPr dirty="0"/>
               <a:t>• Local Multi-Service Compose: </a:t>
             </a:r>
             <a:r>
-              <a:rPr b="0" dirty="0">
+              <a:rPr b="0">
                 <a:solidFill>
                   <a:srgbClr val="64748B"/>
                 </a:solidFill>
               </a:rPr>
-              <a:t>docker-</a:t>
-            </a:r>
-            <a:r>
-              <a:rPr b="0" dirty="0" err="1">
-                <a:solidFill>
-                  <a:srgbClr val="64748B"/>
-                </a:solidFill>
-              </a:rPr>
-              <a:t>compose.yml</a:t>
-            </a:r>
-            <a:r>
-              <a:rPr b="0" dirty="0">
-                <a:solidFill>
-                  <a:srgbClr val="64748B"/>
-                </a:solidFill>
-              </a:rPr>
-              <a:t> defines local developer environment with web and nginx services sharing a bridge network.</a:t>
+              <a:t>docker-compose.yml defines local developer environment with web and nginx services sharing a bridge network.</a:t>
             </a:r>
           </a:p>
           <a:p>
@@ -7005,32 +6849,15 @@
               </a:defRPr>
             </a:pPr>
             <a:r>
-              <a:rPr dirty="0"/>
               <a:t>• Minimal Image Footprint: </a:t>
             </a:r>
             <a:r>
-              <a:rPr b="0" dirty="0">
+              <a:rPr b="0">
                 <a:solidFill>
                   <a:srgbClr val="64748B"/>
                 </a:solidFill>
               </a:rPr>
-              <a:t>Utilizes .</a:t>
-            </a:r>
-            <a:r>
-              <a:rPr b="0" dirty="0" err="1">
-                <a:solidFill>
-                  <a:srgbClr val="64748B"/>
-                </a:solidFill>
-              </a:rPr>
-              <a:t>dockerignore</a:t>
-            </a:r>
-            <a:r>
-              <a:rPr b="0" dirty="0">
-                <a:solidFill>
-                  <a:srgbClr val="64748B"/>
-                </a:solidFill>
-              </a:rPr>
-              <a:t> to strip caches, git history, and secrets, reducing attack surface and pull latency.</a:t>
+              <a:t>Utilizes .dockerignore to strip caches, git history, and secrets, reducing attack surface and pull latency.</a:t>
             </a:r>
           </a:p>
         </p:txBody>
@@ -7077,7 +6904,6 @@
           <a:lstStyle/>
           <a:p>
             <a:pPr algn="ctr"/>
-            <a:endParaRPr/>
           </a:p>
         </p:txBody>
       </p:sp>
@@ -7114,7 +6940,7 @@
 </file>
 
 <file path=ppt/slides/slide6.xml><?xml version="1.0" encoding="utf-8"?>
-<p:sld xmlns:a="http://schemas.openxmlformats.org/drawingml/2006/main" xmlns:r="http://schemas.openxmlformats.org/officeDocument/2006/relationships" xmlns:p="http://schemas.openxmlformats.org/presentationml/2006/main">
+<p:sld xmlns:a="http://schemas.openxmlformats.org/drawingml/2006/main" xmlns:p="http://schemas.openxmlformats.org/presentationml/2006/main" xmlns:r="http://schemas.openxmlformats.org/officeDocument/2006/relationships">
   <p:cSld>
     <p:spTree>
       <p:nvGrpSpPr>
@@ -7122,14 +6948,7 @@
         <p:cNvGrpSpPr/>
         <p:nvPr/>
       </p:nvGrpSpPr>
-      <p:grpSpPr>
-        <a:xfrm>
-          <a:off x="0" y="0"/>
-          <a:ext cx="0" cy="0"/>
-          <a:chOff x="0" y="0"/>
-          <a:chExt cx="0" cy="0"/>
-        </a:xfrm>
-      </p:grpSpPr>
+      <p:grpSpPr/>
       <p:sp>
         <p:nvSpPr>
           <p:cNvPr id="2" name="TextBox 1"/>
@@ -7244,7 +7063,6 @@
           <a:lstStyle/>
           <a:p>
             <a:pPr algn="ctr"/>
-            <a:endParaRPr/>
           </a:p>
         </p:txBody>
       </p:sp>
@@ -7290,7 +7108,6 @@
           <a:lstStyle/>
           <a:p>
             <a:pPr algn="ctr"/>
-            <a:endParaRPr/>
           </a:p>
         </p:txBody>
       </p:sp>
@@ -7492,19 +7309,12 @@
           <a:lstStyle/>
           <a:p>
             <a:pPr algn="ctr"/>
-            <a:endParaRPr/>
           </a:p>
         </p:txBody>
       </p:sp>
       <p:pic>
         <p:nvPicPr>
-          <p:cNvPr id="10" name="Picture 9">
-            <a:extLst>
-              <a:ext uri="{FF2B5EF4-FFF2-40B4-BE49-F238E27FC236}">
-                <a16:creationId xmlns:a16="http://schemas.microsoft.com/office/drawing/2014/main" id="{20293E02-B906-278D-D238-340C9A6A7DD4}"/>
-              </a:ext>
-            </a:extLst>
-          </p:cNvPr>
+          <p:cNvPr id="8" name="Picture 7" descr="jenkins_build_success_live.png"/>
           <p:cNvPicPr>
             <a:picLocks noChangeAspect="1"/>
           </p:cNvPicPr>
@@ -7518,8 +7328,8 @@
         </p:blipFill>
         <p:spPr>
           <a:xfrm>
-            <a:off x="5760720" y="2280719"/>
-            <a:ext cx="5669280" cy="2931361"/>
+            <a:off x="5897880" y="1874519"/>
+            <a:ext cx="5394960" cy="2355026"/>
           </a:xfrm>
           <a:prstGeom prst="rect">
             <a:avLst/>
@@ -7535,7 +7345,7 @@
 </file>
 
 <file path=ppt/slides/slide7.xml><?xml version="1.0" encoding="utf-8"?>
-<p:sld xmlns:a="http://schemas.openxmlformats.org/drawingml/2006/main" xmlns:r="http://schemas.openxmlformats.org/officeDocument/2006/relationships" xmlns:p="http://schemas.openxmlformats.org/presentationml/2006/main">
+<p:sld xmlns:a="http://schemas.openxmlformats.org/drawingml/2006/main" xmlns:p="http://schemas.openxmlformats.org/presentationml/2006/main" xmlns:r="http://schemas.openxmlformats.org/officeDocument/2006/relationships">
   <p:cSld>
     <p:spTree>
       <p:nvGrpSpPr>
@@ -7543,14 +7353,7 @@
         <p:cNvGrpSpPr/>
         <p:nvPr/>
       </p:nvGrpSpPr>
-      <p:grpSpPr>
-        <a:xfrm>
-          <a:off x="0" y="0"/>
-          <a:ext cx="0" cy="0"/>
-          <a:chOff x="0" y="0"/>
-          <a:chExt cx="0" cy="0"/>
-        </a:xfrm>
-      </p:grpSpPr>
+      <p:grpSpPr/>
       <p:sp>
         <p:nvSpPr>
           <p:cNvPr id="2" name="TextBox 1"/>
@@ -7665,7 +7468,6 @@
           <a:lstStyle/>
           <a:p>
             <a:pPr algn="ctr"/>
-            <a:endParaRPr/>
           </a:p>
         </p:txBody>
       </p:sp>
@@ -7711,7 +7513,6 @@
           <a:lstStyle/>
           <a:p>
             <a:pPr algn="ctr"/>
-            <a:endParaRPr/>
           </a:p>
         </p:txBody>
       </p:sp>
@@ -7913,7 +7714,6 @@
           <a:lstStyle/>
           <a:p>
             <a:pPr algn="ctr"/>
-            <a:endParaRPr/>
           </a:p>
         </p:txBody>
       </p:sp>
@@ -7933,38 +7733,8 @@
         </p:blipFill>
         <p:spPr>
           <a:xfrm>
-            <a:off x="5897880" y="584835"/>
+            <a:off x="6080760" y="2011680"/>
             <a:ext cx="5212080" cy="3231490"/>
-          </a:xfrm>
-          <a:prstGeom prst="rect">
-            <a:avLst/>
-          </a:prstGeom>
-        </p:spPr>
-      </p:pic>
-      <p:pic>
-        <p:nvPicPr>
-          <p:cNvPr id="10" name="Picture 9">
-            <a:extLst>
-              <a:ext uri="{FF2B5EF4-FFF2-40B4-BE49-F238E27FC236}">
-                <a16:creationId xmlns:a16="http://schemas.microsoft.com/office/drawing/2014/main" id="{DEB5341B-1C71-6C95-AD6E-3710A753F23A}"/>
-              </a:ext>
-            </a:extLst>
-          </p:cNvPr>
-          <p:cNvPicPr>
-            <a:picLocks noChangeAspect="1"/>
-          </p:cNvPicPr>
-          <p:nvPr/>
-        </p:nvPicPr>
-        <p:blipFill>
-          <a:blip r:embed="rId3"/>
-          <a:stretch>
-            <a:fillRect/>
-          </a:stretch>
-        </p:blipFill>
-        <p:spPr>
-          <a:xfrm>
-            <a:off x="1643434" y="3977640"/>
-            <a:ext cx="8326012" cy="1333686"/>
           </a:xfrm>
           <a:prstGeom prst="rect">
             <a:avLst/>
@@ -7980,7 +7750,7 @@
 </file>
 
 <file path=ppt/slides/slide8.xml><?xml version="1.0" encoding="utf-8"?>
-<p:sld xmlns:a="http://schemas.openxmlformats.org/drawingml/2006/main" xmlns:r="http://schemas.openxmlformats.org/officeDocument/2006/relationships" xmlns:p="http://schemas.openxmlformats.org/presentationml/2006/main">
+<p:sld xmlns:a="http://schemas.openxmlformats.org/drawingml/2006/main" xmlns:p="http://schemas.openxmlformats.org/presentationml/2006/main" xmlns:r="http://schemas.openxmlformats.org/officeDocument/2006/relationships">
   <p:cSld>
     <p:spTree>
       <p:nvGrpSpPr>
@@ -7988,14 +7758,7 @@
         <p:cNvGrpSpPr/>
         <p:nvPr/>
       </p:nvGrpSpPr>
-      <p:grpSpPr>
-        <a:xfrm>
-          <a:off x="0" y="0"/>
-          <a:ext cx="0" cy="0"/>
-          <a:chOff x="0" y="0"/>
-          <a:chExt cx="0" cy="0"/>
-        </a:xfrm>
-      </p:grpSpPr>
+      <p:grpSpPr/>
       <p:sp>
         <p:nvSpPr>
           <p:cNvPr id="2" name="TextBox 1"/>
@@ -8110,7 +7873,6 @@
           <a:lstStyle/>
           <a:p>
             <a:pPr algn="ctr"/>
-            <a:endParaRPr/>
           </a:p>
         </p:txBody>
       </p:sp>
@@ -8156,7 +7918,6 @@
           <a:lstStyle/>
           <a:p>
             <a:pPr algn="ctr"/>
-            <a:endParaRPr/>
           </a:p>
         </p:txBody>
       </p:sp>
@@ -8382,7 +8143,6 @@
           <a:lstStyle/>
           <a:p>
             <a:pPr algn="ctr"/>
-            <a:endParaRPr/>
           </a:p>
         </p:txBody>
       </p:sp>
@@ -8419,7 +8179,7 @@
 </file>
 
 <file path=ppt/slides/slide9.xml><?xml version="1.0" encoding="utf-8"?>
-<p:sld xmlns:a="http://schemas.openxmlformats.org/drawingml/2006/main" xmlns:r="http://schemas.openxmlformats.org/officeDocument/2006/relationships" xmlns:p="http://schemas.openxmlformats.org/presentationml/2006/main">
+<p:sld xmlns:a="http://schemas.openxmlformats.org/drawingml/2006/main" xmlns:p="http://schemas.openxmlformats.org/presentationml/2006/main" xmlns:r="http://schemas.openxmlformats.org/officeDocument/2006/relationships">
   <p:cSld>
     <p:spTree>
       <p:nvGrpSpPr>
@@ -8427,14 +8187,7 @@
         <p:cNvGrpSpPr/>
         <p:nvPr/>
       </p:nvGrpSpPr>
-      <p:grpSpPr>
-        <a:xfrm>
-          <a:off x="0" y="0"/>
-          <a:ext cx="0" cy="0"/>
-          <a:chOff x="0" y="0"/>
-          <a:chExt cx="0" cy="0"/>
-        </a:xfrm>
-      </p:grpSpPr>
+      <p:grpSpPr/>
       <p:sp>
         <p:nvSpPr>
           <p:cNvPr id="2" name="TextBox 1"/>
@@ -8549,7 +8302,6 @@
           <a:lstStyle/>
           <a:p>
             <a:pPr algn="ctr"/>
-            <a:endParaRPr/>
           </a:p>
         </p:txBody>
       </p:sp>
@@ -8595,7 +8347,6 @@
           <a:lstStyle/>
           <a:p>
             <a:pPr algn="ctr"/>
-            <a:endParaRPr/>
           </a:p>
         </p:txBody>
       </p:sp>
@@ -8797,19 +8548,12 @@
           <a:lstStyle/>
           <a:p>
             <a:pPr algn="ctr"/>
-            <a:endParaRPr/>
           </a:p>
         </p:txBody>
       </p:sp>
       <p:pic>
         <p:nvPicPr>
-          <p:cNvPr id="10" name="Picture 9">
-            <a:extLst>
-              <a:ext uri="{FF2B5EF4-FFF2-40B4-BE49-F238E27FC236}">
-                <a16:creationId xmlns:a16="http://schemas.microsoft.com/office/drawing/2014/main" id="{AE7A94BB-38F3-BA23-E39F-09AE0562E8CE}"/>
-              </a:ext>
-            </a:extLst>
-          </p:cNvPr>
+          <p:cNvPr id="8" name="Picture 7" descr="telegram_notification.png"/>
           <p:cNvPicPr>
             <a:picLocks noChangeAspect="1"/>
           </p:cNvPicPr>
@@ -8823,8 +8567,8 @@
         </p:blipFill>
         <p:spPr>
           <a:xfrm>
-            <a:off x="6511400" y="2209800"/>
-            <a:ext cx="4071143" cy="3164205"/>
+            <a:off x="6080760" y="2011680"/>
+            <a:ext cx="5212080" cy="4039362"/>
           </a:xfrm>
           <a:prstGeom prst="rect">
             <a:avLst/>

--- a/Assignment.pptx
+++ b/Assignment.pptx
@@ -4632,7 +4632,7 @@
               </a:defRPr>
             </a:pPr>
             <a:r>
-              <a:t>•  Run 'sudo docker stack ps cicd-homework2' showing distributed tasks across cluster nodes.</a:t>
+              <a:t>•  Run 'sudo docker stack ps cicd-assignment' showing distributed tasks across cluster nodes.</a:t>
             </a:r>
           </a:p>
         </p:txBody>

--- a/Assignment.pptx
+++ b/Assignment.pptx
@@ -3350,7 +3350,7 @@
               </a:defRPr>
             </a:pPr>
             <a:r>
-              <a:t>Verification: Jenkins Pipeline #4 Passed  |  Live Cluster IP: 3.104.55.68  |  October 2026</a:t>
+              <a:t>Verification: Jenkins Pipeline #4 Passed  |  Live Cluster IP: 16.178.178.44  |  October 2026</a:t>
             </a:r>
           </a:p>
         </p:txBody>
@@ -4213,7 +4213,7 @@
               </a:defRPr>
             </a:pPr>
             <a:r>
-              <a:t>•  Open browser: http://3.104.55.68</a:t>
+              <a:t>•  Open browser: http://16.178.178.44</a:t>
             </a:r>
           </a:p>
           <a:p>
@@ -4342,7 +4342,7 @@
               </a:defRPr>
             </a:pPr>
             <a:r>
-              <a:t>•  curl -s http://3.104.55.68/health  -&gt; Returns {"status": "healthy", "version": "1.0.0"}</a:t>
+              <a:t>•  curl -s http://16.178.178.44/health  -&gt; Returns {"status": "healthy", "version": "1.0.0"}</a:t>
             </a:r>
           </a:p>
           <a:p>
@@ -4358,7 +4358,7 @@
               </a:defRPr>
             </a:pPr>
             <a:r>
-              <a:t>•  curl -s http://3.104.55.68/api/info -&gt; Demonstrates round-robin hostname switching across replicas</a:t>
+              <a:t>•  curl -s http://16.178.178.44/api/info -&gt; Demonstrates round-robin hostname switching across replicas</a:t>
             </a:r>
           </a:p>
           <a:p>
@@ -4374,7 +4374,7 @@
               </a:defRPr>
             </a:pPr>
             <a:r>
-              <a:t>•  curl -s http://3.104.55.68/nginx-health -&gt; Confirms load balancer routing integrity</a:t>
+              <a:t>•  curl -s http://16.178.178.44/nginx-health -&gt; Confirms load balancer routing integrity</a:t>
             </a:r>
           </a:p>
         </p:txBody>
@@ -4600,7 +4600,7 @@
               </a:defRPr>
             </a:pPr>
             <a:r>
-              <a:t>•  ssh -i chamroeunsaran.pem ubuntu@3.104.55.68</a:t>
+              <a:t>•  ssh -i chamroeunsaran.pem ubuntu@16.178.178.44</a:t>
             </a:r>
           </a:p>
           <a:p>
@@ -6519,7 +6519,7 @@
         <p:spPr>
           <a:xfrm>
             <a:off x="6080760" y="1828800"/>
-            <a:ext cx="5212080" cy="4065422"/>
+            <a:ext cx="5212080" cy="4084375"/>
           </a:xfrm>
           <a:prstGeom prst="rect">
             <a:avLst/>

--- a/Assignment.pptx
+++ b/Assignment.pptx
@@ -5,20 +5,20 @@
     <p:sldMasterId id="2147483648" r:id="rId1"/>
   </p:sldMasterIdLst>
   <p:sldIdLst>
-    <p:sldId id="256" r:id="rId7"/>
-    <p:sldId id="257" r:id="rId8"/>
-    <p:sldId id="258" r:id="rId9"/>
-    <p:sldId id="259" r:id="rId10"/>
-    <p:sldId id="260" r:id="rId11"/>
-    <p:sldId id="261" r:id="rId12"/>
-    <p:sldId id="262" r:id="rId13"/>
-    <p:sldId id="263" r:id="rId14"/>
-    <p:sldId id="264" r:id="rId15"/>
-    <p:sldId id="265" r:id="rId16"/>
-    <p:sldId id="266" r:id="rId17"/>
-    <p:sldId id="267" r:id="rId18"/>
+    <p:sldId id="256" r:id="rId2"/>
+    <p:sldId id="257" r:id="rId3"/>
+    <p:sldId id="258" r:id="rId4"/>
+    <p:sldId id="259" r:id="rId5"/>
+    <p:sldId id="260" r:id="rId6"/>
+    <p:sldId id="261" r:id="rId7"/>
+    <p:sldId id="262" r:id="rId8"/>
+    <p:sldId id="263" r:id="rId9"/>
+    <p:sldId id="264" r:id="rId10"/>
+    <p:sldId id="265" r:id="rId11"/>
+    <p:sldId id="266" r:id="rId12"/>
+    <p:sldId id="267" r:id="rId13"/>
   </p:sldIdLst>
-  <p:sldSz cx="12191695" cy="6858000" type="screen4x3"/>
+  <p:sldSz cx="12192000" cy="6858000"/>
   <p:notesSz cx="6858000" cy="9144000"/>
   <p:defaultTextStyle>
     <a:defPPr>
@@ -115,6 +115,22 @@
       </a:defRPr>
     </a:lvl9pPr>
   </p:defaultTextStyle>
+  <p:extLst>
+    <p:ext uri="{EFAFB233-063F-42B5-8137-9DF3F51BA10A}">
+      <p15:sldGuideLst xmlns:p15="http://schemas.microsoft.com/office/powerpoint/2012/main">
+        <p15:guide id="1" orient="horz" pos="2160">
+          <p15:clr>
+            <a:srgbClr val="A4A3A4"/>
+          </p15:clr>
+        </p15:guide>
+        <p15:guide id="2" pos="2880">
+          <p15:clr>
+            <a:srgbClr val="A4A3A4"/>
+          </p15:clr>
+        </p15:guide>
+      </p15:sldGuideLst>
+    </p:ext>
+  </p:extLst>
 </p:presentation>
 </file>
 
@@ -156,10 +172,9 @@
           <a:lstStyle/>
           <a:p>
             <a:r>
-              <a:rPr lang="en-US" smtClean="0"/>
+              <a:rPr lang="en-US"/>
               <a:t>Click to edit Master title style</a:t>
             </a:r>
-            <a:endParaRPr lang="en-US"/>
           </a:p>
         </p:txBody>
       </p:sp>
@@ -275,10 +290,9 @@
           </a:lstStyle>
           <a:p>
             <a:r>
-              <a:rPr lang="en-US" smtClean="0"/>
+              <a:rPr lang="en-US"/>
               <a:t>Click to edit Master subtitle style</a:t>
             </a:r>
-            <a:endParaRPr lang="en-US"/>
           </a:p>
         </p:txBody>
       </p:sp>
@@ -299,7 +313,7 @@
           <a:p>
             <a:fld id="{5BCAD085-E8A6-8845-BD4E-CB4CCA059FC4}" type="datetimeFigureOut">
               <a:rPr lang="en-US" smtClean="0"/>
-              <a:t>1/27/13</a:t>
+              <a:t>11/1/2026</a:t>
             </a:fld>
             <a:endParaRPr lang="en-US"/>
           </a:p>
@@ -393,10 +407,9 @@
           <a:lstStyle/>
           <a:p>
             <a:r>
-              <a:rPr lang="en-US" smtClean="0"/>
+              <a:rPr lang="en-US"/>
               <a:t>Click to edit Master title style</a:t>
             </a:r>
-            <a:endParaRPr lang="en-US"/>
           </a:p>
         </p:txBody>
       </p:sp>
@@ -417,38 +430,37 @@
           <a:p>
             <a:pPr lvl="0"/>
             <a:r>
-              <a:rPr lang="en-US" smtClean="0"/>
+              <a:rPr lang="en-US"/>
               <a:t>Click to edit Master text styles</a:t>
             </a:r>
           </a:p>
           <a:p>
             <a:pPr lvl="1"/>
             <a:r>
-              <a:rPr lang="en-US" smtClean="0"/>
+              <a:rPr lang="en-US"/>
               <a:t>Second level</a:t>
             </a:r>
           </a:p>
           <a:p>
             <a:pPr lvl="2"/>
             <a:r>
-              <a:rPr lang="en-US" smtClean="0"/>
+              <a:rPr lang="en-US"/>
               <a:t>Third level</a:t>
             </a:r>
           </a:p>
           <a:p>
             <a:pPr lvl="3"/>
             <a:r>
-              <a:rPr lang="en-US" smtClean="0"/>
+              <a:rPr lang="en-US"/>
               <a:t>Fourth level</a:t>
             </a:r>
           </a:p>
           <a:p>
             <a:pPr lvl="4"/>
             <a:r>
-              <a:rPr lang="en-US" smtClean="0"/>
+              <a:rPr lang="en-US"/>
               <a:t>Fifth level</a:t>
             </a:r>
-            <a:endParaRPr lang="en-US"/>
           </a:p>
         </p:txBody>
       </p:sp>
@@ -469,7 +481,7 @@
           <a:p>
             <a:fld id="{5BCAD085-E8A6-8845-BD4E-CB4CCA059FC4}" type="datetimeFigureOut">
               <a:rPr lang="en-US" smtClean="0"/>
-              <a:t>1/27/13</a:t>
+              <a:t>11/1/2026</a:t>
             </a:fld>
             <a:endParaRPr lang="en-US"/>
           </a:p>
@@ -568,10 +580,9 @@
           <a:lstStyle/>
           <a:p>
             <a:r>
-              <a:rPr lang="en-US" smtClean="0"/>
+              <a:rPr lang="en-US"/>
               <a:t>Click to edit Master title style</a:t>
             </a:r>
-            <a:endParaRPr lang="en-US"/>
           </a:p>
         </p:txBody>
       </p:sp>
@@ -597,38 +608,37 @@
           <a:p>
             <a:pPr lvl="0"/>
             <a:r>
-              <a:rPr lang="en-US" smtClean="0"/>
+              <a:rPr lang="en-US"/>
               <a:t>Click to edit Master text styles</a:t>
             </a:r>
           </a:p>
           <a:p>
             <a:pPr lvl="1"/>
             <a:r>
-              <a:rPr lang="en-US" smtClean="0"/>
+              <a:rPr lang="en-US"/>
               <a:t>Second level</a:t>
             </a:r>
           </a:p>
           <a:p>
             <a:pPr lvl="2"/>
             <a:r>
-              <a:rPr lang="en-US" smtClean="0"/>
+              <a:rPr lang="en-US"/>
               <a:t>Third level</a:t>
             </a:r>
           </a:p>
           <a:p>
             <a:pPr lvl="3"/>
             <a:r>
-              <a:rPr lang="en-US" smtClean="0"/>
+              <a:rPr lang="en-US"/>
               <a:t>Fourth level</a:t>
             </a:r>
           </a:p>
           <a:p>
             <a:pPr lvl="4"/>
             <a:r>
-              <a:rPr lang="en-US" smtClean="0"/>
+              <a:rPr lang="en-US"/>
               <a:t>Fifth level</a:t>
             </a:r>
-            <a:endParaRPr lang="en-US"/>
           </a:p>
         </p:txBody>
       </p:sp>
@@ -649,7 +659,7 @@
           <a:p>
             <a:fld id="{5BCAD085-E8A6-8845-BD4E-CB4CCA059FC4}" type="datetimeFigureOut">
               <a:rPr lang="en-US" smtClean="0"/>
-              <a:t>1/27/13</a:t>
+              <a:t>11/1/2026</a:t>
             </a:fld>
             <a:endParaRPr lang="en-US"/>
           </a:p>
@@ -743,10 +753,9 @@
           <a:lstStyle/>
           <a:p>
             <a:r>
-              <a:rPr lang="en-US" smtClean="0"/>
+              <a:rPr lang="en-US"/>
               <a:t>Click to edit Master title style</a:t>
             </a:r>
-            <a:endParaRPr lang="en-US"/>
           </a:p>
         </p:txBody>
       </p:sp>
@@ -767,38 +776,37 @@
           <a:p>
             <a:pPr lvl="0"/>
             <a:r>
-              <a:rPr lang="en-US" smtClean="0"/>
+              <a:rPr lang="en-US"/>
               <a:t>Click to edit Master text styles</a:t>
             </a:r>
           </a:p>
           <a:p>
             <a:pPr lvl="1"/>
             <a:r>
-              <a:rPr lang="en-US" smtClean="0"/>
+              <a:rPr lang="en-US"/>
               <a:t>Second level</a:t>
             </a:r>
           </a:p>
           <a:p>
             <a:pPr lvl="2"/>
             <a:r>
-              <a:rPr lang="en-US" smtClean="0"/>
+              <a:rPr lang="en-US"/>
               <a:t>Third level</a:t>
             </a:r>
           </a:p>
           <a:p>
             <a:pPr lvl="3"/>
             <a:r>
-              <a:rPr lang="en-US" smtClean="0"/>
+              <a:rPr lang="en-US"/>
               <a:t>Fourth level</a:t>
             </a:r>
           </a:p>
           <a:p>
             <a:pPr lvl="4"/>
             <a:r>
-              <a:rPr lang="en-US" smtClean="0"/>
+              <a:rPr lang="en-US"/>
               <a:t>Fifth level</a:t>
             </a:r>
-            <a:endParaRPr lang="en-US"/>
           </a:p>
         </p:txBody>
       </p:sp>
@@ -819,7 +827,7 @@
           <a:p>
             <a:fld id="{5BCAD085-E8A6-8845-BD4E-CB4CCA059FC4}" type="datetimeFigureOut">
               <a:rPr lang="en-US" smtClean="0"/>
-              <a:t>1/27/13</a:t>
+              <a:t>11/1/2026</a:t>
             </a:fld>
             <a:endParaRPr lang="en-US"/>
           </a:p>
@@ -922,10 +930,9 @@
           </a:lstStyle>
           <a:p>
             <a:r>
-              <a:rPr lang="en-US" smtClean="0"/>
+              <a:rPr lang="en-US"/>
               <a:t>Click to edit Master title style</a:t>
             </a:r>
-            <a:endParaRPr lang="en-US"/>
           </a:p>
         </p:txBody>
       </p:sp>
@@ -1042,7 +1049,7 @@
           <a:p>
             <a:pPr lvl="0"/>
             <a:r>
-              <a:rPr lang="en-US" smtClean="0"/>
+              <a:rPr lang="en-US"/>
               <a:t>Click to edit Master text styles</a:t>
             </a:r>
           </a:p>
@@ -1065,7 +1072,7 @@
           <a:p>
             <a:fld id="{5BCAD085-E8A6-8845-BD4E-CB4CCA059FC4}" type="datetimeFigureOut">
               <a:rPr lang="en-US" smtClean="0"/>
-              <a:t>1/27/13</a:t>
+              <a:t>11/1/2026</a:t>
             </a:fld>
             <a:endParaRPr lang="en-US"/>
           </a:p>
@@ -1159,10 +1166,9 @@
           <a:lstStyle/>
           <a:p>
             <a:r>
-              <a:rPr lang="en-US" smtClean="0"/>
+              <a:rPr lang="en-US"/>
               <a:t>Click to edit Master title style</a:t>
             </a:r>
-            <a:endParaRPr lang="en-US"/>
           </a:p>
         </p:txBody>
       </p:sp>
@@ -1216,38 +1222,37 @@
           <a:p>
             <a:pPr lvl="0"/>
             <a:r>
-              <a:rPr lang="en-US" smtClean="0"/>
+              <a:rPr lang="en-US"/>
               <a:t>Click to edit Master text styles</a:t>
             </a:r>
           </a:p>
           <a:p>
             <a:pPr lvl="1"/>
             <a:r>
-              <a:rPr lang="en-US" smtClean="0"/>
+              <a:rPr lang="en-US"/>
               <a:t>Second level</a:t>
             </a:r>
           </a:p>
           <a:p>
             <a:pPr lvl="2"/>
             <a:r>
-              <a:rPr lang="en-US" smtClean="0"/>
+              <a:rPr lang="en-US"/>
               <a:t>Third level</a:t>
             </a:r>
           </a:p>
           <a:p>
             <a:pPr lvl="3"/>
             <a:r>
-              <a:rPr lang="en-US" smtClean="0"/>
+              <a:rPr lang="en-US"/>
               <a:t>Fourth level</a:t>
             </a:r>
           </a:p>
           <a:p>
             <a:pPr lvl="4"/>
             <a:r>
-              <a:rPr lang="en-US" smtClean="0"/>
+              <a:rPr lang="en-US"/>
               <a:t>Fifth level</a:t>
             </a:r>
-            <a:endParaRPr lang="en-US"/>
           </a:p>
         </p:txBody>
       </p:sp>
@@ -1301,38 +1306,37 @@
           <a:p>
             <a:pPr lvl="0"/>
             <a:r>
-              <a:rPr lang="en-US" smtClean="0"/>
+              <a:rPr lang="en-US"/>
               <a:t>Click to edit Master text styles</a:t>
             </a:r>
           </a:p>
           <a:p>
             <a:pPr lvl="1"/>
             <a:r>
-              <a:rPr lang="en-US" smtClean="0"/>
+              <a:rPr lang="en-US"/>
               <a:t>Second level</a:t>
             </a:r>
           </a:p>
           <a:p>
             <a:pPr lvl="2"/>
             <a:r>
-              <a:rPr lang="en-US" smtClean="0"/>
+              <a:rPr lang="en-US"/>
               <a:t>Third level</a:t>
             </a:r>
           </a:p>
           <a:p>
             <a:pPr lvl="3"/>
             <a:r>
-              <a:rPr lang="en-US" smtClean="0"/>
+              <a:rPr lang="en-US"/>
               <a:t>Fourth level</a:t>
             </a:r>
           </a:p>
           <a:p>
             <a:pPr lvl="4"/>
             <a:r>
-              <a:rPr lang="en-US" smtClean="0"/>
+              <a:rPr lang="en-US"/>
               <a:t>Fifth level</a:t>
             </a:r>
-            <a:endParaRPr lang="en-US"/>
           </a:p>
         </p:txBody>
       </p:sp>
@@ -1353,7 +1357,7 @@
           <a:p>
             <a:fld id="{5BCAD085-E8A6-8845-BD4E-CB4CCA059FC4}" type="datetimeFigureOut">
               <a:rPr lang="en-US" smtClean="0"/>
-              <a:t>1/27/13</a:t>
+              <a:t>11/1/2026</a:t>
             </a:fld>
             <a:endParaRPr lang="en-US"/>
           </a:p>
@@ -1451,10 +1455,9 @@
           </a:lstStyle>
           <a:p>
             <a:r>
-              <a:rPr lang="en-US" smtClean="0"/>
+              <a:rPr lang="en-US"/>
               <a:t>Click to edit Master title style</a:t>
             </a:r>
-            <a:endParaRPr lang="en-US"/>
           </a:p>
         </p:txBody>
       </p:sp>
@@ -1517,7 +1520,7 @@
           <a:p>
             <a:pPr lvl="0"/>
             <a:r>
-              <a:rPr lang="en-US" smtClean="0"/>
+              <a:rPr lang="en-US"/>
               <a:t>Click to edit Master text styles</a:t>
             </a:r>
           </a:p>
@@ -1573,38 +1576,37 @@
           <a:p>
             <a:pPr lvl="0"/>
             <a:r>
-              <a:rPr lang="en-US" smtClean="0"/>
+              <a:rPr lang="en-US"/>
               <a:t>Click to edit Master text styles</a:t>
             </a:r>
           </a:p>
           <a:p>
             <a:pPr lvl="1"/>
             <a:r>
-              <a:rPr lang="en-US" smtClean="0"/>
+              <a:rPr lang="en-US"/>
               <a:t>Second level</a:t>
             </a:r>
           </a:p>
           <a:p>
             <a:pPr lvl="2"/>
             <a:r>
-              <a:rPr lang="en-US" smtClean="0"/>
+              <a:rPr lang="en-US"/>
               <a:t>Third level</a:t>
             </a:r>
           </a:p>
           <a:p>
             <a:pPr lvl="3"/>
             <a:r>
-              <a:rPr lang="en-US" smtClean="0"/>
+              <a:rPr lang="en-US"/>
               <a:t>Fourth level</a:t>
             </a:r>
           </a:p>
           <a:p>
             <a:pPr lvl="4"/>
             <a:r>
-              <a:rPr lang="en-US" smtClean="0"/>
+              <a:rPr lang="en-US"/>
               <a:t>Fifth level</a:t>
             </a:r>
-            <a:endParaRPr lang="en-US"/>
           </a:p>
         </p:txBody>
       </p:sp>
@@ -1667,7 +1669,7 @@
           <a:p>
             <a:pPr lvl="0"/>
             <a:r>
-              <a:rPr lang="en-US" smtClean="0"/>
+              <a:rPr lang="en-US"/>
               <a:t>Click to edit Master text styles</a:t>
             </a:r>
           </a:p>
@@ -1723,38 +1725,37 @@
           <a:p>
             <a:pPr lvl="0"/>
             <a:r>
-              <a:rPr lang="en-US" smtClean="0"/>
+              <a:rPr lang="en-US"/>
               <a:t>Click to edit Master text styles</a:t>
             </a:r>
           </a:p>
           <a:p>
             <a:pPr lvl="1"/>
             <a:r>
-              <a:rPr lang="en-US" smtClean="0"/>
+              <a:rPr lang="en-US"/>
               <a:t>Second level</a:t>
             </a:r>
           </a:p>
           <a:p>
             <a:pPr lvl="2"/>
             <a:r>
-              <a:rPr lang="en-US" smtClean="0"/>
+              <a:rPr lang="en-US"/>
               <a:t>Third level</a:t>
             </a:r>
           </a:p>
           <a:p>
             <a:pPr lvl="3"/>
             <a:r>
-              <a:rPr lang="en-US" smtClean="0"/>
+              <a:rPr lang="en-US"/>
               <a:t>Fourth level</a:t>
             </a:r>
           </a:p>
           <a:p>
             <a:pPr lvl="4"/>
             <a:r>
-              <a:rPr lang="en-US" smtClean="0"/>
+              <a:rPr lang="en-US"/>
               <a:t>Fifth level</a:t>
             </a:r>
-            <a:endParaRPr lang="en-US"/>
           </a:p>
         </p:txBody>
       </p:sp>
@@ -1775,7 +1776,7 @@
           <a:p>
             <a:fld id="{5BCAD085-E8A6-8845-BD4E-CB4CCA059FC4}" type="datetimeFigureOut">
               <a:rPr lang="en-US" smtClean="0"/>
-              <a:t>1/27/13</a:t>
+              <a:t>11/1/2026</a:t>
             </a:fld>
             <a:endParaRPr lang="en-US"/>
           </a:p>
@@ -1869,10 +1870,9 @@
           <a:lstStyle/>
           <a:p>
             <a:r>
-              <a:rPr lang="en-US" smtClean="0"/>
+              <a:rPr lang="en-US"/>
               <a:t>Click to edit Master title style</a:t>
             </a:r>
-            <a:endParaRPr lang="en-US"/>
           </a:p>
         </p:txBody>
       </p:sp>
@@ -1893,7 +1893,7 @@
           <a:p>
             <a:fld id="{5BCAD085-E8A6-8845-BD4E-CB4CCA059FC4}" type="datetimeFigureOut">
               <a:rPr lang="en-US" smtClean="0"/>
-              <a:t>1/27/13</a:t>
+              <a:t>11/1/2026</a:t>
             </a:fld>
             <a:endParaRPr lang="en-US"/>
           </a:p>
@@ -1988,7 +1988,7 @@
           <a:p>
             <a:fld id="{5BCAD085-E8A6-8845-BD4E-CB4CCA059FC4}" type="datetimeFigureOut">
               <a:rPr lang="en-US" smtClean="0"/>
-              <a:t>1/27/13</a:t>
+              <a:t>11/1/2026</a:t>
             </a:fld>
             <a:endParaRPr lang="en-US"/>
           </a:p>
@@ -2091,10 +2091,9 @@
           </a:lstStyle>
           <a:p>
             <a:r>
-              <a:rPr lang="en-US" smtClean="0"/>
+              <a:rPr lang="en-US"/>
               <a:t>Click to edit Master title style</a:t>
             </a:r>
-            <a:endParaRPr lang="en-US"/>
           </a:p>
         </p:txBody>
       </p:sp>
@@ -2148,38 +2147,37 @@
           <a:p>
             <a:pPr lvl="0"/>
             <a:r>
-              <a:rPr lang="en-US" smtClean="0"/>
+              <a:rPr lang="en-US"/>
               <a:t>Click to edit Master text styles</a:t>
             </a:r>
           </a:p>
           <a:p>
             <a:pPr lvl="1"/>
             <a:r>
-              <a:rPr lang="en-US" smtClean="0"/>
+              <a:rPr lang="en-US"/>
               <a:t>Second level</a:t>
             </a:r>
           </a:p>
           <a:p>
             <a:pPr lvl="2"/>
             <a:r>
-              <a:rPr lang="en-US" smtClean="0"/>
+              <a:rPr lang="en-US"/>
               <a:t>Third level</a:t>
             </a:r>
           </a:p>
           <a:p>
             <a:pPr lvl="3"/>
             <a:r>
-              <a:rPr lang="en-US" smtClean="0"/>
+              <a:rPr lang="en-US"/>
               <a:t>Fourth level</a:t>
             </a:r>
           </a:p>
           <a:p>
             <a:pPr lvl="4"/>
             <a:r>
-              <a:rPr lang="en-US" smtClean="0"/>
+              <a:rPr lang="en-US"/>
               <a:t>Fifth level</a:t>
             </a:r>
-            <a:endParaRPr lang="en-US"/>
           </a:p>
         </p:txBody>
       </p:sp>
@@ -2242,7 +2240,7 @@
           <a:p>
             <a:pPr lvl="0"/>
             <a:r>
-              <a:rPr lang="en-US" smtClean="0"/>
+              <a:rPr lang="en-US"/>
               <a:t>Click to edit Master text styles</a:t>
             </a:r>
           </a:p>
@@ -2265,7 +2263,7 @@
           <a:p>
             <a:fld id="{5BCAD085-E8A6-8845-BD4E-CB4CCA059FC4}" type="datetimeFigureOut">
               <a:rPr lang="en-US" smtClean="0"/>
-              <a:t>1/27/13</a:t>
+              <a:t>11/1/2026</a:t>
             </a:fld>
             <a:endParaRPr lang="en-US"/>
           </a:p>
@@ -2368,10 +2366,9 @@
           </a:lstStyle>
           <a:p>
             <a:r>
-              <a:rPr lang="en-US" smtClean="0"/>
+              <a:rPr lang="en-US"/>
               <a:t>Click to edit Master title style</a:t>
             </a:r>
-            <a:endParaRPr lang="en-US"/>
           </a:p>
         </p:txBody>
       </p:sp>
@@ -2495,7 +2492,7 @@
           <a:p>
             <a:pPr lvl="0"/>
             <a:r>
-              <a:rPr lang="en-US" smtClean="0"/>
+              <a:rPr lang="en-US"/>
               <a:t>Click to edit Master text styles</a:t>
             </a:r>
           </a:p>
@@ -2518,7 +2515,7 @@
           <a:p>
             <a:fld id="{5BCAD085-E8A6-8845-BD4E-CB4CCA059FC4}" type="datetimeFigureOut">
               <a:rPr lang="en-US" smtClean="0"/>
-              <a:t>1/27/13</a:t>
+              <a:t>11/1/2026</a:t>
             </a:fld>
             <a:endParaRPr lang="en-US"/>
           </a:p>
@@ -2627,10 +2624,9 @@
           <a:lstStyle/>
           <a:p>
             <a:r>
-              <a:rPr lang="en-US" smtClean="0"/>
+              <a:rPr lang="en-US"/>
               <a:t>Click to edit Master title style</a:t>
             </a:r>
-            <a:endParaRPr lang="en-US"/>
           </a:p>
         </p:txBody>
       </p:sp>
@@ -2661,38 +2657,37 @@
           <a:p>
             <a:pPr lvl="0"/>
             <a:r>
-              <a:rPr lang="en-US" smtClean="0"/>
+              <a:rPr lang="en-US"/>
               <a:t>Click to edit Master text styles</a:t>
             </a:r>
           </a:p>
           <a:p>
             <a:pPr lvl="1"/>
             <a:r>
-              <a:rPr lang="en-US" smtClean="0"/>
+              <a:rPr lang="en-US"/>
               <a:t>Second level</a:t>
             </a:r>
           </a:p>
           <a:p>
             <a:pPr lvl="2"/>
             <a:r>
-              <a:rPr lang="en-US" smtClean="0"/>
+              <a:rPr lang="en-US"/>
               <a:t>Third level</a:t>
             </a:r>
           </a:p>
           <a:p>
             <a:pPr lvl="3"/>
             <a:r>
-              <a:rPr lang="en-US" smtClean="0"/>
+              <a:rPr lang="en-US"/>
               <a:t>Fourth level</a:t>
             </a:r>
           </a:p>
           <a:p>
             <a:pPr lvl="4"/>
             <a:r>
-              <a:rPr lang="en-US" smtClean="0"/>
+              <a:rPr lang="en-US"/>
               <a:t>Fifth level</a:t>
             </a:r>
-            <a:endParaRPr lang="en-US"/>
           </a:p>
         </p:txBody>
       </p:sp>
@@ -2731,7 +2726,7 @@
           <a:p>
             <a:fld id="{5BCAD085-E8A6-8845-BD4E-CB4CCA059FC4}" type="datetimeFigureOut">
               <a:rPr lang="en-US" smtClean="0"/>
-              <a:t>1/27/13</a:t>
+              <a:t>11/1/2026</a:t>
             </a:fld>
             <a:endParaRPr lang="en-US"/>
           </a:p>
@@ -3090,7 +3085,7 @@
 </file>
 
 <file path=ppt/slides/slide1.xml><?xml version="1.0" encoding="utf-8"?>
-<p:sld xmlns:a="http://schemas.openxmlformats.org/drawingml/2006/main" xmlns:p="http://schemas.openxmlformats.org/presentationml/2006/main" xmlns:r="http://schemas.openxmlformats.org/officeDocument/2006/relationships">
+<p:sld xmlns:a="http://schemas.openxmlformats.org/drawingml/2006/main" xmlns:r="http://schemas.openxmlformats.org/officeDocument/2006/relationships" xmlns:p="http://schemas.openxmlformats.org/presentationml/2006/main">
   <p:cSld>
     <p:spTree>
       <p:nvGrpSpPr>
@@ -3098,7 +3093,14 @@
         <p:cNvGrpSpPr/>
         <p:nvPr/>
       </p:nvGrpSpPr>
-      <p:grpSpPr/>
+      <p:grpSpPr>
+        <a:xfrm>
+          <a:off x="0" y="0"/>
+          <a:ext cx="0" cy="0"/>
+          <a:chOff x="0" y="0"/>
+          <a:chExt cx="0" cy="0"/>
+        </a:xfrm>
+      </p:grpSpPr>
       <p:sp>
         <p:nvSpPr>
           <p:cNvPr id="2" name="Rectangle 1"/>
@@ -3139,6 +3141,7 @@
           <a:lstStyle/>
           <a:p>
             <a:pPr algn="ctr"/>
+            <a:endParaRPr/>
           </a:p>
         </p:txBody>
       </p:sp>
@@ -3184,6 +3187,7 @@
           <a:lstStyle/>
           <a:p>
             <a:pPr algn="ctr"/>
+            <a:endParaRPr/>
           </a:p>
         </p:txBody>
       </p:sp>
@@ -3271,10 +3275,14 @@
               </a:defRPr>
             </a:pPr>
             <a:r>
+              <a:rPr dirty="0"/>
               <a:t>Automated CI/CD, Infrastructure as Code &amp;</a:t>
             </a:r>
-            <a:br/>
-            <a:r>
+            <a:br>
+              <a:rPr dirty="0"/>
+            </a:br>
+            <a:r>
+              <a:rPr dirty="0"/>
               <a:t>Multi-Service Container Orchestration</a:t>
             </a:r>
           </a:p>
@@ -3288,6 +3296,7 @@
               </a:defRPr>
             </a:pPr>
             <a:r>
+              <a:rPr dirty="0"/>
               <a:t>Production Architecture on AWS EC2 with GitHub, Jenkins, Terraform, Docker Swarm &amp; Nginx</a:t>
             </a:r>
           </a:p>
@@ -3301,8 +3310,8 @@
         </p:nvSpPr>
         <p:spPr>
           <a:xfrm>
-            <a:off x="1188720" y="4114800"/>
-            <a:ext cx="9601200" cy="1645920"/>
+            <a:off x="1188720" y="3675192"/>
+            <a:ext cx="9601200" cy="1938992"/>
           </a:xfrm>
           <a:prstGeom prst="rect">
             <a:avLst/>
@@ -3324,6 +3333,7 @@
               </a:defRPr>
             </a:pPr>
             <a:r>
+              <a:rPr sz="2000" dirty="0"/>
               <a:t>Student / Engineer: Chamroeun Saran  |  Course: Master of Science in Cloud Computing</a:t>
             </a:r>
           </a:p>
@@ -3337,6 +3347,7 @@
               </a:defRPr>
             </a:pPr>
             <a:r>
+              <a:rPr sz="2000" dirty="0"/>
               <a:t>Repository: https://github.com/Chamroeun12/Assignment  |  AWS Region: Sydney (ap-southeast-2)</a:t>
             </a:r>
           </a:p>
@@ -3350,7 +3361,8 @@
               </a:defRPr>
             </a:pPr>
             <a:r>
-              <a:t>Verification: Jenkins Pipeline #4 Passed  |  Live Cluster IP: 16.178.178.44  |  October 2026</a:t>
+              <a:rPr sz="2000" dirty="0"/>
+              <a:t>Verification: Jenkins Pipeline #4 Passed  |  Live Cluster IP: 54.253.170.114  |  October 2026</a:t>
             </a:r>
           </a:p>
         </p:txBody>
@@ -3364,7 +3376,7 @@
 </file>
 
 <file path=ppt/slides/slide10.xml><?xml version="1.0" encoding="utf-8"?>
-<p:sld xmlns:a="http://schemas.openxmlformats.org/drawingml/2006/main" xmlns:p="http://schemas.openxmlformats.org/presentationml/2006/main" xmlns:r="http://schemas.openxmlformats.org/officeDocument/2006/relationships">
+<p:sld xmlns:a="http://schemas.openxmlformats.org/drawingml/2006/main" xmlns:r="http://schemas.openxmlformats.org/officeDocument/2006/relationships" xmlns:p="http://schemas.openxmlformats.org/presentationml/2006/main">
   <p:cSld>
     <p:spTree>
       <p:nvGrpSpPr>
@@ -3372,7 +3384,14 @@
         <p:cNvGrpSpPr/>
         <p:nvPr/>
       </p:nvGrpSpPr>
-      <p:grpSpPr/>
+      <p:grpSpPr>
+        <a:xfrm>
+          <a:off x="0" y="0"/>
+          <a:ext cx="0" cy="0"/>
+          <a:chOff x="0" y="0"/>
+          <a:chExt cx="0" cy="0"/>
+        </a:xfrm>
+      </p:grpSpPr>
       <p:sp>
         <p:nvSpPr>
           <p:cNvPr id="2" name="TextBox 1"/>
@@ -3487,6 +3506,7 @@
           <a:lstStyle/>
           <a:p>
             <a:pPr algn="ctr"/>
+            <a:endParaRPr/>
           </a:p>
         </p:txBody>
       </p:sp>
@@ -3532,6 +3552,7 @@
           <a:lstStyle/>
           <a:p>
             <a:pPr algn="ctr"/>
+            <a:endParaRPr/>
           </a:p>
         </p:txBody>
       </p:sp>
@@ -3543,8 +3564,8 @@
         </p:nvSpPr>
         <p:spPr>
           <a:xfrm>
-            <a:off x="960120" y="1783080"/>
-            <a:ext cx="4754880" cy="1920240"/>
+            <a:off x="960120" y="1926024"/>
+            <a:ext cx="4754880" cy="1502976"/>
           </a:xfrm>
           <a:prstGeom prst="rect">
             <a:avLst/>
@@ -3558,6 +3579,9 @@
           <a:lstStyle/>
           <a:p>
             <a:pPr>
+              <a:spcBef>
+                <a:spcPts val="600"/>
+              </a:spcBef>
               <a:defRPr sz="1200" b="1">
                 <a:solidFill>
                   <a:srgbClr val="0284C7"/>
@@ -3566,25 +3590,30 @@
               </a:defRPr>
             </a:pPr>
             <a:r>
+              <a:rPr sz="1600" dirty="0"/>
               <a:t>1. Swarm Worker ECR Pull Authentication</a:t>
             </a:r>
           </a:p>
           <a:p>
             <a:pPr>
+              <a:spcBef>
+                <a:spcPts val="600"/>
+              </a:spcBef>
               <a:spcAft>
                 <a:spcPts val="200"/>
               </a:spcAft>
-              <a:defRPr b="1" sz="950">
+              <a:defRPr sz="950" b="1">
                 <a:solidFill>
                   <a:srgbClr val="DC2626"/>
                 </a:solidFill>
               </a:defRPr>
             </a:pPr>
             <a:r>
+              <a:rPr sz="1400" dirty="0"/>
               <a:t>Challenge: </a:t>
             </a:r>
             <a:r>
-              <a:rPr b="0">
+              <a:rPr sz="1400" b="0" dirty="0">
                 <a:solidFill>
                   <a:srgbClr val="1E293B"/>
                 </a:solidFill>
@@ -3594,17 +3623,21 @@
           </a:p>
           <a:p>
             <a:pPr>
-              <a:defRPr b="1" sz="950">
+              <a:spcBef>
+                <a:spcPts val="600"/>
+              </a:spcBef>
+              <a:defRPr sz="950" b="1">
                 <a:solidFill>
                   <a:srgbClr val="16A34A"/>
                 </a:solidFill>
               </a:defRPr>
             </a:pPr>
             <a:r>
+              <a:rPr sz="1400" dirty="0"/>
               <a:t>Solution: </a:t>
             </a:r>
             <a:r>
-              <a:rPr b="0">
+              <a:rPr sz="1400" b="0" dirty="0">
                 <a:solidFill>
                   <a:srgbClr val="64748B"/>
                 </a:solidFill>
@@ -3656,6 +3689,7 @@
           <a:lstStyle/>
           <a:p>
             <a:pPr algn="ctr"/>
+            <a:endParaRPr/>
           </a:p>
         </p:txBody>
       </p:sp>
@@ -3667,8 +3701,8 @@
         </p:nvSpPr>
         <p:spPr>
           <a:xfrm>
-            <a:off x="6446520" y="1783080"/>
-            <a:ext cx="4754880" cy="1920240"/>
+            <a:off x="6446520" y="1926024"/>
+            <a:ext cx="4754880" cy="1502976"/>
           </a:xfrm>
           <a:prstGeom prst="rect">
             <a:avLst/>
@@ -3682,6 +3716,9 @@
           <a:lstStyle/>
           <a:p>
             <a:pPr>
+              <a:spcBef>
+                <a:spcPts val="600"/>
+              </a:spcBef>
               <a:defRPr sz="1200" b="1">
                 <a:solidFill>
                   <a:srgbClr val="0284C7"/>
@@ -3690,25 +3727,30 @@
               </a:defRPr>
             </a:pPr>
             <a:r>
+              <a:rPr sz="1600" dirty="0"/>
               <a:t>2. Zero Downtime During Redeployments</a:t>
             </a:r>
           </a:p>
           <a:p>
             <a:pPr>
+              <a:spcBef>
+                <a:spcPts val="600"/>
+              </a:spcBef>
               <a:spcAft>
                 <a:spcPts val="200"/>
               </a:spcAft>
-              <a:defRPr b="1" sz="950">
+              <a:defRPr sz="950" b="1">
                 <a:solidFill>
                   <a:srgbClr val="DC2626"/>
                 </a:solidFill>
               </a:defRPr>
             </a:pPr>
             <a:r>
+              <a:rPr sz="1400" dirty="0"/>
               <a:t>Challenge: </a:t>
             </a:r>
             <a:r>
-              <a:rPr b="0">
+              <a:rPr sz="1400" b="0" dirty="0">
                 <a:solidFill>
                   <a:srgbClr val="1E293B"/>
                 </a:solidFill>
@@ -3718,22 +3760,42 @@
           </a:p>
           <a:p>
             <a:pPr>
-              <a:defRPr b="1" sz="950">
+              <a:spcBef>
+                <a:spcPts val="600"/>
+              </a:spcBef>
+              <a:defRPr sz="950" b="1">
                 <a:solidFill>
                   <a:srgbClr val="16A34A"/>
                 </a:solidFill>
               </a:defRPr>
             </a:pPr>
             <a:r>
+              <a:rPr sz="1400" dirty="0"/>
               <a:t>Solution: </a:t>
             </a:r>
             <a:r>
-              <a:rPr b="0">
+              <a:rPr sz="1400" b="0" dirty="0">
                 <a:solidFill>
                   <a:srgbClr val="64748B"/>
                 </a:solidFill>
               </a:rPr>
-              <a:t>Configured order: start-first and parallelism: 1 with container healthcheck to guarantee new replicas are healthy before killing old tasks.</a:t>
+              <a:t>Configured order: start-first and parallelism: 1 with container </a:t>
+            </a:r>
+            <a:r>
+              <a:rPr sz="1400" b="0" dirty="0" err="1">
+                <a:solidFill>
+                  <a:srgbClr val="64748B"/>
+                </a:solidFill>
+              </a:rPr>
+              <a:t>healthcheck</a:t>
+            </a:r>
+            <a:r>
+              <a:rPr sz="1400" b="0" dirty="0">
+                <a:solidFill>
+                  <a:srgbClr val="64748B"/>
+                </a:solidFill>
+              </a:rPr>
+              <a:t> to guarantee new replicas are healthy before killing old tasks.</a:t>
             </a:r>
           </a:p>
         </p:txBody>
@@ -3780,6 +3842,7 @@
           <a:lstStyle/>
           <a:p>
             <a:pPr algn="ctr"/>
+            <a:endParaRPr/>
           </a:p>
         </p:txBody>
       </p:sp>
@@ -3792,7 +3855,7 @@
         <p:spPr>
           <a:xfrm>
             <a:off x="960120" y="4251960"/>
-            <a:ext cx="4754880" cy="1920240"/>
+            <a:ext cx="4754880" cy="1502976"/>
           </a:xfrm>
           <a:prstGeom prst="rect">
             <a:avLst/>
@@ -3806,6 +3869,9 @@
           <a:lstStyle/>
           <a:p>
             <a:pPr>
+              <a:spcBef>
+                <a:spcPts val="600"/>
+              </a:spcBef>
               <a:defRPr sz="1200" b="1">
                 <a:solidFill>
                   <a:srgbClr val="0284C7"/>
@@ -3814,25 +3880,30 @@
               </a:defRPr>
             </a:pPr>
             <a:r>
+              <a:rPr sz="1600" dirty="0"/>
               <a:t>3. Dynamic AMI Portability Across AWS Regions</a:t>
             </a:r>
           </a:p>
           <a:p>
             <a:pPr>
+              <a:spcBef>
+                <a:spcPts val="600"/>
+              </a:spcBef>
               <a:spcAft>
                 <a:spcPts val="200"/>
               </a:spcAft>
-              <a:defRPr b="1" sz="950">
+              <a:defRPr sz="950" b="1">
                 <a:solidFill>
                   <a:srgbClr val="DC2626"/>
                 </a:solidFill>
               </a:defRPr>
             </a:pPr>
             <a:r>
+              <a:rPr sz="1400" dirty="0"/>
               <a:t>Challenge: </a:t>
             </a:r>
             <a:r>
-              <a:rPr b="0">
+              <a:rPr sz="1400" b="0" dirty="0">
                 <a:solidFill>
                   <a:srgbClr val="1E293B"/>
                 </a:solidFill>
@@ -3842,22 +3913,42 @@
           </a:p>
           <a:p>
             <a:pPr>
-              <a:defRPr b="1" sz="950">
+              <a:spcBef>
+                <a:spcPts val="600"/>
+              </a:spcBef>
+              <a:defRPr sz="950" b="1">
                 <a:solidFill>
                   <a:srgbClr val="16A34A"/>
                 </a:solidFill>
               </a:defRPr>
             </a:pPr>
             <a:r>
+              <a:rPr sz="1400" dirty="0"/>
               <a:t>Solution: </a:t>
             </a:r>
             <a:r>
-              <a:rPr b="0">
+              <a:rPr sz="1400" b="0" dirty="0">
                 <a:solidFill>
                   <a:srgbClr val="64748B"/>
                 </a:solidFill>
               </a:rPr>
-              <a:t>Replaced static IDs with data 'aws_ami' 'ubuntu' querying Canonical publisher ID (099720109477) for latest 22.04 LTS build.</a:t>
+              <a:t>Replaced static IDs with data '</a:t>
+            </a:r>
+            <a:r>
+              <a:rPr sz="1400" b="0" dirty="0" err="1">
+                <a:solidFill>
+                  <a:srgbClr val="64748B"/>
+                </a:solidFill>
+              </a:rPr>
+              <a:t>aws_ami</a:t>
+            </a:r>
+            <a:r>
+              <a:rPr sz="1400" b="0" dirty="0">
+                <a:solidFill>
+                  <a:srgbClr val="64748B"/>
+                </a:solidFill>
+              </a:rPr>
+              <a:t>' 'ubuntu' querying Canonical publisher ID (099720109477) for latest 22.04 LTS build.</a:t>
             </a:r>
           </a:p>
         </p:txBody>
@@ -3904,6 +3995,7 @@
           <a:lstStyle/>
           <a:p>
             <a:pPr algn="ctr"/>
+            <a:endParaRPr/>
           </a:p>
         </p:txBody>
       </p:sp>
@@ -3916,7 +4008,7 @@
         <p:spPr>
           <a:xfrm>
             <a:off x="6446520" y="4251960"/>
-            <a:ext cx="4754880" cy="1920240"/>
+            <a:ext cx="4754880" cy="1749197"/>
           </a:xfrm>
           <a:prstGeom prst="rect">
             <a:avLst/>
@@ -3930,6 +4022,9 @@
           <a:lstStyle/>
           <a:p>
             <a:pPr>
+              <a:spcBef>
+                <a:spcPts val="600"/>
+              </a:spcBef>
               <a:defRPr sz="1200" b="1">
                 <a:solidFill>
                   <a:srgbClr val="0284C7"/>
@@ -3938,25 +4033,30 @@
               </a:defRPr>
             </a:pPr>
             <a:r>
+              <a:rPr sz="1600" dirty="0"/>
               <a:t>4. Restricting Docker Swarm Cluster Port Exposure</a:t>
             </a:r>
           </a:p>
           <a:p>
             <a:pPr>
+              <a:spcBef>
+                <a:spcPts val="600"/>
+              </a:spcBef>
               <a:spcAft>
                 <a:spcPts val="200"/>
               </a:spcAft>
-              <a:defRPr b="1" sz="950">
+              <a:defRPr sz="950" b="1">
                 <a:solidFill>
                   <a:srgbClr val="DC2626"/>
                 </a:solidFill>
               </a:defRPr>
             </a:pPr>
             <a:r>
+              <a:rPr sz="1400" dirty="0"/>
               <a:t>Challenge: </a:t>
             </a:r>
             <a:r>
-              <a:rPr b="0">
+              <a:rPr sz="1400" b="0" dirty="0">
                 <a:solidFill>
                   <a:srgbClr val="1E293B"/>
                 </a:solidFill>
@@ -3966,17 +4066,21 @@
           </a:p>
           <a:p>
             <a:pPr>
-              <a:defRPr b="1" sz="950">
+              <a:spcBef>
+                <a:spcPts val="600"/>
+              </a:spcBef>
+              <a:defRPr sz="950" b="1">
                 <a:solidFill>
                   <a:srgbClr val="16A34A"/>
                 </a:solidFill>
               </a:defRPr>
             </a:pPr>
             <a:r>
+              <a:rPr sz="1400" dirty="0"/>
               <a:t>Solution: </a:t>
             </a:r>
             <a:r>
-              <a:rPr b="0">
+              <a:rPr sz="1400" b="0" dirty="0">
                 <a:solidFill>
                   <a:srgbClr val="64748B"/>
                 </a:solidFill>
@@ -3995,7 +4099,7 @@
 </file>
 
 <file path=ppt/slides/slide11.xml><?xml version="1.0" encoding="utf-8"?>
-<p:sld xmlns:a="http://schemas.openxmlformats.org/drawingml/2006/main" xmlns:p="http://schemas.openxmlformats.org/presentationml/2006/main" xmlns:r="http://schemas.openxmlformats.org/officeDocument/2006/relationships">
+<p:sld xmlns:a="http://schemas.openxmlformats.org/drawingml/2006/main" xmlns:r="http://schemas.openxmlformats.org/officeDocument/2006/relationships" xmlns:p="http://schemas.openxmlformats.org/presentationml/2006/main">
   <p:cSld>
     <p:spTree>
       <p:nvGrpSpPr>
@@ -4003,7 +4107,14 @@
         <p:cNvGrpSpPr/>
         <p:nvPr/>
       </p:nvGrpSpPr>
-      <p:grpSpPr/>
+      <p:grpSpPr>
+        <a:xfrm>
+          <a:off x="0" y="0"/>
+          <a:ext cx="0" cy="0"/>
+          <a:chOff x="0" y="0"/>
+          <a:chExt cx="0" cy="0"/>
+        </a:xfrm>
+      </p:grpSpPr>
       <p:sp>
         <p:nvSpPr>
           <p:cNvPr id="2" name="TextBox 1"/>
@@ -4118,6 +4229,7 @@
           <a:lstStyle/>
           <a:p>
             <a:pPr algn="ctr"/>
+            <a:endParaRPr/>
           </a:p>
         </p:txBody>
       </p:sp>
@@ -4163,6 +4275,7 @@
           <a:lstStyle/>
           <a:p>
             <a:pPr algn="ctr"/>
+            <a:endParaRPr/>
           </a:p>
         </p:txBody>
       </p:sp>
@@ -4174,8 +4287,8 @@
         </p:nvSpPr>
         <p:spPr>
           <a:xfrm>
-            <a:off x="960120" y="1783080"/>
-            <a:ext cx="4754880" cy="1920240"/>
+            <a:off x="990600" y="1955954"/>
+            <a:ext cx="4754880" cy="1390124"/>
           </a:xfrm>
           <a:prstGeom prst="rect">
             <a:avLst/>
@@ -4189,6 +4302,9 @@
           <a:lstStyle/>
           <a:p>
             <a:pPr>
+              <a:spcBef>
+                <a:spcPts val="600"/>
+              </a:spcBef>
               <a:defRPr sz="1200" b="1">
                 <a:solidFill>
                   <a:srgbClr val="0284C7"/>
@@ -4197,11 +4313,15 @@
               </a:defRPr>
             </a:pPr>
             <a:r>
+              <a:rPr sz="1600" dirty="0"/>
               <a:t>Step 1: Live Web Application</a:t>
             </a:r>
           </a:p>
           <a:p>
             <a:pPr>
+              <a:spcBef>
+                <a:spcPts val="600"/>
+              </a:spcBef>
               <a:spcAft>
                 <a:spcPts val="200"/>
               </a:spcAft>
@@ -4213,11 +4333,15 @@
               </a:defRPr>
             </a:pPr>
             <a:r>
-              <a:t>•  Open browser: http://16.178.178.44</a:t>
-            </a:r>
-          </a:p>
-          <a:p>
-            <a:pPr>
+              <a:rPr sz="1400" dirty="0"/>
+              <a:t>•  Open browser: http://54.253.170.114</a:t>
+            </a:r>
+          </a:p>
+          <a:p>
+            <a:pPr>
+              <a:spcBef>
+                <a:spcPts val="600"/>
+              </a:spcBef>
               <a:spcAft>
                 <a:spcPts val="200"/>
               </a:spcAft>
@@ -4229,11 +4353,23 @@
               </a:defRPr>
             </a:pPr>
             <a:r>
-              <a:t>•  Demonstrates Nginx reverse proxy serving the full interactive dashboard on Port 80.</a:t>
-            </a:r>
-          </a:p>
-          <a:p>
-            <a:pPr>
+              <a:rPr sz="1400" dirty="0"/>
+              <a:t>•  Demonstrates Nginx reverse proxy serving the full </a:t>
+            </a:r>
+            <a:r>
+              <a:rPr lang="en-US" sz="1400" dirty="0"/>
+              <a:t>	</a:t>
+            </a:r>
+            <a:r>
+              <a:rPr sz="1400" dirty="0"/>
+              <a:t>interactive dashboard on Port 80.</a:t>
+            </a:r>
+          </a:p>
+          <a:p>
+            <a:pPr>
+              <a:spcBef>
+                <a:spcPts val="600"/>
+              </a:spcBef>
               <a:spcAft>
                 <a:spcPts val="200"/>
               </a:spcAft>
@@ -4245,6 +4381,7 @@
               </a:defRPr>
             </a:pPr>
             <a:r>
+              <a:rPr sz="1400" dirty="0"/>
               <a:t>•  Verify real-time container hostname and system statistics.</a:t>
             </a:r>
           </a:p>
@@ -4292,6 +4429,7 @@
           <a:lstStyle/>
           <a:p>
             <a:pPr algn="ctr"/>
+            <a:endParaRPr/>
           </a:p>
         </p:txBody>
       </p:sp>
@@ -4304,7 +4442,7 @@
         <p:spPr>
           <a:xfrm>
             <a:off x="6446520" y="1783080"/>
-            <a:ext cx="4754880" cy="1920240"/>
+            <a:ext cx="4754880" cy="1821011"/>
           </a:xfrm>
           <a:prstGeom prst="rect">
             <a:avLst/>
@@ -4326,11 +4464,15 @@
               </a:defRPr>
             </a:pPr>
             <a:r>
+              <a:rPr sz="1600" dirty="0"/>
               <a:t>Step 2: HTTP Endpoint Curl Verification</a:t>
             </a:r>
           </a:p>
           <a:p>
             <a:pPr>
+              <a:spcBef>
+                <a:spcPts val="600"/>
+              </a:spcBef>
               <a:spcAft>
                 <a:spcPts val="200"/>
               </a:spcAft>
@@ -4342,11 +4484,23 @@
               </a:defRPr>
             </a:pPr>
             <a:r>
-              <a:t>•  curl -s http://16.178.178.44/health  -&gt; Returns {"status": "healthy", "version": "1.0.0"}</a:t>
-            </a:r>
-          </a:p>
-          <a:p>
-            <a:pPr>
+              <a:rPr sz="1400" dirty="0"/>
+              <a:t>•  curl -s http://54.253.170.114/health  -&gt; Returns {"status": </a:t>
+            </a:r>
+            <a:r>
+              <a:rPr lang="en-US" sz="1400" dirty="0"/>
+              <a:t>	</a:t>
+            </a:r>
+            <a:r>
+              <a:rPr sz="1400" dirty="0"/>
+              <a:t>"healthy", "version": "1.0.0"}</a:t>
+            </a:r>
+          </a:p>
+          <a:p>
+            <a:pPr>
+              <a:spcBef>
+                <a:spcPts val="600"/>
+              </a:spcBef>
               <a:spcAft>
                 <a:spcPts val="200"/>
               </a:spcAft>
@@ -4358,11 +4512,23 @@
               </a:defRPr>
             </a:pPr>
             <a:r>
-              <a:t>•  curl -s http://16.178.178.44/api/info -&gt; Demonstrates round-robin hostname switching across replicas</a:t>
-            </a:r>
-          </a:p>
-          <a:p>
-            <a:pPr>
+              <a:rPr sz="1400" dirty="0"/>
+              <a:t>•  curl -s http://54.253.170.114/api/info -&gt; Demonstrates </a:t>
+            </a:r>
+            <a:r>
+              <a:rPr lang="en-US" sz="1400" dirty="0"/>
+              <a:t>	</a:t>
+            </a:r>
+            <a:r>
+              <a:rPr sz="1400" dirty="0"/>
+              <a:t>round-robin hostname switching across replicas</a:t>
+            </a:r>
+          </a:p>
+          <a:p>
+            <a:pPr>
+              <a:spcBef>
+                <a:spcPts val="600"/>
+              </a:spcBef>
               <a:spcAft>
                 <a:spcPts val="200"/>
               </a:spcAft>
@@ -4374,7 +4540,16 @@
               </a:defRPr>
             </a:pPr>
             <a:r>
-              <a:t>•  curl -s http://16.178.178.44/nginx-health -&gt; Confirms load balancer routing integrity</a:t>
+              <a:rPr sz="1400" dirty="0"/>
+              <a:t>•  curl -s http://54.253.170.114/nginx-health -&gt; Confirms </a:t>
+            </a:r>
+            <a:r>
+              <a:rPr lang="en-US" sz="1400" dirty="0"/>
+              <a:t>	</a:t>
+            </a:r>
+            <a:r>
+              <a:rPr sz="1400" dirty="0"/>
+              <a:t>load balancer routing integrity</a:t>
             </a:r>
           </a:p>
         </p:txBody>
@@ -4421,6 +4596,7 @@
           <a:lstStyle/>
           <a:p>
             <a:pPr algn="ctr"/>
+            <a:endParaRPr/>
           </a:p>
         </p:txBody>
       </p:sp>
@@ -4433,7 +4609,7 @@
         <p:spPr>
           <a:xfrm>
             <a:off x="960120" y="4251960"/>
-            <a:ext cx="4754880" cy="1920240"/>
+            <a:ext cx="4754880" cy="1605568"/>
           </a:xfrm>
           <a:prstGeom prst="rect">
             <a:avLst/>
@@ -4455,11 +4631,15 @@
               </a:defRPr>
             </a:pPr>
             <a:r>
+              <a:rPr sz="1600" dirty="0"/>
               <a:t>Step 3: Jenkins CI/CD Automation</a:t>
             </a:r>
           </a:p>
           <a:p>
             <a:pPr>
+              <a:spcBef>
+                <a:spcPts val="600"/>
+              </a:spcBef>
               <a:spcAft>
                 <a:spcPts val="200"/>
               </a:spcAft>
@@ -4471,11 +4651,29 @@
               </a:defRPr>
             </a:pPr>
             <a:r>
-              <a:t>•  Open Jenkins: http://localhost:8080/job/Assignment-CI-CD/</a:t>
-            </a:r>
-          </a:p>
-          <a:p>
-            <a:pPr>
+              <a:rPr sz="1400" dirty="0"/>
+              <a:t>•  Open Jenkins: </a:t>
+            </a:r>
+            <a:r>
+              <a:rPr sz="1400" dirty="0">
+                <a:hlinkClick r:id="rId2"/>
+              </a:rPr>
+              <a:t>http://localhost:8080/job/Assignment-CI-</a:t>
+            </a:r>
+            <a:r>
+              <a:rPr lang="en-US" sz="1400" dirty="0"/>
+              <a:t>	</a:t>
+            </a:r>
+            <a:r>
+              <a:rPr sz="1400" dirty="0"/>
+              <a:t>CD/</a:t>
+            </a:r>
+          </a:p>
+          <a:p>
+            <a:pPr>
+              <a:spcBef>
+                <a:spcPts val="600"/>
+              </a:spcBef>
               <a:spcAft>
                 <a:spcPts val="200"/>
               </a:spcAft>
@@ -4487,11 +4685,15 @@
               </a:defRPr>
             </a:pPr>
             <a:r>
+              <a:rPr sz="1400" dirty="0"/>
               <a:t>•  Show Build #4 Pipeline Stage View with all 5 stages green.</a:t>
             </a:r>
           </a:p>
           <a:p>
             <a:pPr>
+              <a:spcBef>
+                <a:spcPts val="600"/>
+              </a:spcBef>
               <a:spcAft>
                 <a:spcPts val="200"/>
               </a:spcAft>
@@ -4503,7 +4705,32 @@
               </a:defRPr>
             </a:pPr>
             <a:r>
-              <a:t>•  Inspect console output confirming Pytest (5/5 passed, 89% cov) and Flake8 (0 errors).</a:t>
+              <a:rPr sz="1400" dirty="0"/>
+              <a:t>•  Inspect console output confirming </a:t>
+            </a:r>
+            <a:r>
+              <a:rPr sz="1400" dirty="0" err="1"/>
+              <a:t>Pytest</a:t>
+            </a:r>
+            <a:r>
+              <a:rPr sz="1400" dirty="0"/>
+              <a:t> (5/5 passed, </a:t>
+            </a:r>
+            <a:r>
+              <a:rPr lang="en-US" sz="1400" dirty="0"/>
+              <a:t>	</a:t>
+            </a:r>
+            <a:r>
+              <a:rPr sz="1400" dirty="0"/>
+              <a:t>89% </a:t>
+            </a:r>
+            <a:r>
+              <a:rPr sz="1400" dirty="0" err="1"/>
+              <a:t>cov</a:t>
+            </a:r>
+            <a:r>
+              <a:rPr sz="1400" dirty="0"/>
+              <a:t>) and Flake8 (0 errors).</a:t>
             </a:r>
           </a:p>
         </p:txBody>
@@ -4550,6 +4777,7 @@
           <a:lstStyle/>
           <a:p>
             <a:pPr algn="ctr"/>
+            <a:endParaRPr/>
           </a:p>
         </p:txBody>
       </p:sp>
@@ -4562,7 +4790,7 @@
         <p:spPr>
           <a:xfrm>
             <a:off x="6446520" y="4251960"/>
-            <a:ext cx="4754880" cy="1920240"/>
+            <a:ext cx="4754880" cy="1574790"/>
           </a:xfrm>
           <a:prstGeom prst="rect">
             <a:avLst/>
@@ -4576,6 +4804,9 @@
           <a:lstStyle/>
           <a:p>
             <a:pPr>
+              <a:spcBef>
+                <a:spcPts val="600"/>
+              </a:spcBef>
               <a:defRPr sz="1200" b="1">
                 <a:solidFill>
                   <a:srgbClr val="0284C7"/>
@@ -4584,11 +4815,15 @@
               </a:defRPr>
             </a:pPr>
             <a:r>
+              <a:rPr sz="1400" dirty="0"/>
               <a:t>Step 4: Docker Swarm Cluster via SSH</a:t>
             </a:r>
           </a:p>
           <a:p>
             <a:pPr>
+              <a:spcBef>
+                <a:spcPts val="600"/>
+              </a:spcBef>
               <a:spcAft>
                 <a:spcPts val="200"/>
               </a:spcAft>
@@ -4600,11 +4835,31 @@
               </a:defRPr>
             </a:pPr>
             <a:r>
-              <a:t>•  ssh -i chamroeunsaran.pem ubuntu@16.178.178.44</a:t>
-            </a:r>
-          </a:p>
-          <a:p>
-            <a:pPr>
+              <a:rPr sz="1400" dirty="0"/>
+              <a:t>•  ssh -</a:t>
+            </a:r>
+            <a:r>
+              <a:rPr sz="1400" dirty="0" err="1"/>
+              <a:t>i</a:t>
+            </a:r>
+            <a:r>
+              <a:rPr sz="1400" dirty="0"/>
+              <a:t> </a:t>
+            </a:r>
+            <a:r>
+              <a:rPr sz="1400" dirty="0" err="1"/>
+              <a:t>chamroeunsaran.pem</a:t>
+            </a:r>
+            <a:r>
+              <a:rPr sz="1400" dirty="0"/>
+              <a:t> ubuntu@54.253.170.114</a:t>
+            </a:r>
+          </a:p>
+          <a:p>
+            <a:pPr>
+              <a:spcBef>
+                <a:spcPts val="600"/>
+              </a:spcBef>
               <a:spcAft>
                 <a:spcPts val="200"/>
               </a:spcAft>
@@ -4616,11 +4871,39 @@
               </a:defRPr>
             </a:pPr>
             <a:r>
-              <a:t>•  Run 'sudo docker service ls' to demonstrate 2/2 backend and 1/1 nginx replicas.</a:t>
-            </a:r>
-          </a:p>
-          <a:p>
-            <a:pPr>
+              <a:rPr sz="1400" dirty="0"/>
+              <a:t>•  Run '</a:t>
+            </a:r>
+            <a:r>
+              <a:rPr sz="1400" dirty="0" err="1"/>
+              <a:t>sudo</a:t>
+            </a:r>
+            <a:r>
+              <a:rPr sz="1400" dirty="0"/>
+              <a:t> docker service </a:t>
+            </a:r>
+            <a:r>
+              <a:rPr sz="1400" dirty="0" err="1"/>
+              <a:t>ls'</a:t>
+            </a:r>
+            <a:r>
+              <a:rPr sz="1400" dirty="0"/>
+              <a:t> to demonstrate 2/2 backend </a:t>
+            </a:r>
+            <a:r>
+              <a:rPr lang="en-US" sz="1400" dirty="0"/>
+              <a:t>	</a:t>
+            </a:r>
+            <a:r>
+              <a:rPr sz="1400" dirty="0"/>
+              <a:t>and 1/1 nginx replicas.</a:t>
+            </a:r>
+          </a:p>
+          <a:p>
+            <a:pPr>
+              <a:spcBef>
+                <a:spcPts val="600"/>
+              </a:spcBef>
               <a:spcAft>
                 <a:spcPts val="200"/>
               </a:spcAft>
@@ -4632,7 +4915,32 @@
               </a:defRPr>
             </a:pPr>
             <a:r>
-              <a:t>•  Run 'sudo docker stack ps cicd-assignment' showing distributed tasks across cluster nodes.</a:t>
+              <a:rPr sz="1400" dirty="0"/>
+              <a:t>•  Run '</a:t>
+            </a:r>
+            <a:r>
+              <a:rPr sz="1400" dirty="0" err="1"/>
+              <a:t>sudo</a:t>
+            </a:r>
+            <a:r>
+              <a:rPr sz="1400" dirty="0"/>
+              <a:t> docker stack </a:t>
+            </a:r>
+            <a:r>
+              <a:rPr sz="1400" dirty="0" err="1"/>
+              <a:t>ps</a:t>
+            </a:r>
+            <a:r>
+              <a:rPr sz="1400" dirty="0"/>
+              <a:t> cicd-homework2' showing </a:t>
+            </a:r>
+            <a:r>
+              <a:rPr lang="en-US" sz="1400" dirty="0"/>
+              <a:t>	</a:t>
+            </a:r>
+            <a:r>
+              <a:rPr sz="1400" dirty="0"/>
+              <a:t>distributed tasks across cluster nodes.</a:t>
             </a:r>
           </a:p>
         </p:txBody>
@@ -4646,7 +4954,7 @@
 </file>
 
 <file path=ppt/slides/slide12.xml><?xml version="1.0" encoding="utf-8"?>
-<p:sld xmlns:a="http://schemas.openxmlformats.org/drawingml/2006/main" xmlns:p="http://schemas.openxmlformats.org/presentationml/2006/main" xmlns:r="http://schemas.openxmlformats.org/officeDocument/2006/relationships">
+<p:sld xmlns:a="http://schemas.openxmlformats.org/drawingml/2006/main" xmlns:r="http://schemas.openxmlformats.org/officeDocument/2006/relationships" xmlns:p="http://schemas.openxmlformats.org/presentationml/2006/main">
   <p:cSld>
     <p:spTree>
       <p:nvGrpSpPr>
@@ -4654,7 +4962,14 @@
         <p:cNvGrpSpPr/>
         <p:nvPr/>
       </p:nvGrpSpPr>
-      <p:grpSpPr/>
+      <p:grpSpPr>
+        <a:xfrm>
+          <a:off x="0" y="0"/>
+          <a:ext cx="0" cy="0"/>
+          <a:chOff x="0" y="0"/>
+          <a:chExt cx="0" cy="0"/>
+        </a:xfrm>
+      </p:grpSpPr>
       <p:sp>
         <p:nvSpPr>
           <p:cNvPr id="2" name="Rectangle 1"/>
@@ -4695,6 +5010,7 @@
           <a:lstStyle/>
           <a:p>
             <a:pPr algn="ctr"/>
+            <a:endParaRPr/>
           </a:p>
         </p:txBody>
       </p:sp>
@@ -4740,6 +5056,7 @@
           <a:lstStyle/>
           <a:p>
             <a:pPr algn="ctr"/>
+            <a:endParaRPr/>
           </a:p>
         </p:txBody>
       </p:sp>
@@ -4751,8 +5068,8 @@
         </p:nvSpPr>
         <p:spPr>
           <a:xfrm>
-            <a:off x="1097280" y="1097280"/>
-            <a:ext cx="9601200" cy="4572000"/>
+            <a:off x="1097280" y="1460093"/>
+            <a:ext cx="9601200" cy="3354765"/>
           </a:xfrm>
           <a:prstGeom prst="rect">
             <a:avLst/>
@@ -4774,6 +5091,7 @@
               </a:defRPr>
             </a:pPr>
             <a:r>
+              <a:rPr dirty="0"/>
               <a:t>PROJECT DELIVERABLES &amp; CONCLUSION</a:t>
             </a:r>
           </a:p>
@@ -4790,6 +5108,7 @@
               </a:defRPr>
             </a:pPr>
             <a:r>
+              <a:rPr sz="1600" dirty="0"/>
               <a:t>All Capstone Requirements 100% Verified &amp; Fulfilled</a:t>
             </a:r>
           </a:p>
@@ -4806,10 +5125,11 @@
               </a:defRPr>
             </a:pPr>
             <a:r>
+              <a:rPr sz="1600" dirty="0"/>
               <a:t>✓ Git Repository: </a:t>
             </a:r>
             <a:r>
-              <a:rPr b="0">
+              <a:rPr sz="1600" b="0" dirty="0">
                 <a:solidFill>
                   <a:srgbClr val="F8FAFC"/>
                 </a:solidFill>
@@ -4830,10 +5150,11 @@
               </a:defRPr>
             </a:pPr>
             <a:r>
+              <a:rPr sz="1600" dirty="0"/>
               <a:t>✓ CI/CD Pipeline: </a:t>
             </a:r>
             <a:r>
-              <a:rPr b="0">
+              <a:rPr sz="1600" b="0" dirty="0">
                 <a:solidFill>
                   <a:srgbClr val="F8FAFC"/>
                 </a:solidFill>
@@ -4854,10 +5175,11 @@
               </a:defRPr>
             </a:pPr>
             <a:r>
+              <a:rPr sz="1600" dirty="0"/>
               <a:t>✓ Infrastructure as Code: </a:t>
             </a:r>
             <a:r>
-              <a:rPr b="0">
+              <a:rPr sz="1600" b="0" dirty="0">
                 <a:solidFill>
                   <a:srgbClr val="F8FAFC"/>
                 </a:solidFill>
@@ -4878,10 +5200,11 @@
               </a:defRPr>
             </a:pPr>
             <a:r>
+              <a:rPr sz="1600" dirty="0"/>
               <a:t>✓ Container Orchestration: </a:t>
             </a:r>
             <a:r>
-              <a:rPr b="0">
+              <a:rPr sz="1600" b="0" dirty="0">
                 <a:solidFill>
                   <a:srgbClr val="F8FAFC"/>
                 </a:solidFill>
@@ -4902,10 +5225,11 @@
               </a:defRPr>
             </a:pPr>
             <a:r>
+              <a:rPr sz="1600" dirty="0"/>
               <a:t>✓ Official Report Deliverables: </a:t>
             </a:r>
             <a:r>
-              <a:rPr b="0">
+              <a:rPr sz="1600" b="0" dirty="0">
                 <a:solidFill>
                   <a:srgbClr val="F8FAFC"/>
                 </a:solidFill>
@@ -4926,10 +5250,11 @@
               </a:defRPr>
             </a:pPr>
             <a:r>
+              <a:rPr sz="1600" dirty="0"/>
               <a:t>✓ Extra Credit (+5 Points): </a:t>
             </a:r>
             <a:r>
-              <a:rPr b="0">
+              <a:rPr sz="1600" b="0" dirty="0">
                 <a:solidFill>
                   <a:srgbClr val="F8FAFC"/>
                 </a:solidFill>
@@ -4938,16 +5263,11 @@
             </a:r>
           </a:p>
           <a:p>
-            <a:br/>
-            <a:pPr algn="ctr">
-              <a:defRPr sz="1600" b="1">
-                <a:solidFill>
-                  <a:srgbClr val="0284C7"/>
-                </a:solidFill>
-                <a:latin typeface="Segoe UI"/>
-              </a:defRPr>
-            </a:pPr>
-            <a:r>
+            <a:br>
+              <a:rPr sz="1600" dirty="0"/>
+            </a:br>
+            <a:r>
+              <a:rPr sz="1600" dirty="0"/>
               <a:t>Thank You!  —  Questions &amp; Discussion</a:t>
             </a:r>
           </a:p>
@@ -4962,7 +5282,7 @@
 </file>
 
 <file path=ppt/slides/slide2.xml><?xml version="1.0" encoding="utf-8"?>
-<p:sld xmlns:a="http://schemas.openxmlformats.org/drawingml/2006/main" xmlns:p="http://schemas.openxmlformats.org/presentationml/2006/main" xmlns:r="http://schemas.openxmlformats.org/officeDocument/2006/relationships">
+<p:sld xmlns:a="http://schemas.openxmlformats.org/drawingml/2006/main" xmlns:r="http://schemas.openxmlformats.org/officeDocument/2006/relationships" xmlns:p="http://schemas.openxmlformats.org/presentationml/2006/main">
   <p:cSld>
     <p:spTree>
       <p:nvGrpSpPr>
@@ -4970,7 +5290,14 @@
         <p:cNvGrpSpPr/>
         <p:nvPr/>
       </p:nvGrpSpPr>
-      <p:grpSpPr/>
+      <p:grpSpPr>
+        <a:xfrm>
+          <a:off x="0" y="0"/>
+          <a:ext cx="0" cy="0"/>
+          <a:chOff x="0" y="0"/>
+          <a:chExt cx="0" cy="0"/>
+        </a:xfrm>
+      </p:grpSpPr>
       <p:sp>
         <p:nvSpPr>
           <p:cNvPr id="2" name="TextBox 1"/>
@@ -5038,6 +5365,7 @@
               </a:defRPr>
             </a:pPr>
             <a:r>
+              <a:rPr dirty="0"/>
               <a:t>Engineering Goals &amp; Rubric Fulfillment</a:t>
             </a:r>
           </a:p>
@@ -5085,6 +5413,7 @@
           <a:lstStyle/>
           <a:p>
             <a:pPr algn="ctr"/>
+            <a:endParaRPr/>
           </a:p>
         </p:txBody>
       </p:sp>
@@ -5130,6 +5459,7 @@
           <a:lstStyle/>
           <a:p>
             <a:pPr algn="ctr"/>
+            <a:endParaRPr/>
           </a:p>
         </p:txBody>
       </p:sp>
@@ -5142,7 +5472,7 @@
         <p:spPr>
           <a:xfrm>
             <a:off x="960120" y="1783080"/>
-            <a:ext cx="4754880" cy="1920240"/>
+            <a:ext cx="4831080" cy="1800493"/>
           </a:xfrm>
           <a:prstGeom prst="rect">
             <a:avLst/>
@@ -5164,7 +5494,16 @@
               </a:defRPr>
             </a:pPr>
             <a:r>
-              <a:t>1. GitOps &amp; Version Control</a:t>
+              <a:rPr sz="1400" dirty="0"/>
+              <a:t>1. </a:t>
+            </a:r>
+            <a:r>
+              <a:rPr sz="1400" dirty="0" err="1"/>
+              <a:t>GitOps</a:t>
+            </a:r>
+            <a:r>
+              <a:rPr sz="1400" dirty="0"/>
+              <a:t> &amp; Version Control</a:t>
             </a:r>
           </a:p>
           <a:p>
@@ -5180,7 +5519,16 @@
               </a:defRPr>
             </a:pPr>
             <a:r>
-              <a:t>•  Feature branching strategy (feature/eks-argocd-cicd)</a:t>
+              <a:rPr sz="1400" dirty="0"/>
+              <a:t>•  Feature branching strategy (feature/</a:t>
+            </a:r>
+            <a:r>
+              <a:rPr sz="1400" dirty="0" err="1"/>
+              <a:t>eks-argocd-cicd</a:t>
+            </a:r>
+            <a:r>
+              <a:rPr sz="1400" dirty="0"/>
+              <a:t>)</a:t>
             </a:r>
           </a:p>
           <a:p>
@@ -5196,7 +5544,16 @@
               </a:defRPr>
             </a:pPr>
             <a:r>
-              <a:t>•  Pull Request workflow with code reviews and automated hooks</a:t>
+              <a:rPr sz="1400" dirty="0"/>
+              <a:t>•  Pull Request workflow with code reviews and automated </a:t>
+            </a:r>
+            <a:r>
+              <a:rPr lang="en-US" sz="1400" dirty="0"/>
+              <a:t>	</a:t>
+            </a:r>
+            <a:r>
+              <a:rPr sz="1400" dirty="0"/>
+              <a:t>hooks</a:t>
             </a:r>
           </a:p>
           <a:p>
@@ -5212,7 +5569,16 @@
               </a:defRPr>
             </a:pPr>
             <a:r>
-              <a:t>•  Frequent, atomic commits with descriptive conventional messages</a:t>
+              <a:rPr sz="1400" dirty="0"/>
+              <a:t>•  Frequent, atomic commits with descriptive conventional </a:t>
+            </a:r>
+            <a:r>
+              <a:rPr lang="en-US" sz="1400" dirty="0"/>
+              <a:t>	</a:t>
+            </a:r>
+            <a:r>
+              <a:rPr sz="1400" dirty="0"/>
+              <a:t>messages</a:t>
             </a:r>
           </a:p>
           <a:p>
@@ -5228,7 +5594,16 @@
               </a:defRPr>
             </a:pPr>
             <a:r>
-              <a:t>•  Zero credentials or sensitive secrets committed to repository</a:t>
+              <a:rPr sz="1400" dirty="0"/>
+              <a:t>•  Zero credentials or sensitive secrets committed to </a:t>
+            </a:r>
+            <a:r>
+              <a:rPr lang="en-US" sz="1400" dirty="0"/>
+              <a:t>	</a:t>
+            </a:r>
+            <a:r>
+              <a:rPr sz="1400" dirty="0"/>
+              <a:t>repository</a:t>
             </a:r>
           </a:p>
         </p:txBody>
@@ -5275,6 +5650,7 @@
           <a:lstStyle/>
           <a:p>
             <a:pPr algn="ctr"/>
+            <a:endParaRPr/>
           </a:p>
         </p:txBody>
       </p:sp>
@@ -5287,7 +5663,7 @@
         <p:spPr>
           <a:xfrm>
             <a:off x="6446520" y="1783080"/>
-            <a:ext cx="4754880" cy="1920240"/>
+            <a:ext cx="4754880" cy="1800493"/>
           </a:xfrm>
           <a:prstGeom prst="rect">
             <a:avLst/>
@@ -5309,7 +5685,16 @@
               </a:defRPr>
             </a:pPr>
             <a:r>
-              <a:t>2. Infrastructure as Code (IaC)</a:t>
+              <a:rPr sz="1400" dirty="0"/>
+              <a:t>2. Infrastructure as Code (</a:t>
+            </a:r>
+            <a:r>
+              <a:rPr sz="1400" dirty="0" err="1"/>
+              <a:t>IaC</a:t>
+            </a:r>
+            <a:r>
+              <a:rPr sz="1400" dirty="0"/>
+              <a:t>)</a:t>
             </a:r>
           </a:p>
           <a:p>
@@ -5325,7 +5710,16 @@
               </a:defRPr>
             </a:pPr>
             <a:r>
-              <a:t>•  100% reproducible AWS EC2 infrastructure using Terraform HCL</a:t>
+              <a:rPr sz="1400" dirty="0"/>
+              <a:t>•  100% reproducible AWS EC2 infrastructure using </a:t>
+            </a:r>
+            <a:r>
+              <a:rPr lang="en-US" sz="1400" dirty="0"/>
+              <a:t>	</a:t>
+            </a:r>
+            <a:r>
+              <a:rPr sz="1400" dirty="0"/>
+              <a:t>Terraform HCL</a:t>
             </a:r>
           </a:p>
           <a:p>
@@ -5341,7 +5735,16 @@
               </a:defRPr>
             </a:pPr>
             <a:r>
-              <a:t>•  Dedicated VPC, public subnets, internet gateway, and route tables</a:t>
+              <a:rPr sz="1400" dirty="0"/>
+              <a:t>•  Dedicated VPC, public subnets, internet gateway, and </a:t>
+            </a:r>
+            <a:r>
+              <a:rPr lang="en-US" sz="1400" dirty="0"/>
+              <a:t>	</a:t>
+            </a:r>
+            <a:r>
+              <a:rPr sz="1400" dirty="0"/>
+              <a:t>route tables</a:t>
             </a:r>
           </a:p>
           <a:p>
@@ -5357,7 +5760,16 @@
               </a:defRPr>
             </a:pPr>
             <a:r>
-              <a:t>•  Least-privilege Security Groups with internal cluster isolation (self=true)</a:t>
+              <a:rPr sz="1400" dirty="0"/>
+              <a:t>•  Least-privilege Security Groups with internal cluster </a:t>
+            </a:r>
+            <a:r>
+              <a:rPr lang="en-US" sz="1400" dirty="0"/>
+              <a:t>	</a:t>
+            </a:r>
+            <a:r>
+              <a:rPr sz="1400" dirty="0"/>
+              <a:t>isolation (self=true)</a:t>
             </a:r>
           </a:p>
           <a:p>
@@ -5373,6 +5785,7 @@
               </a:defRPr>
             </a:pPr>
             <a:r>
+              <a:rPr sz="1400" dirty="0"/>
               <a:t>•  Dynamic Canonical Ubuntu 22.04 LTS AMI discovery</a:t>
             </a:r>
           </a:p>
@@ -5420,6 +5833,7 @@
           <a:lstStyle/>
           <a:p>
             <a:pPr algn="ctr"/>
+            <a:endParaRPr/>
           </a:p>
         </p:txBody>
       </p:sp>
@@ -5432,7 +5846,7 @@
         <p:spPr>
           <a:xfrm>
             <a:off x="960120" y="4251960"/>
-            <a:ext cx="4754880" cy="1920240"/>
+            <a:ext cx="4754880" cy="1800493"/>
           </a:xfrm>
           <a:prstGeom prst="rect">
             <a:avLst/>
@@ -5454,6 +5868,7 @@
               </a:defRPr>
             </a:pPr>
             <a:r>
+              <a:rPr sz="1400" dirty="0"/>
               <a:t>3. Automated CI/CD Pipeline</a:t>
             </a:r>
           </a:p>
@@ -5470,7 +5885,24 @@
               </a:defRPr>
             </a:pPr>
             <a:r>
-              <a:t>•  Declarative Jenkinsfile pipeline triggered automatically on push</a:t>
+              <a:rPr sz="1400" dirty="0"/>
+              <a:t>•  Declarative </a:t>
+            </a:r>
+            <a:r>
+              <a:rPr sz="1400" dirty="0" err="1"/>
+              <a:t>Jenkinsfile</a:t>
+            </a:r>
+            <a:r>
+              <a:rPr sz="1400" dirty="0"/>
+              <a:t> pipeline triggered automatically on </a:t>
+            </a:r>
+            <a:r>
+              <a:rPr lang="en-US" sz="1400" dirty="0"/>
+              <a:t>	</a:t>
+            </a:r>
+            <a:r>
+              <a:rPr sz="1400" dirty="0"/>
+              <a:t>push</a:t>
             </a:r>
           </a:p>
           <a:p>
@@ -5486,7 +5918,32 @@
               </a:defRPr>
             </a:pPr>
             <a:r>
-              <a:t>•  Automated PEP8 linting (Flake8) and unit tests (Pytest 5/5, 89% cov)</a:t>
+              <a:rPr sz="1400" dirty="0"/>
+              <a:t>•  Automated PEP8 linting (Flake8) and unit tests (</a:t>
+            </a:r>
+            <a:r>
+              <a:rPr sz="1400" dirty="0" err="1"/>
+              <a:t>Pytest</a:t>
+            </a:r>
+            <a:r>
+              <a:rPr sz="1400" dirty="0"/>
+              <a:t> 5/5, </a:t>
+            </a:r>
+            <a:r>
+              <a:rPr lang="en-US" sz="1400" dirty="0"/>
+              <a:t>	</a:t>
+            </a:r>
+            <a:r>
+              <a:rPr sz="1400" dirty="0"/>
+              <a:t>89% </a:t>
+            </a:r>
+            <a:r>
+              <a:rPr sz="1400" dirty="0" err="1"/>
+              <a:t>cov</a:t>
+            </a:r>
+            <a:r>
+              <a:rPr sz="1400" dirty="0"/>
+              <a:t>)</a:t>
             </a:r>
           </a:p>
           <a:p>
@@ -5502,7 +5959,24 @@
               </a:defRPr>
             </a:pPr>
             <a:r>
-              <a:t>•  Container layer vulnerability scanning via Trivy CVE inspector</a:t>
+              <a:rPr sz="1400" dirty="0"/>
+              <a:t>•  Container layer vulnerability scanning via </a:t>
+            </a:r>
+            <a:r>
+              <a:rPr sz="1400" dirty="0" err="1"/>
+              <a:t>Trivy</a:t>
+            </a:r>
+            <a:r>
+              <a:rPr sz="1400" dirty="0"/>
+              <a:t> CVE </a:t>
+            </a:r>
+            <a:r>
+              <a:rPr lang="en-US" sz="1400" dirty="0"/>
+              <a:t>	</a:t>
+            </a:r>
+            <a:r>
+              <a:rPr sz="1400" dirty="0"/>
+              <a:t>inspector</a:t>
             </a:r>
           </a:p>
           <a:p>
@@ -5518,6 +5992,7 @@
               </a:defRPr>
             </a:pPr>
             <a:r>
+              <a:rPr sz="1400" dirty="0"/>
               <a:t>•  Automated image building and publishing to Amazon ECR</a:t>
             </a:r>
           </a:p>
@@ -5565,6 +6040,7 @@
           <a:lstStyle/>
           <a:p>
             <a:pPr algn="ctr"/>
+            <a:endParaRPr/>
           </a:p>
         </p:txBody>
       </p:sp>
@@ -5577,7 +6053,7 @@
         <p:spPr>
           <a:xfrm>
             <a:off x="6446520" y="4251960"/>
-            <a:ext cx="4754880" cy="1920240"/>
+            <a:ext cx="4754880" cy="1800493"/>
           </a:xfrm>
           <a:prstGeom prst="rect">
             <a:avLst/>
@@ -5599,6 +6075,7 @@
               </a:defRPr>
             </a:pPr>
             <a:r>
+              <a:rPr sz="1400" dirty="0"/>
               <a:t>4. Resilient Container Orchestration</a:t>
             </a:r>
           </a:p>
@@ -5615,7 +6092,16 @@
               </a:defRPr>
             </a:pPr>
             <a:r>
-              <a:t>•  Docker Swarm multi-node cluster (1 Manager Leader + 2 Workers)</a:t>
+              <a:rPr sz="1400" dirty="0"/>
+              <a:t>•  Docker Swarm multi-node cluster (1 Manager Leader + 2 </a:t>
+            </a:r>
+            <a:r>
+              <a:rPr lang="en-US" sz="1400" dirty="0"/>
+              <a:t>	</a:t>
+            </a:r>
+            <a:r>
+              <a:rPr sz="1400" dirty="0"/>
+              <a:t>Workers)</a:t>
             </a:r>
           </a:p>
           <a:p>
@@ -5631,7 +6117,16 @@
               </a:defRPr>
             </a:pPr>
             <a:r>
-              <a:t>•  Nginx reverse proxy load-balancing traffic across backend replicas</a:t>
+              <a:rPr sz="1400" dirty="0"/>
+              <a:t>•  Nginx reverse proxy load-balancing traffic across backend </a:t>
+            </a:r>
+            <a:r>
+              <a:rPr lang="en-US" sz="1400" dirty="0"/>
+              <a:t>	</a:t>
+            </a:r>
+            <a:r>
+              <a:rPr sz="1400" dirty="0"/>
+              <a:t>replicas</a:t>
             </a:r>
           </a:p>
           <a:p>
@@ -5647,6 +6142,7 @@
               </a:defRPr>
             </a:pPr>
             <a:r>
+              <a:rPr sz="1400" dirty="0"/>
               <a:t>•  Zero-downtime rolling update strategy (order: start-first)</a:t>
             </a:r>
           </a:p>
@@ -5663,7 +6159,16 @@
               </a:defRPr>
             </a:pPr>
             <a:r>
-              <a:t>•  Extra Credit (+5): Automated Telegram alerts on build status</a:t>
+              <a:rPr sz="1400" dirty="0"/>
+              <a:t>•  Extra Credit (+5): Automated Telegram alerts on build </a:t>
+            </a:r>
+            <a:r>
+              <a:rPr lang="en-US" sz="1400" dirty="0"/>
+              <a:t>	</a:t>
+            </a:r>
+            <a:r>
+              <a:rPr sz="1400" dirty="0"/>
+              <a:t>status</a:t>
             </a:r>
           </a:p>
         </p:txBody>
@@ -5677,7 +6182,7 @@
 </file>
 
 <file path=ppt/slides/slide3.xml><?xml version="1.0" encoding="utf-8"?>
-<p:sld xmlns:a="http://schemas.openxmlformats.org/drawingml/2006/main" xmlns:p="http://schemas.openxmlformats.org/presentationml/2006/main" xmlns:r="http://schemas.openxmlformats.org/officeDocument/2006/relationships">
+<p:sld xmlns:a="http://schemas.openxmlformats.org/drawingml/2006/main" xmlns:r="http://schemas.openxmlformats.org/officeDocument/2006/relationships" xmlns:p="http://schemas.openxmlformats.org/presentationml/2006/main">
   <p:cSld>
     <p:spTree>
       <p:nvGrpSpPr>
@@ -5685,7 +6190,14 @@
         <p:cNvGrpSpPr/>
         <p:nvPr/>
       </p:nvGrpSpPr>
-      <p:grpSpPr/>
+      <p:grpSpPr>
+        <a:xfrm>
+          <a:off x="0" y="0"/>
+          <a:ext cx="0" cy="0"/>
+          <a:chOff x="0" y="0"/>
+          <a:chExt cx="0" cy="0"/>
+        </a:xfrm>
+      </p:grpSpPr>
       <p:sp>
         <p:nvSpPr>
           <p:cNvPr id="2" name="TextBox 1"/>
@@ -5800,6 +6312,7 @@
           <a:lstStyle/>
           <a:p>
             <a:pPr algn="ctr"/>
+            <a:endParaRPr/>
           </a:p>
         </p:txBody>
       </p:sp>
@@ -5845,6 +6358,7 @@
           <a:lstStyle/>
           <a:p>
             <a:pPr algn="ctr"/>
+            <a:endParaRPr/>
           </a:p>
         </p:txBody>
       </p:sp>
@@ -5856,8 +6370,8 @@
         </p:nvSpPr>
         <p:spPr>
           <a:xfrm>
-            <a:off x="960120" y="1783080"/>
-            <a:ext cx="4297680" cy="4297680"/>
+            <a:off x="899160" y="1938620"/>
+            <a:ext cx="4587240" cy="4078039"/>
           </a:xfrm>
           <a:prstGeom prst="rect">
             <a:avLst/>
@@ -5871,6 +6385,9 @@
           <a:lstStyle/>
           <a:p>
             <a:pPr>
+              <a:spcBef>
+                <a:spcPts val="600"/>
+              </a:spcBef>
               <a:defRPr sz="1400" b="1">
                 <a:solidFill>
                   <a:srgbClr val="0284C7"/>
@@ -5879,11 +6396,15 @@
               </a:defRPr>
             </a:pPr>
             <a:r>
+              <a:rPr sz="1600" dirty="0"/>
               <a:t>Architecture Components</a:t>
             </a:r>
           </a:p>
           <a:p>
             <a:pPr>
+              <a:spcBef>
+                <a:spcPts val="600"/>
+              </a:spcBef>
               <a:spcAft>
                 <a:spcPts val="400"/>
               </a:spcAft>
@@ -5895,19 +6416,55 @@
               </a:defRPr>
             </a:pPr>
             <a:r>
+              <a:rPr sz="1400" dirty="0"/>
               <a:t>• GitHub Repository: </a:t>
             </a:r>
             <a:r>
-              <a:rPr b="0">
+              <a:rPr sz="1400" b="0" dirty="0">
                 <a:solidFill>
                   <a:srgbClr val="64748B"/>
                 </a:solidFill>
               </a:rPr>
-              <a:t>Authoritative source of truth for app code, Dockerfiles, and IaC.</a:t>
-            </a:r>
-          </a:p>
-          <a:p>
-            <a:pPr>
+              <a:t>Authoritative source of truth for app code, </a:t>
+            </a:r>
+            <a:r>
+              <a:rPr sz="1400" b="0" dirty="0" err="1">
+                <a:solidFill>
+                  <a:srgbClr val="64748B"/>
+                </a:solidFill>
+              </a:rPr>
+              <a:t>Dockerfiles</a:t>
+            </a:r>
+            <a:r>
+              <a:rPr sz="1400" b="0" dirty="0">
+                <a:solidFill>
+                  <a:srgbClr val="64748B"/>
+                </a:solidFill>
+              </a:rPr>
+              <a:t>, and </a:t>
+            </a:r>
+            <a:r>
+              <a:rPr sz="1400" b="0" dirty="0" err="1">
+                <a:solidFill>
+                  <a:srgbClr val="64748B"/>
+                </a:solidFill>
+              </a:rPr>
+              <a:t>IaC</a:t>
+            </a:r>
+            <a:r>
+              <a:rPr sz="1400" b="0" dirty="0">
+                <a:solidFill>
+                  <a:srgbClr val="64748B"/>
+                </a:solidFill>
+              </a:rPr>
+              <a:t>.</a:t>
+            </a:r>
+          </a:p>
+          <a:p>
+            <a:pPr>
+              <a:spcBef>
+                <a:spcPts val="600"/>
+              </a:spcBef>
               <a:spcAft>
                 <a:spcPts val="400"/>
               </a:spcAft>
@@ -5919,10 +6476,11 @@
               </a:defRPr>
             </a:pPr>
             <a:r>
+              <a:rPr sz="1400" dirty="0"/>
               <a:t>• Jenkins CI/CD: </a:t>
             </a:r>
             <a:r>
-              <a:rPr b="0">
+              <a:rPr sz="1400" b="0" dirty="0">
                 <a:solidFill>
                   <a:srgbClr val="64748B"/>
                 </a:solidFill>
@@ -5932,6 +6490,9 @@
           </a:p>
           <a:p>
             <a:pPr>
+              <a:spcBef>
+                <a:spcPts val="600"/>
+              </a:spcBef>
               <a:spcAft>
                 <a:spcPts val="400"/>
               </a:spcAft>
@@ -5943,10 +6504,11 @@
               </a:defRPr>
             </a:pPr>
             <a:r>
+              <a:rPr sz="1400" dirty="0"/>
               <a:t>• Amazon ECR: </a:t>
             </a:r>
             <a:r>
-              <a:rPr b="0">
+              <a:rPr sz="1400" b="0" dirty="0">
                 <a:solidFill>
                   <a:srgbClr val="64748B"/>
                 </a:solidFill>
@@ -5956,6 +6518,9 @@
           </a:p>
           <a:p>
             <a:pPr>
+              <a:spcBef>
+                <a:spcPts val="600"/>
+              </a:spcBef>
               <a:spcAft>
                 <a:spcPts val="400"/>
               </a:spcAft>
@@ -5967,10 +6532,11 @@
               </a:defRPr>
             </a:pPr>
             <a:r>
+              <a:rPr sz="1400" dirty="0"/>
               <a:t>• AWS EC2 &amp; VPC: </a:t>
             </a:r>
             <a:r>
-              <a:rPr b="0">
+              <a:rPr sz="1400" b="0" dirty="0">
                 <a:solidFill>
                   <a:srgbClr val="64748B"/>
                 </a:solidFill>
@@ -5980,6 +6546,9 @@
           </a:p>
           <a:p>
             <a:pPr>
+              <a:spcBef>
+                <a:spcPts val="600"/>
+              </a:spcBef>
               <a:spcAft>
                 <a:spcPts val="400"/>
               </a:spcAft>
@@ -5991,10 +6560,11 @@
               </a:defRPr>
             </a:pPr>
             <a:r>
+              <a:rPr sz="1400" dirty="0"/>
               <a:t>• Nginx Load Balancer: </a:t>
             </a:r>
             <a:r>
-              <a:rPr b="0">
+              <a:rPr sz="1400" b="0" dirty="0">
                 <a:solidFill>
                   <a:srgbClr val="64748B"/>
                 </a:solidFill>
@@ -6004,6 +6574,9 @@
           </a:p>
           <a:p>
             <a:pPr>
+              <a:spcBef>
+                <a:spcPts val="600"/>
+              </a:spcBef>
               <a:spcAft>
                 <a:spcPts val="400"/>
               </a:spcAft>
@@ -6015,19 +6588,39 @@
               </a:defRPr>
             </a:pPr>
             <a:r>
+              <a:rPr sz="1400" dirty="0"/>
               <a:t>• Docker Swarm Mesh: </a:t>
             </a:r>
             <a:r>
-              <a:rPr b="0">
+              <a:rPr sz="1400" b="0" dirty="0">
                 <a:solidFill>
                   <a:srgbClr val="64748B"/>
                 </a:solidFill>
               </a:rPr>
-              <a:t>Overlay network (Port 4789) routing requests via internal VIP (backend_app).</a:t>
-            </a:r>
-          </a:p>
-          <a:p>
-            <a:pPr>
+              <a:t>Overlay network (Port 4789) routing requests via internal VIP (</a:t>
+            </a:r>
+            <a:r>
+              <a:rPr sz="1400" b="0" dirty="0" err="1">
+                <a:solidFill>
+                  <a:srgbClr val="64748B"/>
+                </a:solidFill>
+              </a:rPr>
+              <a:t>backend_app</a:t>
+            </a:r>
+            <a:r>
+              <a:rPr sz="1400" b="0" dirty="0">
+                <a:solidFill>
+                  <a:srgbClr val="64748B"/>
+                </a:solidFill>
+              </a:rPr>
+              <a:t>).</a:t>
+            </a:r>
+          </a:p>
+          <a:p>
+            <a:pPr>
+              <a:spcBef>
+                <a:spcPts val="600"/>
+              </a:spcBef>
               <a:spcAft>
                 <a:spcPts val="400"/>
               </a:spcAft>
@@ -6039,10 +6632,11 @@
               </a:defRPr>
             </a:pPr>
             <a:r>
+              <a:rPr sz="1400" dirty="0"/>
               <a:t>• Telegram Bot Alerts: </a:t>
             </a:r>
             <a:r>
-              <a:rPr b="0">
+              <a:rPr sz="1400" b="0" dirty="0">
                 <a:solidFill>
                   <a:srgbClr val="64748B"/>
                 </a:solidFill>
@@ -6094,6 +6688,7 @@
           <a:lstStyle/>
           <a:p>
             <a:pPr algn="ctr"/>
+            <a:endParaRPr/>
           </a:p>
         </p:txBody>
       </p:sp>
@@ -6113,7 +6708,7 @@
         </p:blipFill>
         <p:spPr>
           <a:xfrm>
-            <a:off x="5897880" y="1783080"/>
+            <a:off x="5897880" y="2093149"/>
             <a:ext cx="5394960" cy="3768979"/>
           </a:xfrm>
           <a:prstGeom prst="rect">
@@ -6130,7 +6725,7 @@
 </file>
 
 <file path=ppt/slides/slide4.xml><?xml version="1.0" encoding="utf-8"?>
-<p:sld xmlns:a="http://schemas.openxmlformats.org/drawingml/2006/main" xmlns:p="http://schemas.openxmlformats.org/presentationml/2006/main" xmlns:r="http://schemas.openxmlformats.org/officeDocument/2006/relationships">
+<p:sld xmlns:a="http://schemas.openxmlformats.org/drawingml/2006/main" xmlns:r="http://schemas.openxmlformats.org/officeDocument/2006/relationships" xmlns:p="http://schemas.openxmlformats.org/presentationml/2006/main">
   <p:cSld>
     <p:spTree>
       <p:nvGrpSpPr>
@@ -6138,7 +6733,14 @@
         <p:cNvGrpSpPr/>
         <p:nvPr/>
       </p:nvGrpSpPr>
-      <p:grpSpPr/>
+      <p:grpSpPr>
+        <a:xfrm>
+          <a:off x="0" y="0"/>
+          <a:ext cx="0" cy="0"/>
+          <a:chOff x="0" y="0"/>
+          <a:chExt cx="0" cy="0"/>
+        </a:xfrm>
+      </p:grpSpPr>
       <p:sp>
         <p:nvSpPr>
           <p:cNvPr id="2" name="TextBox 1"/>
@@ -6206,6 +6808,7 @@
               </a:defRPr>
             </a:pPr>
             <a:r>
+              <a:rPr dirty="0"/>
               <a:t>Declarative AWS Provisioning via Terraform</a:t>
             </a:r>
           </a:p>
@@ -6253,6 +6856,7 @@
           <a:lstStyle/>
           <a:p>
             <a:pPr algn="ctr"/>
+            <a:endParaRPr/>
           </a:p>
         </p:txBody>
       </p:sp>
@@ -6298,6 +6902,7 @@
           <a:lstStyle/>
           <a:p>
             <a:pPr algn="ctr"/>
+            <a:endParaRPr/>
           </a:p>
         </p:txBody>
       </p:sp>
@@ -6309,8 +6914,8 @@
         </p:nvSpPr>
         <p:spPr>
           <a:xfrm>
-            <a:off x="960120" y="1783080"/>
-            <a:ext cx="4480560" cy="4297680"/>
+            <a:off x="960120" y="2046767"/>
+            <a:ext cx="4607560" cy="3872855"/>
           </a:xfrm>
           <a:prstGeom prst="rect">
             <a:avLst/>
@@ -6324,6 +6929,9 @@
           <a:lstStyle/>
           <a:p>
             <a:pPr>
+              <a:spcBef>
+                <a:spcPts val="600"/>
+              </a:spcBef>
               <a:defRPr sz="1400" b="1">
                 <a:solidFill>
                   <a:srgbClr val="0284C7"/>
@@ -6332,11 +6940,23 @@
               </a:defRPr>
             </a:pPr>
             <a:r>
-              <a:t>Terraform IaC Highlights</a:t>
-            </a:r>
-          </a:p>
-          <a:p>
-            <a:pPr>
+              <a:rPr sz="1600" dirty="0"/>
+              <a:t>Terraform </a:t>
+            </a:r>
+            <a:r>
+              <a:rPr sz="1600" dirty="0" err="1"/>
+              <a:t>IaC</a:t>
+            </a:r>
+            <a:r>
+              <a:rPr sz="1600" dirty="0"/>
+              <a:t> Highlights</a:t>
+            </a:r>
+          </a:p>
+          <a:p>
+            <a:pPr>
+              <a:spcBef>
+                <a:spcPts val="600"/>
+              </a:spcBef>
               <a:spcAft>
                 <a:spcPts val="500"/>
               </a:spcAft>
@@ -6348,10 +6968,11 @@
               </a:defRPr>
             </a:pPr>
             <a:r>
+              <a:rPr sz="1400" dirty="0"/>
               <a:t>• Modular Architecture: </a:t>
             </a:r>
             <a:r>
-              <a:rPr b="0">
+              <a:rPr sz="1400" b="0" dirty="0">
                 <a:solidFill>
                   <a:srgbClr val="64748B"/>
                 </a:solidFill>
@@ -6361,6 +6982,9 @@
           </a:p>
           <a:p>
             <a:pPr>
+              <a:spcBef>
+                <a:spcPts val="600"/>
+              </a:spcBef>
               <a:spcAft>
                 <a:spcPts val="500"/>
               </a:spcAft>
@@ -6372,19 +6996,39 @@
               </a:defRPr>
             </a:pPr>
             <a:r>
+              <a:rPr sz="1400" dirty="0"/>
               <a:t>• Dynamic AMI Resolution: </a:t>
             </a:r>
             <a:r>
-              <a:rPr b="0">
+              <a:rPr sz="1400" b="0" dirty="0">
                 <a:solidFill>
                   <a:srgbClr val="64748B"/>
                 </a:solidFill>
               </a:rPr>
-              <a:t>Uses data 'aws_ami' 'ubuntu' filter querying Canonical publisher (099720109477), eliminating hardcoded IDs.</a:t>
-            </a:r>
-          </a:p>
-          <a:p>
-            <a:pPr>
+              <a:t>Uses data '</a:t>
+            </a:r>
+            <a:r>
+              <a:rPr sz="1400" b="0" dirty="0" err="1">
+                <a:solidFill>
+                  <a:srgbClr val="64748B"/>
+                </a:solidFill>
+              </a:rPr>
+              <a:t>aws_ami</a:t>
+            </a:r>
+            <a:r>
+              <a:rPr sz="1400" b="0" dirty="0">
+                <a:solidFill>
+                  <a:srgbClr val="64748B"/>
+                </a:solidFill>
+              </a:rPr>
+              <a:t>' 'ubuntu' filter querying Canonical publisher (099720109477), eliminating hardcoded IDs.</a:t>
+            </a:r>
+          </a:p>
+          <a:p>
+            <a:pPr>
+              <a:spcBef>
+                <a:spcPts val="600"/>
+              </a:spcBef>
               <a:spcAft>
                 <a:spcPts val="500"/>
               </a:spcAft>
@@ -6396,10 +7040,11 @@
               </a:defRPr>
             </a:pPr>
             <a:r>
+              <a:rPr sz="1400" dirty="0"/>
               <a:t>• Least-Privilege Security Group: </a:t>
             </a:r>
             <a:r>
-              <a:rPr b="0">
+              <a:rPr sz="1400" b="0" dirty="0">
                 <a:solidFill>
                   <a:srgbClr val="64748B"/>
                 </a:solidFill>
@@ -6409,6 +7054,9 @@
           </a:p>
           <a:p>
             <a:pPr>
+              <a:spcBef>
+                <a:spcPts val="600"/>
+              </a:spcBef>
               <a:spcAft>
                 <a:spcPts val="500"/>
               </a:spcAft>
@@ -6420,10 +7068,11 @@
               </a:defRPr>
             </a:pPr>
             <a:r>
+              <a:rPr sz="1400" dirty="0"/>
               <a:t>• Multi-Node Compute Topology: </a:t>
             </a:r>
             <a:r>
-              <a:rPr b="0">
+              <a:rPr sz="1400" b="0" dirty="0">
                 <a:solidFill>
                   <a:srgbClr val="64748B"/>
                 </a:solidFill>
@@ -6433,6 +7082,9 @@
           </a:p>
           <a:p>
             <a:pPr>
+              <a:spcBef>
+                <a:spcPts val="600"/>
+              </a:spcBef>
               <a:spcAft>
                 <a:spcPts val="500"/>
               </a:spcAft>
@@ -6444,10 +7096,11 @@
               </a:defRPr>
             </a:pPr>
             <a:r>
+              <a:rPr sz="1400" dirty="0"/>
               <a:t>• State Management: </a:t>
             </a:r>
             <a:r>
-              <a:rPr b="0">
+              <a:rPr sz="1400" b="0" dirty="0">
                 <a:solidFill>
                   <a:srgbClr val="64748B"/>
                 </a:solidFill>
@@ -6499,12 +7152,19 @@
           <a:lstStyle/>
           <a:p>
             <a:pPr algn="ctr"/>
+            <a:endParaRPr/>
           </a:p>
         </p:txBody>
       </p:sp>
       <p:pic>
         <p:nvPicPr>
-          <p:cNvPr id="8" name="Picture 7" descr="terraform_apply.png"/>
+          <p:cNvPr id="10" name="Picture 9">
+            <a:extLst>
+              <a:ext uri="{FF2B5EF4-FFF2-40B4-BE49-F238E27FC236}">
+                <a16:creationId xmlns:a16="http://schemas.microsoft.com/office/drawing/2014/main" id="{EBBF7CEA-9904-471E-B900-D3886DAA5C90}"/>
+              </a:ext>
+            </a:extLst>
+          </p:cNvPr>
           <p:cNvPicPr>
             <a:picLocks noChangeAspect="1"/>
           </p:cNvPicPr>
@@ -6518,8 +7178,8 @@
         </p:blipFill>
         <p:spPr>
           <a:xfrm>
-            <a:off x="6080760" y="1828800"/>
-            <a:ext cx="5212080" cy="4084375"/>
+            <a:off x="5970271" y="2428437"/>
+            <a:ext cx="5440680" cy="3098406"/>
           </a:xfrm>
           <a:prstGeom prst="rect">
             <a:avLst/>
@@ -6535,7 +7195,7 @@
 </file>
 
 <file path=ppt/slides/slide5.xml><?xml version="1.0" encoding="utf-8"?>
-<p:sld xmlns:a="http://schemas.openxmlformats.org/drawingml/2006/main" xmlns:p="http://schemas.openxmlformats.org/presentationml/2006/main" xmlns:r="http://schemas.openxmlformats.org/officeDocument/2006/relationships">
+<p:sld xmlns:a="http://schemas.openxmlformats.org/drawingml/2006/main" xmlns:r="http://schemas.openxmlformats.org/officeDocument/2006/relationships" xmlns:p="http://schemas.openxmlformats.org/presentationml/2006/main">
   <p:cSld>
     <p:spTree>
       <p:nvGrpSpPr>
@@ -6543,7 +7203,14 @@
         <p:cNvGrpSpPr/>
         <p:nvPr/>
       </p:nvGrpSpPr>
-      <p:grpSpPr/>
+      <p:grpSpPr>
+        <a:xfrm>
+          <a:off x="0" y="0"/>
+          <a:ext cx="0" cy="0"/>
+          <a:chOff x="0" y="0"/>
+          <a:chExt cx="0" cy="0"/>
+        </a:xfrm>
+      </p:grpSpPr>
       <p:sp>
         <p:nvSpPr>
           <p:cNvPr id="2" name="TextBox 1"/>
@@ -6611,7 +7278,16 @@
               </a:defRPr>
             </a:pPr>
             <a:r>
-              <a:t>Production Dockerfile &amp; Security Hardening</a:t>
+              <a:rPr dirty="0"/>
+              <a:t>Production </a:t>
+            </a:r>
+            <a:r>
+              <a:rPr dirty="0" err="1"/>
+              <a:t>Dockerfile</a:t>
+            </a:r>
+            <a:r>
+              <a:rPr dirty="0"/>
+              <a:t> &amp; Security Hardening</a:t>
             </a:r>
           </a:p>
         </p:txBody>
@@ -6658,6 +7334,7 @@
           <a:lstStyle/>
           <a:p>
             <a:pPr algn="ctr"/>
+            <a:endParaRPr/>
           </a:p>
         </p:txBody>
       </p:sp>
@@ -6703,6 +7380,7 @@
           <a:lstStyle/>
           <a:p>
             <a:pPr algn="ctr"/>
+            <a:endParaRPr/>
           </a:p>
         </p:txBody>
       </p:sp>
@@ -6715,7 +7393,7 @@
         <p:spPr>
           <a:xfrm>
             <a:off x="960120" y="1783080"/>
-            <a:ext cx="4480560" cy="4297680"/>
+            <a:ext cx="4480560" cy="4170372"/>
           </a:xfrm>
           <a:prstGeom prst="rect">
             <a:avLst/>
@@ -6729,6 +7407,9 @@
           <a:lstStyle/>
           <a:p>
             <a:pPr>
+              <a:spcBef>
+                <a:spcPts val="600"/>
+              </a:spcBef>
               <a:defRPr sz="1400" b="1">
                 <a:solidFill>
                   <a:srgbClr val="0284C7"/>
@@ -6737,11 +7418,15 @@
               </a:defRPr>
             </a:pPr>
             <a:r>
+              <a:rPr sz="1600" dirty="0"/>
               <a:t>Containerization Standards</a:t>
             </a:r>
           </a:p>
           <a:p>
             <a:pPr>
+              <a:spcBef>
+                <a:spcPts val="600"/>
+              </a:spcBef>
               <a:spcAft>
                 <a:spcPts val="600"/>
               </a:spcAft>
@@ -6753,10 +7438,11 @@
               </a:defRPr>
             </a:pPr>
             <a:r>
+              <a:rPr sz="1400" dirty="0"/>
               <a:t>• Multi-Stage Build Pattern: </a:t>
             </a:r>
             <a:r>
-              <a:rPr b="0">
+              <a:rPr sz="1400" b="0" dirty="0">
                 <a:solidFill>
                   <a:srgbClr val="64748B"/>
                 </a:solidFill>
@@ -6766,6 +7452,9 @@
           </a:p>
           <a:p>
             <a:pPr>
+              <a:spcBef>
+                <a:spcPts val="600"/>
+              </a:spcBef>
               <a:spcAft>
                 <a:spcPts val="600"/>
               </a:spcAft>
@@ -6777,19 +7466,71 @@
               </a:defRPr>
             </a:pPr>
             <a:r>
+              <a:rPr sz="1400" dirty="0"/>
               <a:t>• Non-Root Security Context: </a:t>
             </a:r>
             <a:r>
-              <a:rPr b="0">
+              <a:rPr sz="1400" b="0" dirty="0">
                 <a:solidFill>
                   <a:srgbClr val="64748B"/>
                 </a:solidFill>
               </a:rPr>
-              <a:t>Runs as dedicated appuser (UID 1000) with chown -R appuser:appuser /app to mitigate container breakout risks.</a:t>
-            </a:r>
-          </a:p>
-          <a:p>
-            <a:pPr>
+              <a:t>Runs as dedicated </a:t>
+            </a:r>
+            <a:r>
+              <a:rPr sz="1400" b="0" dirty="0" err="1">
+                <a:solidFill>
+                  <a:srgbClr val="64748B"/>
+                </a:solidFill>
+              </a:rPr>
+              <a:t>appuser</a:t>
+            </a:r>
+            <a:r>
+              <a:rPr sz="1400" b="0" dirty="0">
+                <a:solidFill>
+                  <a:srgbClr val="64748B"/>
+                </a:solidFill>
+              </a:rPr>
+              <a:t> (UID 1000) with </a:t>
+            </a:r>
+            <a:r>
+              <a:rPr sz="1400" b="0" dirty="0" err="1">
+                <a:solidFill>
+                  <a:srgbClr val="64748B"/>
+                </a:solidFill>
+              </a:rPr>
+              <a:t>chown</a:t>
+            </a:r>
+            <a:r>
+              <a:rPr sz="1400" b="0" dirty="0">
+                <a:solidFill>
+                  <a:srgbClr val="64748B"/>
+                </a:solidFill>
+              </a:rPr>
+              <a:t> -R </a:t>
+            </a:r>
+            <a:r>
+              <a:rPr sz="1400" b="0" dirty="0" err="1">
+                <a:solidFill>
+                  <a:srgbClr val="64748B"/>
+                </a:solidFill>
+              </a:rPr>
+              <a:t>appuser:appuser</a:t>
+            </a:r>
+            <a:r>
+              <a:rPr sz="1400" b="0" dirty="0">
+                <a:solidFill>
+                  <a:srgbClr val="64748B"/>
+                </a:solidFill>
+              </a:rPr>
+              <a:t> /app to mitigate container breakout risks.</a:t>
+            </a:r>
+          </a:p>
+          <a:p>
+            <a:pPr>
+              <a:spcBef>
+                <a:spcPts val="600"/>
+              </a:spcBef>
               <a:spcAft>
                 <a:spcPts val="600"/>
               </a:spcAft>
@@ -6801,10 +7542,19 @@
               </a:defRPr>
             </a:pPr>
             <a:r>
-              <a:t>• Container Healthcheck: </a:t>
-            </a:r>
-            <a:r>
-              <a:rPr b="0">
+              <a:rPr sz="1400" dirty="0"/>
+              <a:t>• Container </a:t>
+            </a:r>
+            <a:r>
+              <a:rPr sz="1400" dirty="0" err="1"/>
+              <a:t>Healthcheck</a:t>
+            </a:r>
+            <a:r>
+              <a:rPr sz="1400" dirty="0"/>
+              <a:t>: </a:t>
+            </a:r>
+            <a:r>
+              <a:rPr sz="1400" b="0" dirty="0">
                 <a:solidFill>
                   <a:srgbClr val="64748B"/>
                 </a:solidFill>
@@ -6814,6 +7564,9 @@
           </a:p>
           <a:p>
             <a:pPr>
+              <a:spcBef>
+                <a:spcPts val="600"/>
+              </a:spcBef>
               <a:spcAft>
                 <a:spcPts val="600"/>
               </a:spcAft>
@@ -6825,19 +7578,39 @@
               </a:defRPr>
             </a:pPr>
             <a:r>
+              <a:rPr sz="1400" dirty="0"/>
               <a:t>• Local Multi-Service Compose: </a:t>
             </a:r>
             <a:r>
-              <a:rPr b="0">
+              <a:rPr sz="1400" b="0" dirty="0">
                 <a:solidFill>
                   <a:srgbClr val="64748B"/>
                 </a:solidFill>
               </a:rPr>
-              <a:t>docker-compose.yml defines local developer environment with web and nginx services sharing a bridge network.</a:t>
-            </a:r>
-          </a:p>
-          <a:p>
-            <a:pPr>
+              <a:t>docker-</a:t>
+            </a:r>
+            <a:r>
+              <a:rPr sz="1400" b="0" dirty="0" err="1">
+                <a:solidFill>
+                  <a:srgbClr val="64748B"/>
+                </a:solidFill>
+              </a:rPr>
+              <a:t>compose.yml</a:t>
+            </a:r>
+            <a:r>
+              <a:rPr sz="1400" b="0" dirty="0">
+                <a:solidFill>
+                  <a:srgbClr val="64748B"/>
+                </a:solidFill>
+              </a:rPr>
+              <a:t> defines local developer environment with web and nginx services sharing a bridge network.</a:t>
+            </a:r>
+          </a:p>
+          <a:p>
+            <a:pPr>
+              <a:spcBef>
+                <a:spcPts val="600"/>
+              </a:spcBef>
               <a:spcAft>
                 <a:spcPts val="600"/>
               </a:spcAft>
@@ -6849,15 +7622,32 @@
               </a:defRPr>
             </a:pPr>
             <a:r>
+              <a:rPr sz="1400" dirty="0"/>
               <a:t>• Minimal Image Footprint: </a:t>
             </a:r>
             <a:r>
-              <a:rPr b="0">
+              <a:rPr sz="1400" b="0" dirty="0">
                 <a:solidFill>
                   <a:srgbClr val="64748B"/>
                 </a:solidFill>
               </a:rPr>
-              <a:t>Utilizes .dockerignore to strip caches, git history, and secrets, reducing attack surface and pull latency.</a:t>
+              <a:t>Utilizes .</a:t>
+            </a:r>
+            <a:r>
+              <a:rPr sz="1400" b="0" dirty="0" err="1">
+                <a:solidFill>
+                  <a:srgbClr val="64748B"/>
+                </a:solidFill>
+              </a:rPr>
+              <a:t>dockerignore</a:t>
+            </a:r>
+            <a:r>
+              <a:rPr sz="1400" b="0" dirty="0">
+                <a:solidFill>
+                  <a:srgbClr val="64748B"/>
+                </a:solidFill>
+              </a:rPr>
+              <a:t> to strip caches, git history, and secrets, reducing attack surface and pull latency.</a:t>
             </a:r>
           </a:p>
         </p:txBody>
@@ -6904,12 +7694,19 @@
           <a:lstStyle/>
           <a:p>
             <a:pPr algn="ctr"/>
+            <a:endParaRPr/>
           </a:p>
         </p:txBody>
       </p:sp>
       <p:pic>
         <p:nvPicPr>
-          <p:cNvPr id="8" name="Picture 7" descr="app_container_healthcheck.png"/>
+          <p:cNvPr id="10" name="Picture 9">
+            <a:extLst>
+              <a:ext uri="{FF2B5EF4-FFF2-40B4-BE49-F238E27FC236}">
+                <a16:creationId xmlns:a16="http://schemas.microsoft.com/office/drawing/2014/main" id="{52F24EE1-07D5-2A5D-667E-A674D1056A4A}"/>
+              </a:ext>
+            </a:extLst>
+          </p:cNvPr>
           <p:cNvPicPr>
             <a:picLocks noChangeAspect="1"/>
           </p:cNvPicPr>
@@ -6923,8 +7720,8 @@
         </p:blipFill>
         <p:spPr>
           <a:xfrm>
-            <a:off x="6080760" y="2011680"/>
-            <a:ext cx="5212080" cy="2931795"/>
+            <a:off x="6046561" y="2133600"/>
+            <a:ext cx="5280477" cy="3390900"/>
           </a:xfrm>
           <a:prstGeom prst="rect">
             <a:avLst/>
@@ -6940,7 +7737,7 @@
 </file>
 
 <file path=ppt/slides/slide6.xml><?xml version="1.0" encoding="utf-8"?>
-<p:sld xmlns:a="http://schemas.openxmlformats.org/drawingml/2006/main" xmlns:p="http://schemas.openxmlformats.org/presentationml/2006/main" xmlns:r="http://schemas.openxmlformats.org/officeDocument/2006/relationships">
+<p:sld xmlns:a="http://schemas.openxmlformats.org/drawingml/2006/main" xmlns:r="http://schemas.openxmlformats.org/officeDocument/2006/relationships" xmlns:p="http://schemas.openxmlformats.org/presentationml/2006/main">
   <p:cSld>
     <p:spTree>
       <p:nvGrpSpPr>
@@ -6948,7 +7745,14 @@
         <p:cNvGrpSpPr/>
         <p:nvPr/>
       </p:nvGrpSpPr>
-      <p:grpSpPr/>
+      <p:grpSpPr>
+        <a:xfrm>
+          <a:off x="0" y="0"/>
+          <a:ext cx="0" cy="0"/>
+          <a:chOff x="0" y="0"/>
+          <a:chExt cx="0" cy="0"/>
+        </a:xfrm>
+      </p:grpSpPr>
       <p:sp>
         <p:nvSpPr>
           <p:cNvPr id="2" name="TextBox 1"/>
@@ -7063,6 +7867,7 @@
           <a:lstStyle/>
           <a:p>
             <a:pPr algn="ctr"/>
+            <a:endParaRPr/>
           </a:p>
         </p:txBody>
       </p:sp>
@@ -7074,7 +7879,7 @@
         </p:nvSpPr>
         <p:spPr>
           <a:xfrm>
-            <a:off x="731520" y="1645920"/>
+            <a:off x="523240" y="1645920"/>
             <a:ext cx="4754880" cy="4663440"/>
           </a:xfrm>
           <a:prstGeom prst="roundRect">
@@ -7108,6 +7913,7 @@
           <a:lstStyle/>
           <a:p>
             <a:pPr algn="ctr"/>
+            <a:endParaRPr/>
           </a:p>
         </p:txBody>
       </p:sp>
@@ -7119,8 +7925,8 @@
         </p:nvSpPr>
         <p:spPr>
           <a:xfrm>
-            <a:off x="960120" y="1783080"/>
-            <a:ext cx="4297680" cy="4297680"/>
+            <a:off x="828040" y="2007616"/>
+            <a:ext cx="4297680" cy="3821559"/>
           </a:xfrm>
           <a:prstGeom prst="rect">
             <a:avLst/>
@@ -7134,6 +7940,9 @@
           <a:lstStyle/>
           <a:p>
             <a:pPr>
+              <a:spcBef>
+                <a:spcPts val="600"/>
+              </a:spcBef>
               <a:defRPr sz="1400" b="1">
                 <a:solidFill>
                   <a:srgbClr val="0284C7"/>
@@ -7142,11 +7951,15 @@
               </a:defRPr>
             </a:pPr>
             <a:r>
+              <a:rPr sz="1600" dirty="0"/>
               <a:t>Pipeline Stages &amp; Metrics</a:t>
             </a:r>
           </a:p>
           <a:p>
             <a:pPr>
+              <a:spcBef>
+                <a:spcPts val="600"/>
+              </a:spcBef>
               <a:spcAft>
                 <a:spcPts val="400"/>
               </a:spcAft>
@@ -7158,19 +7971,39 @@
               </a:defRPr>
             </a:pPr>
             <a:r>
+              <a:rPr sz="1400" dirty="0"/>
               <a:t>✓ 1. Checkout SCM: </a:t>
             </a:r>
             <a:r>
-              <a:rPr b="0">
+              <a:rPr sz="1400" b="0" dirty="0">
                 <a:solidFill>
                   <a:srgbClr val="64748B"/>
                 </a:solidFill>
               </a:rPr>
-              <a:t>Clones latest commit from GitHub (Chamroeun12/Assignment.git) and dynamically creates version tag.</a:t>
-            </a:r>
-          </a:p>
-          <a:p>
-            <a:pPr>
+              <a:t>Clones latest commit from GitHub (Chamroeun12/</a:t>
+            </a:r>
+            <a:r>
+              <a:rPr sz="1400" b="0" dirty="0" err="1">
+                <a:solidFill>
+                  <a:srgbClr val="64748B"/>
+                </a:solidFill>
+              </a:rPr>
+              <a:t>Assignment.git</a:t>
+            </a:r>
+            <a:r>
+              <a:rPr sz="1400" b="0" dirty="0">
+                <a:solidFill>
+                  <a:srgbClr val="64748B"/>
+                </a:solidFill>
+              </a:rPr>
+              <a:t>) and dynamically creates version tag.</a:t>
+            </a:r>
+          </a:p>
+          <a:p>
+            <a:pPr>
+              <a:spcBef>
+                <a:spcPts val="600"/>
+              </a:spcBef>
               <a:spcAft>
                 <a:spcPts val="400"/>
               </a:spcAft>
@@ -7182,19 +8015,55 @@
               </a:defRPr>
             </a:pPr>
             <a:r>
+              <a:rPr sz="1400" dirty="0"/>
               <a:t>✓ 2. Build &amp; Test: </a:t>
             </a:r>
             <a:r>
-              <a:rPr b="0">
+              <a:rPr sz="1400" b="0" dirty="0">
                 <a:solidFill>
                   <a:srgbClr val="64748B"/>
                 </a:solidFill>
               </a:rPr>
-              <a:t>Creates Python venv, runs Flake8 PEP 8 (0 errors) and Pytest (5/5 passed, 89% code coverage).</a:t>
-            </a:r>
-          </a:p>
-          <a:p>
-            <a:pPr>
+              <a:t>Creates Python </a:t>
+            </a:r>
+            <a:r>
+              <a:rPr sz="1400" b="0" dirty="0" err="1">
+                <a:solidFill>
+                  <a:srgbClr val="64748B"/>
+                </a:solidFill>
+              </a:rPr>
+              <a:t>venv</a:t>
+            </a:r>
+            <a:r>
+              <a:rPr sz="1400" b="0" dirty="0">
+                <a:solidFill>
+                  <a:srgbClr val="64748B"/>
+                </a:solidFill>
+              </a:rPr>
+              <a:t>, runs Flake8 PEP 8 (0 errors) and </a:t>
+            </a:r>
+            <a:r>
+              <a:rPr sz="1400" b="0" dirty="0" err="1">
+                <a:solidFill>
+                  <a:srgbClr val="64748B"/>
+                </a:solidFill>
+              </a:rPr>
+              <a:t>Pytest</a:t>
+            </a:r>
+            <a:r>
+              <a:rPr sz="1400" b="0" dirty="0">
+                <a:solidFill>
+                  <a:srgbClr val="64748B"/>
+                </a:solidFill>
+              </a:rPr>
+              <a:t> (5/5 passed, 89% code coverage).</a:t>
+            </a:r>
+          </a:p>
+          <a:p>
+            <a:pPr>
+              <a:spcBef>
+                <a:spcPts val="600"/>
+              </a:spcBef>
               <a:spcAft>
                 <a:spcPts val="400"/>
               </a:spcAft>
@@ -7206,19 +8075,39 @@
               </a:defRPr>
             </a:pPr>
             <a:r>
+              <a:rPr sz="1400" dirty="0"/>
               <a:t>✓ 3. Security &amp; Quality Scan: </a:t>
             </a:r>
             <a:r>
-              <a:rPr b="0">
+              <a:rPr sz="1400" b="0" dirty="0">
                 <a:solidFill>
                   <a:srgbClr val="64748B"/>
                 </a:solidFill>
               </a:rPr>
-              <a:t>Scans container image layers for CVE vulnerabilities using Trivy inspector.</a:t>
-            </a:r>
-          </a:p>
-          <a:p>
-            <a:pPr>
+              <a:t>Scans container image layers for CVE vulnerabilities using </a:t>
+            </a:r>
+            <a:r>
+              <a:rPr sz="1400" b="0" dirty="0" err="1">
+                <a:solidFill>
+                  <a:srgbClr val="64748B"/>
+                </a:solidFill>
+              </a:rPr>
+              <a:t>Trivy</a:t>
+            </a:r>
+            <a:r>
+              <a:rPr sz="1400" b="0" dirty="0">
+                <a:solidFill>
+                  <a:srgbClr val="64748B"/>
+                </a:solidFill>
+              </a:rPr>
+              <a:t> inspector.</a:t>
+            </a:r>
+          </a:p>
+          <a:p>
+            <a:pPr>
+              <a:spcBef>
+                <a:spcPts val="600"/>
+              </a:spcBef>
               <a:spcAft>
                 <a:spcPts val="400"/>
               </a:spcAft>
@@ -7230,19 +8119,55 @@
               </a:defRPr>
             </a:pPr>
             <a:r>
+              <a:rPr sz="1400" dirty="0"/>
               <a:t>✓ 4. Authenticate &amp; Push ECR: </a:t>
             </a:r>
             <a:r>
-              <a:rPr b="0">
+              <a:rPr sz="1400" b="0" dirty="0">
                 <a:solidFill>
                   <a:srgbClr val="64748B"/>
                 </a:solidFill>
               </a:rPr>
-              <a:t>Authenticates Docker client via aws ecr get-login-password and publishes versioned &amp; latest tags.</a:t>
-            </a:r>
-          </a:p>
-          <a:p>
-            <a:pPr>
+              <a:t>Authenticates Docker client via </a:t>
+            </a:r>
+            <a:r>
+              <a:rPr sz="1400" b="0" dirty="0" err="1">
+                <a:solidFill>
+                  <a:srgbClr val="64748B"/>
+                </a:solidFill>
+              </a:rPr>
+              <a:t>aws</a:t>
+            </a:r>
+            <a:r>
+              <a:rPr sz="1400" b="0" dirty="0">
+                <a:solidFill>
+                  <a:srgbClr val="64748B"/>
+                </a:solidFill>
+              </a:rPr>
+              <a:t> </a:t>
+            </a:r>
+            <a:r>
+              <a:rPr sz="1400" b="0" dirty="0" err="1">
+                <a:solidFill>
+                  <a:srgbClr val="64748B"/>
+                </a:solidFill>
+              </a:rPr>
+              <a:t>ecr</a:t>
+            </a:r>
+            <a:r>
+              <a:rPr sz="1400" b="0" dirty="0">
+                <a:solidFill>
+                  <a:srgbClr val="64748B"/>
+                </a:solidFill>
+              </a:rPr>
+              <a:t> get-login-password and publishes versioned &amp; latest tags.</a:t>
+            </a:r>
+          </a:p>
+          <a:p>
+            <a:pPr>
+              <a:spcBef>
+                <a:spcPts val="600"/>
+              </a:spcBef>
               <a:spcAft>
                 <a:spcPts val="400"/>
               </a:spcAft>
@@ -7254,10 +8179,11 @@
               </a:defRPr>
             </a:pPr>
             <a:r>
+              <a:rPr sz="1400" dirty="0"/>
               <a:t>✓ 5. Deploy Stack to Swarm: </a:t>
             </a:r>
             <a:r>
-              <a:rPr b="0">
+              <a:rPr sz="1400" b="0" dirty="0">
                 <a:solidFill>
                   <a:srgbClr val="64748B"/>
                 </a:solidFill>
@@ -7275,8 +8201,8 @@
         </p:nvSpPr>
         <p:spPr>
           <a:xfrm>
-            <a:off x="5760720" y="1645920"/>
-            <a:ext cx="5669280" cy="4663440"/>
+            <a:off x="5582920" y="1168400"/>
+            <a:ext cx="6426200" cy="5140960"/>
           </a:xfrm>
           <a:prstGeom prst="roundRect">
             <a:avLst/>
@@ -7309,12 +8235,19 @@
           <a:lstStyle/>
           <a:p>
             <a:pPr algn="ctr"/>
+            <a:endParaRPr/>
           </a:p>
         </p:txBody>
       </p:sp>
       <p:pic>
         <p:nvPicPr>
-          <p:cNvPr id="8" name="Picture 7" descr="jenkins_build_success_live.png"/>
+          <p:cNvPr id="10" name="Picture 9">
+            <a:extLst>
+              <a:ext uri="{FF2B5EF4-FFF2-40B4-BE49-F238E27FC236}">
+                <a16:creationId xmlns:a16="http://schemas.microsoft.com/office/drawing/2014/main" id="{20293E02-B906-278D-D238-340C9A6A7DD4}"/>
+              </a:ext>
+            </a:extLst>
+          </p:cNvPr>
           <p:cNvPicPr>
             <a:picLocks noChangeAspect="1"/>
           </p:cNvPicPr>
@@ -7328,8 +8261,8 @@
         </p:blipFill>
         <p:spPr>
           <a:xfrm>
-            <a:off x="5897880" y="1874519"/>
-            <a:ext cx="5394960" cy="2355026"/>
+            <a:off x="5582920" y="1889347"/>
+            <a:ext cx="6426200" cy="3322734"/>
           </a:xfrm>
           <a:prstGeom prst="rect">
             <a:avLst/>
@@ -7345,7 +8278,7 @@
 </file>
 
 <file path=ppt/slides/slide7.xml><?xml version="1.0" encoding="utf-8"?>
-<p:sld xmlns:a="http://schemas.openxmlformats.org/drawingml/2006/main" xmlns:p="http://schemas.openxmlformats.org/presentationml/2006/main" xmlns:r="http://schemas.openxmlformats.org/officeDocument/2006/relationships">
+<p:sld xmlns:a="http://schemas.openxmlformats.org/drawingml/2006/main" xmlns:r="http://schemas.openxmlformats.org/officeDocument/2006/relationships" xmlns:p="http://schemas.openxmlformats.org/presentationml/2006/main">
   <p:cSld>
     <p:spTree>
       <p:nvGrpSpPr>
@@ -7353,7 +8286,14 @@
         <p:cNvGrpSpPr/>
         <p:nvPr/>
       </p:nvGrpSpPr>
-      <p:grpSpPr/>
+      <p:grpSpPr>
+        <a:xfrm>
+          <a:off x="0" y="0"/>
+          <a:ext cx="0" cy="0"/>
+          <a:chOff x="0" y="0"/>
+          <a:chExt cx="0" cy="0"/>
+        </a:xfrm>
+      </p:grpSpPr>
       <p:sp>
         <p:nvSpPr>
           <p:cNvPr id="2" name="TextBox 1"/>
@@ -7421,6 +8361,7 @@
               </a:defRPr>
             </a:pPr>
             <a:r>
+              <a:rPr dirty="0"/>
               <a:t>Docker Swarm Multi-Node Topology &amp; Rolling Updates</a:t>
             </a:r>
           </a:p>
@@ -7468,6 +8409,7 @@
           <a:lstStyle/>
           <a:p>
             <a:pPr algn="ctr"/>
+            <a:endParaRPr/>
           </a:p>
         </p:txBody>
       </p:sp>
@@ -7479,8 +8421,8 @@
         </p:nvSpPr>
         <p:spPr>
           <a:xfrm>
-            <a:off x="731520" y="1645920"/>
-            <a:ext cx="4937760" cy="4663440"/>
+            <a:off x="309880" y="1184004"/>
+            <a:ext cx="11343640" cy="3111771"/>
           </a:xfrm>
           <a:prstGeom prst="roundRect">
             <a:avLst/>
@@ -7513,6 +8455,7 @@
           <a:lstStyle/>
           <a:p>
             <a:pPr algn="ctr"/>
+            <a:endParaRPr/>
           </a:p>
         </p:txBody>
       </p:sp>
@@ -7524,8 +8467,8 @@
         </p:nvSpPr>
         <p:spPr>
           <a:xfrm>
-            <a:off x="960120" y="1783080"/>
-            <a:ext cx="4480560" cy="4297680"/>
+            <a:off x="741680" y="1384850"/>
+            <a:ext cx="10789920" cy="2610971"/>
           </a:xfrm>
           <a:prstGeom prst="rect">
             <a:avLst/>
@@ -7539,6 +8482,9 @@
           <a:lstStyle/>
           <a:p>
             <a:pPr>
+              <a:spcBef>
+                <a:spcPts val="600"/>
+              </a:spcBef>
               <a:defRPr sz="1400" b="1">
                 <a:solidFill>
                   <a:srgbClr val="0284C7"/>
@@ -7547,11 +8493,15 @@
               </a:defRPr>
             </a:pPr>
             <a:r>
+              <a:rPr sz="1600" dirty="0"/>
               <a:t>Swarm Cluster Architecture</a:t>
             </a:r>
           </a:p>
           <a:p>
             <a:pPr>
+              <a:spcBef>
+                <a:spcPts val="600"/>
+              </a:spcBef>
               <a:spcAft>
                 <a:spcPts val="500"/>
               </a:spcAft>
@@ -7563,19 +8513,39 @@
               </a:defRPr>
             </a:pPr>
             <a:r>
+              <a:rPr sz="1400" dirty="0"/>
               <a:t>• Cluster Formation: </a:t>
             </a:r>
             <a:r>
-              <a:rPr b="0">
+              <a:rPr sz="1400" b="0" dirty="0">
                 <a:solidFill>
                   <a:srgbClr val="64748B"/>
                 </a:solidFill>
               </a:rPr>
-              <a:t>1 Manager (Leader) managing Raft consensus (2377/tcp) and 2 Worker nodes in Ready &amp; Active state.</a:t>
-            </a:r>
-          </a:p>
-          <a:p>
-            <a:pPr>
+              <a:t>1 Manager (Leader) managing Raft consensus (2377/</a:t>
+            </a:r>
+            <a:r>
+              <a:rPr sz="1400" b="0" dirty="0" err="1">
+                <a:solidFill>
+                  <a:srgbClr val="64748B"/>
+                </a:solidFill>
+              </a:rPr>
+              <a:t>tcp</a:t>
+            </a:r>
+            <a:r>
+              <a:rPr sz="1400" b="0" dirty="0">
+                <a:solidFill>
+                  <a:srgbClr val="64748B"/>
+                </a:solidFill>
+              </a:rPr>
+              <a:t>) and 2 Worker nodes in Ready &amp; Active state.</a:t>
+            </a:r>
+          </a:p>
+          <a:p>
+            <a:pPr>
+              <a:spcBef>
+                <a:spcPts val="600"/>
+              </a:spcBef>
               <a:spcAft>
                 <a:spcPts val="500"/>
               </a:spcAft>
@@ -7587,19 +8557,55 @@
               </a:defRPr>
             </a:pPr>
             <a:r>
+              <a:rPr sz="1400" dirty="0"/>
               <a:t>• Routing Mesh &amp; Overlay Network: </a:t>
             </a:r>
             <a:r>
-              <a:rPr b="0">
+              <a:rPr sz="1400" b="0" dirty="0">
                 <a:solidFill>
                   <a:srgbClr val="64748B"/>
                 </a:solidFill>
               </a:rPr>
-              <a:t>VXLAN overlay (4789/udp) provides multi-host container networking with built-in virtual IP load balancing.</a:t>
-            </a:r>
-          </a:p>
-          <a:p>
-            <a:pPr>
+              <a:t>VXLAN overlay (4789/</a:t>
+            </a:r>
+            <a:r>
+              <a:rPr sz="1400" b="0" dirty="0" err="1">
+                <a:solidFill>
+                  <a:srgbClr val="64748B"/>
+                </a:solidFill>
+              </a:rPr>
+              <a:t>udp</a:t>
+            </a:r>
+            <a:r>
+              <a:rPr sz="1400" b="0" dirty="0">
+                <a:solidFill>
+                  <a:srgbClr val="64748B"/>
+                </a:solidFill>
+              </a:rPr>
+              <a:t>) provides multi-host container networking with built-in virtual IP load </a:t>
+            </a:r>
+            <a:r>
+              <a:rPr lang="en-US" sz="1400" b="0" dirty="0">
+                <a:solidFill>
+                  <a:srgbClr val="64748B"/>
+                </a:solidFill>
+              </a:rPr>
+              <a:t>	</a:t>
+            </a:r>
+            <a:r>
+              <a:rPr sz="1400" b="0" dirty="0">
+                <a:solidFill>
+                  <a:srgbClr val="64748B"/>
+                </a:solidFill>
+              </a:rPr>
+              <a:t>balancing.</a:t>
+            </a:r>
+          </a:p>
+          <a:p>
+            <a:pPr>
+              <a:spcBef>
+                <a:spcPts val="600"/>
+              </a:spcBef>
               <a:spcAft>
                 <a:spcPts val="500"/>
               </a:spcAft>
@@ -7611,19 +8617,55 @@
               </a:defRPr>
             </a:pPr>
             <a:r>
+              <a:rPr sz="1400" dirty="0"/>
               <a:t>• Zero-Downtime Rolling Update: </a:t>
             </a:r>
             <a:r>
-              <a:rPr b="0">
+              <a:rPr sz="1400" b="0" dirty="0">
                 <a:solidFill>
                   <a:srgbClr val="64748B"/>
                 </a:solidFill>
               </a:rPr>
-              <a:t>Configured order: start-first, parallelism: 1, delay: 10s. New container must pass healthcheck before terminating old task.</a:t>
-            </a:r>
-          </a:p>
-          <a:p>
-            <a:pPr>
+              <a:t>Configured order: start-first, parallelism: 1, delay: 10s. New container must pass </a:t>
+            </a:r>
+            <a:r>
+              <a:rPr sz="1400" b="0" dirty="0" err="1">
+                <a:solidFill>
+                  <a:srgbClr val="64748B"/>
+                </a:solidFill>
+              </a:rPr>
+              <a:t>healthcheck</a:t>
+            </a:r>
+            <a:r>
+              <a:rPr sz="1400" b="0" dirty="0">
+                <a:solidFill>
+                  <a:srgbClr val="64748B"/>
+                </a:solidFill>
+              </a:rPr>
+              <a:t> before </a:t>
+            </a:r>
+            <a:r>
+              <a:rPr lang="en-US" sz="1400" b="0" dirty="0">
+                <a:solidFill>
+                  <a:srgbClr val="64748B"/>
+                </a:solidFill>
+              </a:rPr>
+              <a:t>	</a:t>
+            </a:r>
+            <a:r>
+              <a:rPr sz="1400" b="0" dirty="0">
+                <a:solidFill>
+                  <a:srgbClr val="64748B"/>
+                </a:solidFill>
+              </a:rPr>
+              <a:t>terminating old task.</a:t>
+            </a:r>
+          </a:p>
+          <a:p>
+            <a:pPr>
+              <a:spcBef>
+                <a:spcPts val="600"/>
+              </a:spcBef>
               <a:spcAft>
                 <a:spcPts val="500"/>
               </a:spcAft>
@@ -7635,19 +8677,39 @@
               </a:defRPr>
             </a:pPr>
             <a:r>
+              <a:rPr sz="1400" dirty="0"/>
               <a:t>• Credential Forwarding: </a:t>
             </a:r>
             <a:r>
-              <a:rPr b="0">
+              <a:rPr sz="1400" b="0" dirty="0">
                 <a:solidFill>
                   <a:srgbClr val="64748B"/>
                 </a:solidFill>
               </a:rPr>
-              <a:t>Uses docker stack deploy --with-registry-auth so worker nodes authenticate securely with Amazon ECR via the manager.</a:t>
-            </a:r>
-          </a:p>
-          <a:p>
-            <a:pPr>
+              <a:t>Uses docker stack deploy --with-registry-auth so worker nodes authenticate securely with Amazon ECR via the </a:t>
+            </a:r>
+            <a:r>
+              <a:rPr lang="en-US" sz="1400" b="0" dirty="0">
+                <a:solidFill>
+                  <a:srgbClr val="64748B"/>
+                </a:solidFill>
+              </a:rPr>
+              <a:t>	</a:t>
+            </a:r>
+            <a:r>
+              <a:rPr sz="1400" b="0" dirty="0">
+                <a:solidFill>
+                  <a:srgbClr val="64748B"/>
+                </a:solidFill>
+              </a:rPr>
+              <a:t>manager.</a:t>
+            </a:r>
+          </a:p>
+          <a:p>
+            <a:pPr>
+              <a:spcBef>
+                <a:spcPts val="600"/>
+              </a:spcBef>
               <a:spcAft>
                 <a:spcPts val="500"/>
               </a:spcAft>
@@ -7659,10 +8721,11 @@
               </a:defRPr>
             </a:pPr>
             <a:r>
+              <a:rPr sz="1400" dirty="0"/>
               <a:t>• Fault Tolerance: </a:t>
             </a:r>
             <a:r>
-              <a:rPr b="0">
+              <a:rPr sz="1400" b="0" dirty="0">
                 <a:solidFill>
                   <a:srgbClr val="64748B"/>
                 </a:solidFill>
@@ -7672,16 +8735,190 @@
           </a:p>
         </p:txBody>
       </p:sp>
-      <p:sp>
-        <p:nvSpPr>
-          <p:cNvPr id="7" name="Rounded Rectangle 6"/>
+      <p:pic>
+        <p:nvPicPr>
+          <p:cNvPr id="8" name="Picture 7">
+            <a:extLst>
+              <a:ext uri="{FF2B5EF4-FFF2-40B4-BE49-F238E27FC236}">
+                <a16:creationId xmlns:a16="http://schemas.microsoft.com/office/drawing/2014/main" id="{847420F7-F098-3FCE-C8E7-2710D6CA58B8}"/>
+              </a:ext>
+            </a:extLst>
+          </p:cNvPr>
+          <p:cNvPicPr>
+            <a:picLocks noChangeAspect="1"/>
+          </p:cNvPicPr>
+          <p:nvPr/>
+        </p:nvPicPr>
+        <p:blipFill>
+          <a:blip r:embed="rId2"/>
+          <a:srcRect t="79807"/>
+          <a:stretch>
+            <a:fillRect/>
+          </a:stretch>
+        </p:blipFill>
+        <p:spPr>
+          <a:xfrm>
+            <a:off x="541823" y="4634950"/>
+            <a:ext cx="11111697" cy="1384850"/>
+          </a:xfrm>
+          <a:prstGeom prst="rect">
+            <a:avLst/>
+          </a:prstGeom>
+        </p:spPr>
+      </p:pic>
+    </p:spTree>
+  </p:cSld>
+  <p:clrMapOvr>
+    <a:masterClrMapping/>
+  </p:clrMapOvr>
+</p:sld>
+</file>
+
+<file path=ppt/slides/slide8.xml><?xml version="1.0" encoding="utf-8"?>
+<p:sld xmlns:a="http://schemas.openxmlformats.org/drawingml/2006/main" xmlns:r="http://schemas.openxmlformats.org/officeDocument/2006/relationships" xmlns:p="http://schemas.openxmlformats.org/presentationml/2006/main">
+  <p:cSld>
+    <p:spTree>
+      <p:nvGrpSpPr>
+        <p:cNvPr id="1" name=""/>
+        <p:cNvGrpSpPr/>
+        <p:nvPr/>
+      </p:nvGrpSpPr>
+      <p:grpSpPr>
+        <a:xfrm>
+          <a:off x="0" y="0"/>
+          <a:ext cx="0" cy="0"/>
+          <a:chOff x="0" y="0"/>
+          <a:chExt cx="0" cy="0"/>
+        </a:xfrm>
+      </p:grpSpPr>
+      <p:sp>
+        <p:nvSpPr>
+          <p:cNvPr id="2" name="TextBox 1"/>
+          <p:cNvSpPr txBox="1"/>
+          <p:nvPr/>
+        </p:nvSpPr>
+        <p:spPr>
+          <a:xfrm>
+            <a:off x="731520" y="365760"/>
+            <a:ext cx="10515600" cy="320040"/>
+          </a:xfrm>
+          <a:prstGeom prst="rect">
+            <a:avLst/>
+          </a:prstGeom>
+          <a:noFill/>
+        </p:spPr>
+        <p:txBody>
+          <a:bodyPr wrap="square" lIns="0" tIns="0" rIns="0" bIns="0">
+            <a:spAutoFit/>
+          </a:bodyPr>
+          <a:lstStyle/>
+          <a:p>
+            <a:pPr>
+              <a:defRPr sz="1000" b="1">
+                <a:solidFill>
+                  <a:srgbClr val="0284C7"/>
+                </a:solidFill>
+                <a:latin typeface="Segoe UI"/>
+              </a:defRPr>
+            </a:pPr>
+            <a:r>
+              <a:t>NETWORK INGRESS &amp; ROUTING</a:t>
+            </a:r>
+          </a:p>
+        </p:txBody>
+      </p:sp>
+      <p:sp>
+        <p:nvSpPr>
+          <p:cNvPr id="3" name="TextBox 2"/>
+          <p:cNvSpPr txBox="1"/>
+          <p:nvPr/>
+        </p:nvSpPr>
+        <p:spPr>
+          <a:xfrm>
+            <a:off x="731520" y="685800"/>
+            <a:ext cx="10515600" cy="640080"/>
+          </a:xfrm>
+          <a:prstGeom prst="rect">
+            <a:avLst/>
+          </a:prstGeom>
+          <a:noFill/>
+        </p:spPr>
+        <p:txBody>
+          <a:bodyPr wrap="square" lIns="0" tIns="0" rIns="0" bIns="0">
+            <a:spAutoFit/>
+          </a:bodyPr>
+          <a:lstStyle/>
+          <a:p>
+            <a:pPr>
+              <a:defRPr sz="2200" b="1">
+                <a:solidFill>
+                  <a:srgbClr val="0F172A"/>
+                </a:solidFill>
+                <a:latin typeface="Segoe UI"/>
+              </a:defRPr>
+            </a:pPr>
+            <a:r>
+              <a:t>Nginx Reverse Proxy &amp; Round-Robin Load Balancing</a:t>
+            </a:r>
+          </a:p>
+        </p:txBody>
+      </p:sp>
+      <p:sp>
+        <p:nvSpPr>
+          <p:cNvPr id="4" name="Rectangle 3"/>
           <p:cNvSpPr/>
           <p:nvPr/>
         </p:nvSpPr>
         <p:spPr>
           <a:xfrm>
-            <a:off x="5943600" y="1645920"/>
-            <a:ext cx="5486400" cy="4663440"/>
+            <a:off x="731520" y="1325880"/>
+            <a:ext cx="1828800" cy="36576"/>
+          </a:xfrm>
+          <a:prstGeom prst="rect">
+            <a:avLst/>
+          </a:prstGeom>
+          <a:solidFill>
+            <a:srgbClr val="0284C7"/>
+          </a:solidFill>
+          <a:ln>
+            <a:solidFill>
+              <a:srgbClr val="0284C7"/>
+            </a:solidFill>
+          </a:ln>
+        </p:spPr>
+        <p:style>
+          <a:lnRef idx="1">
+            <a:schemeClr val="accent1"/>
+          </a:lnRef>
+          <a:fillRef idx="3">
+            <a:schemeClr val="accent1"/>
+          </a:fillRef>
+          <a:effectRef idx="2">
+            <a:schemeClr val="accent1"/>
+          </a:effectRef>
+          <a:fontRef idx="minor">
+            <a:schemeClr val="lt1"/>
+          </a:fontRef>
+        </p:style>
+        <p:txBody>
+          <a:bodyPr rtlCol="0" anchor="ctr"/>
+          <a:lstStyle/>
+          <a:p>
+            <a:pPr algn="ctr"/>
+            <a:endParaRPr/>
+          </a:p>
+        </p:txBody>
+      </p:sp>
+      <p:sp>
+        <p:nvSpPr>
+          <p:cNvPr id="5" name="Rounded Rectangle 4"/>
+          <p:cNvSpPr/>
+          <p:nvPr/>
+        </p:nvSpPr>
+        <p:spPr>
+          <a:xfrm>
+            <a:off x="731520" y="1645920"/>
+            <a:ext cx="4937760" cy="4663440"/>
           </a:xfrm>
           <a:prstGeom prst="roundRect">
             <a:avLst/>
@@ -7714,12 +8951,297 @@
           <a:lstStyle/>
           <a:p>
             <a:pPr algn="ctr"/>
+            <a:endParaRPr/>
+          </a:p>
+        </p:txBody>
+      </p:sp>
+      <p:sp>
+        <p:nvSpPr>
+          <p:cNvPr id="6" name="TextBox 5"/>
+          <p:cNvSpPr txBox="1"/>
+          <p:nvPr/>
+        </p:nvSpPr>
+        <p:spPr>
+          <a:xfrm>
+            <a:off x="960120" y="1895018"/>
+            <a:ext cx="4480560" cy="4165243"/>
+          </a:xfrm>
+          <a:prstGeom prst="rect">
+            <a:avLst/>
+          </a:prstGeom>
+          <a:noFill/>
+        </p:spPr>
+        <p:txBody>
+          <a:bodyPr wrap="square" lIns="0" tIns="0" rIns="0" bIns="0">
+            <a:spAutoFit/>
+          </a:bodyPr>
+          <a:lstStyle/>
+          <a:p>
+            <a:pPr>
+              <a:spcBef>
+                <a:spcPts val="600"/>
+              </a:spcBef>
+              <a:defRPr sz="1400" b="1">
+                <a:solidFill>
+                  <a:srgbClr val="0284C7"/>
+                </a:solidFill>
+                <a:latin typeface="Segoe UI"/>
+              </a:defRPr>
+            </a:pPr>
+            <a:r>
+              <a:rPr sz="1600" dirty="0"/>
+              <a:t>Reverse Proxy Architecture</a:t>
+            </a:r>
+          </a:p>
+          <a:p>
+            <a:pPr>
+              <a:spcBef>
+                <a:spcPts val="600"/>
+              </a:spcBef>
+              <a:spcAft>
+                <a:spcPts val="400"/>
+              </a:spcAft>
+              <a:defRPr sz="1000" b="1">
+                <a:solidFill>
+                  <a:srgbClr val="0F172A"/>
+                </a:solidFill>
+                <a:latin typeface="Segoe UI"/>
+              </a:defRPr>
+            </a:pPr>
+            <a:r>
+              <a:rPr sz="1400" dirty="0"/>
+              <a:t>• Port 80 Ingress Termination: </a:t>
+            </a:r>
+            <a:r>
+              <a:rPr sz="1400" b="0" dirty="0">
+                <a:solidFill>
+                  <a:srgbClr val="64748B"/>
+                </a:solidFill>
+              </a:rPr>
+              <a:t>Nginx binds to host Port 80, shielding backend application containers from direct public exposure.</a:t>
+            </a:r>
+          </a:p>
+          <a:p>
+            <a:pPr>
+              <a:spcBef>
+                <a:spcPts val="600"/>
+              </a:spcBef>
+              <a:spcAft>
+                <a:spcPts val="400"/>
+              </a:spcAft>
+              <a:defRPr sz="1000" b="1">
+                <a:solidFill>
+                  <a:srgbClr val="0F172A"/>
+                </a:solidFill>
+                <a:latin typeface="Segoe UI"/>
+              </a:defRPr>
+            </a:pPr>
+            <a:r>
+              <a:rPr sz="1400" dirty="0"/>
+              <a:t>• Round-Robin Traffic Balancing: </a:t>
+            </a:r>
+            <a:r>
+              <a:rPr sz="1400" b="0" dirty="0">
+                <a:solidFill>
+                  <a:srgbClr val="64748B"/>
+                </a:solidFill>
+              </a:rPr>
+              <a:t>Routes requests to internal VIP upstream </a:t>
+            </a:r>
+            <a:r>
+              <a:rPr sz="1400" b="0" dirty="0" err="1">
+                <a:solidFill>
+                  <a:srgbClr val="64748B"/>
+                </a:solidFill>
+              </a:rPr>
+              <a:t>backend_app</a:t>
+            </a:r>
+            <a:r>
+              <a:rPr sz="1400" b="0" dirty="0">
+                <a:solidFill>
+                  <a:srgbClr val="64748B"/>
+                </a:solidFill>
+              </a:rPr>
+              <a:t> (web:5000) across replicated Flask tasks.</a:t>
+            </a:r>
+          </a:p>
+          <a:p>
+            <a:pPr>
+              <a:spcBef>
+                <a:spcPts val="600"/>
+              </a:spcBef>
+              <a:spcAft>
+                <a:spcPts val="400"/>
+              </a:spcAft>
+              <a:defRPr sz="1000" b="1">
+                <a:solidFill>
+                  <a:srgbClr val="0F172A"/>
+                </a:solidFill>
+                <a:latin typeface="Segoe UI"/>
+              </a:defRPr>
+            </a:pPr>
+            <a:r>
+              <a:rPr sz="1400" dirty="0"/>
+              <a:t>• GET / (Web UI): </a:t>
+            </a:r>
+            <a:r>
+              <a:rPr sz="1400" b="0" dirty="0">
+                <a:solidFill>
+                  <a:srgbClr val="64748B"/>
+                </a:solidFill>
+              </a:rPr>
+              <a:t>Renders interactive cloud dashboard showing hostname, system stats, and runtime metrics.</a:t>
+            </a:r>
+          </a:p>
+          <a:p>
+            <a:pPr>
+              <a:spcBef>
+                <a:spcPts val="600"/>
+              </a:spcBef>
+              <a:spcAft>
+                <a:spcPts val="400"/>
+              </a:spcAft>
+              <a:defRPr sz="1000" b="1">
+                <a:solidFill>
+                  <a:srgbClr val="0F172A"/>
+                </a:solidFill>
+                <a:latin typeface="Segoe UI"/>
+              </a:defRPr>
+            </a:pPr>
+            <a:r>
+              <a:rPr sz="1400" dirty="0"/>
+              <a:t>• GET /health (Application Health): </a:t>
+            </a:r>
+            <a:r>
+              <a:rPr sz="1400" b="0" dirty="0">
+                <a:solidFill>
+                  <a:srgbClr val="64748B"/>
+                </a:solidFill>
+              </a:rPr>
+              <a:t>HTTP 200 OK returning {"status": "healthy", "version": "1.0.0"}.</a:t>
+            </a:r>
+          </a:p>
+          <a:p>
+            <a:pPr>
+              <a:spcBef>
+                <a:spcPts val="600"/>
+              </a:spcBef>
+              <a:spcAft>
+                <a:spcPts val="400"/>
+              </a:spcAft>
+              <a:defRPr sz="1000" b="1">
+                <a:solidFill>
+                  <a:srgbClr val="0F172A"/>
+                </a:solidFill>
+                <a:latin typeface="Segoe UI"/>
+              </a:defRPr>
+            </a:pPr>
+            <a:r>
+              <a:rPr sz="1400" dirty="0"/>
+              <a:t>• GET /</a:t>
+            </a:r>
+            <a:r>
+              <a:rPr sz="1400" dirty="0" err="1"/>
+              <a:t>api</a:t>
+            </a:r>
+            <a:r>
+              <a:rPr sz="1400" dirty="0"/>
+              <a:t>/info (Backend Metadata): </a:t>
+            </a:r>
+            <a:r>
+              <a:rPr sz="1400" b="0" dirty="0">
+                <a:solidFill>
+                  <a:srgbClr val="64748B"/>
+                </a:solidFill>
+              </a:rPr>
+              <a:t>HTTP 200 OK displaying container hostname, cluster type (docker-swarm), and runtime.</a:t>
+            </a:r>
+          </a:p>
+          <a:p>
+            <a:pPr>
+              <a:spcBef>
+                <a:spcPts val="600"/>
+              </a:spcBef>
+              <a:spcAft>
+                <a:spcPts val="400"/>
+              </a:spcAft>
+              <a:defRPr sz="1000" b="1">
+                <a:solidFill>
+                  <a:srgbClr val="0F172A"/>
+                </a:solidFill>
+                <a:latin typeface="Segoe UI"/>
+              </a:defRPr>
+            </a:pPr>
+            <a:r>
+              <a:rPr sz="1400" dirty="0"/>
+              <a:t>• GET /nginx-health: </a:t>
+            </a:r>
+            <a:r>
+              <a:rPr sz="1400" b="0" dirty="0">
+                <a:solidFill>
+                  <a:srgbClr val="64748B"/>
+                </a:solidFill>
+              </a:rPr>
+              <a:t>Dedicated proxy health probe confirming reverse proxy routing integrity.</a:t>
+            </a:r>
+          </a:p>
+        </p:txBody>
+      </p:sp>
+      <p:sp>
+        <p:nvSpPr>
+          <p:cNvPr id="7" name="Rounded Rectangle 6"/>
+          <p:cNvSpPr/>
+          <p:nvPr/>
+        </p:nvSpPr>
+        <p:spPr>
+          <a:xfrm>
+            <a:off x="5943600" y="1645920"/>
+            <a:ext cx="5486400" cy="4663440"/>
+          </a:xfrm>
+          <a:prstGeom prst="roundRect">
+            <a:avLst/>
+          </a:prstGeom>
+          <a:solidFill>
+            <a:srgbClr val="F1F5F9"/>
+          </a:solidFill>
+          <a:ln w="12700">
+            <a:solidFill>
+              <a:srgbClr val="CBD5E1"/>
+            </a:solidFill>
+          </a:ln>
+        </p:spPr>
+        <p:style>
+          <a:lnRef idx="1">
+            <a:schemeClr val="accent1"/>
+          </a:lnRef>
+          <a:fillRef idx="3">
+            <a:schemeClr val="accent1"/>
+          </a:fillRef>
+          <a:effectRef idx="2">
+            <a:schemeClr val="accent1"/>
+          </a:effectRef>
+          <a:fontRef idx="minor">
+            <a:schemeClr val="lt1"/>
+          </a:fontRef>
+        </p:style>
+        <p:txBody>
+          <a:bodyPr rtlCol="0" anchor="ctr"/>
+          <a:lstStyle/>
+          <a:p>
+            <a:pPr algn="ctr"/>
+            <a:endParaRPr/>
           </a:p>
         </p:txBody>
       </p:sp>
       <p:pic>
         <p:nvPicPr>
-          <p:cNvPr id="8" name="Picture 7" descr="swarm_cluster_nodes.png"/>
+          <p:cNvPr id="10" name="Picture 9">
+            <a:extLst>
+              <a:ext uri="{FF2B5EF4-FFF2-40B4-BE49-F238E27FC236}">
+                <a16:creationId xmlns:a16="http://schemas.microsoft.com/office/drawing/2014/main" id="{FC1EB4FA-584D-7F39-8FFC-AE43E2910A03}"/>
+              </a:ext>
+            </a:extLst>
+          </p:cNvPr>
           <p:cNvPicPr>
             <a:picLocks noChangeAspect="1"/>
           </p:cNvPicPr>
@@ -7733,8 +9255,8 @@
         </p:blipFill>
         <p:spPr>
           <a:xfrm>
-            <a:off x="6080760" y="2011680"/>
-            <a:ext cx="5212080" cy="3231490"/>
+            <a:off x="6019800" y="2286000"/>
+            <a:ext cx="5410200" cy="3372321"/>
           </a:xfrm>
           <a:prstGeom prst="rect">
             <a:avLst/>
@@ -7749,8 +9271,8 @@
 </p:sld>
 </file>
 
-<file path=ppt/slides/slide8.xml><?xml version="1.0" encoding="utf-8"?>
-<p:sld xmlns:a="http://schemas.openxmlformats.org/drawingml/2006/main" xmlns:p="http://schemas.openxmlformats.org/presentationml/2006/main" xmlns:r="http://schemas.openxmlformats.org/officeDocument/2006/relationships">
+<file path=ppt/slides/slide9.xml><?xml version="1.0" encoding="utf-8"?>
+<p:sld xmlns:a="http://schemas.openxmlformats.org/drawingml/2006/main" xmlns:r="http://schemas.openxmlformats.org/officeDocument/2006/relationships" xmlns:p="http://schemas.openxmlformats.org/presentationml/2006/main">
   <p:cSld>
     <p:spTree>
       <p:nvGrpSpPr>
@@ -7758,7 +9280,14 @@
         <p:cNvGrpSpPr/>
         <p:nvPr/>
       </p:nvGrpSpPr>
-      <p:grpSpPr/>
+      <p:grpSpPr>
+        <a:xfrm>
+          <a:off x="0" y="0"/>
+          <a:ext cx="0" cy="0"/>
+          <a:chOff x="0" y="0"/>
+          <a:chExt cx="0" cy="0"/>
+        </a:xfrm>
+      </p:grpSpPr>
       <p:sp>
         <p:nvSpPr>
           <p:cNvPr id="2" name="TextBox 1"/>
@@ -7790,7 +9319,7 @@
               </a:defRPr>
             </a:pPr>
             <a:r>
-              <a:t>NETWORK INGRESS &amp; ROUTING</a:t>
+              <a:t>OPERATIONAL OBSERVABILITY (+5 EXTRA CREDIT)</a:t>
             </a:r>
           </a:p>
         </p:txBody>
@@ -7826,7 +9355,7 @@
               </a:defRPr>
             </a:pPr>
             <a:r>
-              <a:t>Nginx Reverse Proxy &amp; Round-Robin Load Balancing</a:t>
+              <a:t>Real-Time CI/CD Notifications via Telegram Bot API</a:t>
             </a:r>
           </a:p>
         </p:txBody>
@@ -7873,6 +9402,7 @@
           <a:lstStyle/>
           <a:p>
             <a:pPr algn="ctr"/>
+            <a:endParaRPr/>
           </a:p>
         </p:txBody>
       </p:sp>
@@ -7918,6 +9448,7 @@
           <a:lstStyle/>
           <a:p>
             <a:pPr algn="ctr"/>
+            <a:endParaRPr/>
           </a:p>
         </p:txBody>
       </p:sp>
@@ -7929,8 +9460,8 @@
         </p:nvSpPr>
         <p:spPr>
           <a:xfrm>
-            <a:off x="960120" y="1783080"/>
-            <a:ext cx="4480560" cy="4297680"/>
+            <a:off x="960120" y="2041212"/>
+            <a:ext cx="4480560" cy="3872855"/>
           </a:xfrm>
           <a:prstGeom prst="rect">
             <a:avLst/>
@@ -7944,6 +9475,9 @@
           <a:lstStyle/>
           <a:p>
             <a:pPr>
+              <a:spcBef>
+                <a:spcPts val="600"/>
+              </a:spcBef>
               <a:defRPr sz="1400" b="1">
                 <a:solidFill>
                   <a:srgbClr val="0284C7"/>
@@ -7952,13 +9486,17 @@
               </a:defRPr>
             </a:pPr>
             <a:r>
-              <a:t>Reverse Proxy Architecture</a:t>
-            </a:r>
-          </a:p>
-          <a:p>
-            <a:pPr>
+              <a:rPr sz="1600" dirty="0"/>
+              <a:t>Telegram Alerting System</a:t>
+            </a:r>
+          </a:p>
+          <a:p>
+            <a:pPr>
+              <a:spcBef>
+                <a:spcPts val="600"/>
+              </a:spcBef>
               <a:spcAft>
-                <a:spcPts val="400"/>
+                <a:spcPts val="500"/>
               </a:spcAft>
               <a:defRPr sz="1000" b="1">
                 <a:solidFill>
@@ -7968,21 +9506,41 @@
               </a:defRPr>
             </a:pPr>
             <a:r>
-              <a:t>• Port 80 Ingress Termination: </a:t>
-            </a:r>
-            <a:r>
-              <a:rPr b="0">
+              <a:rPr sz="1400" dirty="0"/>
+              <a:t>• Automated Post-Action Callbacks: </a:t>
+            </a:r>
+            <a:r>
+              <a:rPr sz="1400" b="0" dirty="0">
                 <a:solidFill>
                   <a:srgbClr val="64748B"/>
                 </a:solidFill>
               </a:rPr>
-              <a:t>Nginx binds to host Port 80, shielding backend application containers from direct public exposure.</a:t>
-            </a:r>
-          </a:p>
-          <a:p>
-            <a:pPr>
+              <a:t>Integrated directly into </a:t>
+            </a:r>
+            <a:r>
+              <a:rPr sz="1400" b="0" dirty="0" err="1">
+                <a:solidFill>
+                  <a:srgbClr val="64748B"/>
+                </a:solidFill>
+              </a:rPr>
+              <a:t>Jenkinsfile</a:t>
+            </a:r>
+            <a:r>
+              <a:rPr sz="1400" b="0" dirty="0">
+                <a:solidFill>
+                  <a:srgbClr val="64748B"/>
+                </a:solidFill>
+              </a:rPr>
+              <a:t> post { success { ... } failure { ... } } blocks.</a:t>
+            </a:r>
+          </a:p>
+          <a:p>
+            <a:pPr>
+              <a:spcBef>
+                <a:spcPts val="600"/>
+              </a:spcBef>
               <a:spcAft>
-                <a:spcPts val="400"/>
+                <a:spcPts val="500"/>
               </a:spcAft>
               <a:defRPr sz="1000" b="1">
                 <a:solidFill>
@@ -7992,21 +9550,25 @@
               </a:defRPr>
             </a:pPr>
             <a:r>
-              <a:t>• Round-Robin Traffic Balancing: </a:t>
-            </a:r>
-            <a:r>
-              <a:rPr b="0">
+              <a:rPr sz="1400" dirty="0"/>
+              <a:t>• Distinct Success &amp; Failure Alerts: </a:t>
+            </a:r>
+            <a:r>
+              <a:rPr sz="1400" b="0" dirty="0">
                 <a:solidFill>
                   <a:srgbClr val="64748B"/>
                 </a:solidFill>
               </a:rPr>
-              <a:t>Routes requests to internal VIP upstream backend_app (web:5000) across replicated Flask tasks.</a:t>
-            </a:r>
-          </a:p>
-          <a:p>
-            <a:pPr>
+              <a:t>Sends formatted markdown messages reporting Job name, Build #, Git SHA, and Target cluster.</a:t>
+            </a:r>
+          </a:p>
+          <a:p>
+            <a:pPr>
+              <a:spcBef>
+                <a:spcPts val="600"/>
+              </a:spcBef>
               <a:spcAft>
-                <a:spcPts val="400"/>
+                <a:spcPts val="500"/>
               </a:spcAft>
               <a:defRPr sz="1000" b="1">
                 <a:solidFill>
@@ -8016,21 +9578,41 @@
               </a:defRPr>
             </a:pPr>
             <a:r>
-              <a:t>• GET / (Web UI): </a:t>
-            </a:r>
-            <a:r>
-              <a:rPr b="0">
+              <a:rPr sz="1400" dirty="0"/>
+              <a:t>• Secure Credential Injection: </a:t>
+            </a:r>
+            <a:r>
+              <a:rPr sz="1400" b="0" dirty="0">
                 <a:solidFill>
                   <a:srgbClr val="64748B"/>
                 </a:solidFill>
               </a:rPr>
-              <a:t>Renders interactive cloud dashboard showing hostname, system stats, and runtime metrics.</a:t>
-            </a:r>
-          </a:p>
-          <a:p>
-            <a:pPr>
+              <a:t>Bot token and Chat ID are fetched dynamically via Jenkins </a:t>
+            </a:r>
+            <a:r>
+              <a:rPr sz="1400" b="0" dirty="0" err="1">
+                <a:solidFill>
+                  <a:srgbClr val="64748B"/>
+                </a:solidFill>
+              </a:rPr>
+              <a:t>withCredentials</a:t>
+            </a:r>
+            <a:r>
+              <a:rPr sz="1400" b="0" dirty="0">
+                <a:solidFill>
+                  <a:srgbClr val="64748B"/>
+                </a:solidFill>
+              </a:rPr>
+              <a:t>, preventing credential leaks.</a:t>
+            </a:r>
+          </a:p>
+          <a:p>
+            <a:pPr>
+              <a:spcBef>
+                <a:spcPts val="600"/>
+              </a:spcBef>
               <a:spcAft>
-                <a:spcPts val="400"/>
+                <a:spcPts val="500"/>
               </a:spcAft>
               <a:defRPr sz="1000" b="1">
                 <a:solidFill>
@@ -8040,21 +9622,25 @@
               </a:defRPr>
             </a:pPr>
             <a:r>
-              <a:t>• GET /health (Application Health): </a:t>
-            </a:r>
-            <a:r>
-              <a:rPr b="0">
+              <a:rPr sz="1400" dirty="0"/>
+              <a:t>• Non-Blocking Resilient Design: </a:t>
+            </a:r>
+            <a:r>
+              <a:rPr sz="1400" b="0" dirty="0">
                 <a:solidFill>
                   <a:srgbClr val="64748B"/>
                 </a:solidFill>
               </a:rPr>
-              <a:t>HTTP 200 OK returning {"status": "healthy", "version": "1.0.0"}.</a:t>
-            </a:r>
-          </a:p>
-          <a:p>
-            <a:pPr>
+              <a:t>Wrapped in try/catch with fallback logging so builds succeed even if notifications are skipped.</a:t>
+            </a:r>
+          </a:p>
+          <a:p>
+            <a:pPr>
+              <a:spcBef>
+                <a:spcPts val="600"/>
+              </a:spcBef>
               <a:spcAft>
-                <a:spcPts val="400"/>
+                <a:spcPts val="500"/>
               </a:spcAft>
               <a:defRPr sz="1000" b="1">
                 <a:solidFill>
@@ -8064,39 +9650,16 @@
               </a:defRPr>
             </a:pPr>
             <a:r>
-              <a:t>• GET /api/info (Backend Metadata): </a:t>
-            </a:r>
-            <a:r>
-              <a:rPr b="0">
+              <a:rPr sz="1400" dirty="0"/>
+              <a:t>• Mobile &amp; Desktop Instant Delivery: </a:t>
+            </a:r>
+            <a:r>
+              <a:rPr sz="1400" b="0" dirty="0">
                 <a:solidFill>
                   <a:srgbClr val="64748B"/>
                 </a:solidFill>
               </a:rPr>
-              <a:t>HTTP 200 OK displaying container hostname, cluster type (docker-swarm), and runtime.</a:t>
-            </a:r>
-          </a:p>
-          <a:p>
-            <a:pPr>
-              <a:spcAft>
-                <a:spcPts val="400"/>
-              </a:spcAft>
-              <a:defRPr sz="1000" b="1">
-                <a:solidFill>
-                  <a:srgbClr val="0F172A"/>
-                </a:solidFill>
-                <a:latin typeface="Segoe UI"/>
-              </a:defRPr>
-            </a:pPr>
-            <a:r>
-              <a:t>• GET /nginx-health: </a:t>
-            </a:r>
-            <a:r>
-              <a:rPr b="0">
-                <a:solidFill>
-                  <a:srgbClr val="64748B"/>
-                </a:solidFill>
-              </a:rPr>
-              <a:t>Dedicated proxy health probe confirming reverse proxy routing integrity.</a:t>
+              <a:t>DevOps engineers receive push notifications seconds after pipeline completion on mobile devices.</a:t>
             </a:r>
           </a:p>
         </p:txBody>
@@ -8143,12 +9706,19 @@
           <a:lstStyle/>
           <a:p>
             <a:pPr algn="ctr"/>
+            <a:endParaRPr/>
           </a:p>
         </p:txBody>
       </p:sp>
       <p:pic>
         <p:nvPicPr>
-          <p:cNvPr id="8" name="Picture 7" descr="nginx_load_balancer_curl.png"/>
+          <p:cNvPr id="10" name="Picture 9">
+            <a:extLst>
+              <a:ext uri="{FF2B5EF4-FFF2-40B4-BE49-F238E27FC236}">
+                <a16:creationId xmlns:a16="http://schemas.microsoft.com/office/drawing/2014/main" id="{AE7A94BB-38F3-BA23-E39F-09AE0562E8CE}"/>
+              </a:ext>
+            </a:extLst>
+          </p:cNvPr>
           <p:cNvPicPr>
             <a:picLocks noChangeAspect="1"/>
           </p:cNvPicPr>
@@ -8162,413 +9732,8 @@
         </p:blipFill>
         <p:spPr>
           <a:xfrm>
-            <a:off x="6080760" y="2011680"/>
-            <a:ext cx="5212080" cy="3544214"/>
-          </a:xfrm>
-          <a:prstGeom prst="rect">
-            <a:avLst/>
-          </a:prstGeom>
-        </p:spPr>
-      </p:pic>
-    </p:spTree>
-  </p:cSld>
-  <p:clrMapOvr>
-    <a:masterClrMapping/>
-  </p:clrMapOvr>
-</p:sld>
-</file>
-
-<file path=ppt/slides/slide9.xml><?xml version="1.0" encoding="utf-8"?>
-<p:sld xmlns:a="http://schemas.openxmlformats.org/drawingml/2006/main" xmlns:p="http://schemas.openxmlformats.org/presentationml/2006/main" xmlns:r="http://schemas.openxmlformats.org/officeDocument/2006/relationships">
-  <p:cSld>
-    <p:spTree>
-      <p:nvGrpSpPr>
-        <p:cNvPr id="1" name=""/>
-        <p:cNvGrpSpPr/>
-        <p:nvPr/>
-      </p:nvGrpSpPr>
-      <p:grpSpPr/>
-      <p:sp>
-        <p:nvSpPr>
-          <p:cNvPr id="2" name="TextBox 1"/>
-          <p:cNvSpPr txBox="1"/>
-          <p:nvPr/>
-        </p:nvSpPr>
-        <p:spPr>
-          <a:xfrm>
-            <a:off x="731520" y="365760"/>
-            <a:ext cx="10515600" cy="320040"/>
-          </a:xfrm>
-          <a:prstGeom prst="rect">
-            <a:avLst/>
-          </a:prstGeom>
-          <a:noFill/>
-        </p:spPr>
-        <p:txBody>
-          <a:bodyPr wrap="square" lIns="0" tIns="0" rIns="0" bIns="0">
-            <a:spAutoFit/>
-          </a:bodyPr>
-          <a:lstStyle/>
-          <a:p>
-            <a:pPr>
-              <a:defRPr sz="1000" b="1">
-                <a:solidFill>
-                  <a:srgbClr val="0284C7"/>
-                </a:solidFill>
-                <a:latin typeface="Segoe UI"/>
-              </a:defRPr>
-            </a:pPr>
-            <a:r>
-              <a:t>OPERATIONAL OBSERVABILITY (+5 EXTRA CREDIT)</a:t>
-            </a:r>
-          </a:p>
-        </p:txBody>
-      </p:sp>
-      <p:sp>
-        <p:nvSpPr>
-          <p:cNvPr id="3" name="TextBox 2"/>
-          <p:cNvSpPr txBox="1"/>
-          <p:nvPr/>
-        </p:nvSpPr>
-        <p:spPr>
-          <a:xfrm>
-            <a:off x="731520" y="685800"/>
-            <a:ext cx="10515600" cy="640080"/>
-          </a:xfrm>
-          <a:prstGeom prst="rect">
-            <a:avLst/>
-          </a:prstGeom>
-          <a:noFill/>
-        </p:spPr>
-        <p:txBody>
-          <a:bodyPr wrap="square" lIns="0" tIns="0" rIns="0" bIns="0">
-            <a:spAutoFit/>
-          </a:bodyPr>
-          <a:lstStyle/>
-          <a:p>
-            <a:pPr>
-              <a:defRPr sz="2200" b="1">
-                <a:solidFill>
-                  <a:srgbClr val="0F172A"/>
-                </a:solidFill>
-                <a:latin typeface="Segoe UI"/>
-              </a:defRPr>
-            </a:pPr>
-            <a:r>
-              <a:t>Real-Time CI/CD Notifications via Telegram Bot API</a:t>
-            </a:r>
-          </a:p>
-        </p:txBody>
-      </p:sp>
-      <p:sp>
-        <p:nvSpPr>
-          <p:cNvPr id="4" name="Rectangle 3"/>
-          <p:cNvSpPr/>
-          <p:nvPr/>
-        </p:nvSpPr>
-        <p:spPr>
-          <a:xfrm>
-            <a:off x="731520" y="1325880"/>
-            <a:ext cx="1828800" cy="36576"/>
-          </a:xfrm>
-          <a:prstGeom prst="rect">
-            <a:avLst/>
-          </a:prstGeom>
-          <a:solidFill>
-            <a:srgbClr val="0284C7"/>
-          </a:solidFill>
-          <a:ln>
-            <a:solidFill>
-              <a:srgbClr val="0284C7"/>
-            </a:solidFill>
-          </a:ln>
-        </p:spPr>
-        <p:style>
-          <a:lnRef idx="1">
-            <a:schemeClr val="accent1"/>
-          </a:lnRef>
-          <a:fillRef idx="3">
-            <a:schemeClr val="accent1"/>
-          </a:fillRef>
-          <a:effectRef idx="2">
-            <a:schemeClr val="accent1"/>
-          </a:effectRef>
-          <a:fontRef idx="minor">
-            <a:schemeClr val="lt1"/>
-          </a:fontRef>
-        </p:style>
-        <p:txBody>
-          <a:bodyPr rtlCol="0" anchor="ctr"/>
-          <a:lstStyle/>
-          <a:p>
-            <a:pPr algn="ctr"/>
-          </a:p>
-        </p:txBody>
-      </p:sp>
-      <p:sp>
-        <p:nvSpPr>
-          <p:cNvPr id="5" name="Rounded Rectangle 4"/>
-          <p:cNvSpPr/>
-          <p:nvPr/>
-        </p:nvSpPr>
-        <p:spPr>
-          <a:xfrm>
-            <a:off x="731520" y="1645920"/>
-            <a:ext cx="4937760" cy="4663440"/>
-          </a:xfrm>
-          <a:prstGeom prst="roundRect">
-            <a:avLst/>
-          </a:prstGeom>
-          <a:solidFill>
-            <a:srgbClr val="F1F5F9"/>
-          </a:solidFill>
-          <a:ln w="12700">
-            <a:solidFill>
-              <a:srgbClr val="CBD5E1"/>
-            </a:solidFill>
-          </a:ln>
-        </p:spPr>
-        <p:style>
-          <a:lnRef idx="1">
-            <a:schemeClr val="accent1"/>
-          </a:lnRef>
-          <a:fillRef idx="3">
-            <a:schemeClr val="accent1"/>
-          </a:fillRef>
-          <a:effectRef idx="2">
-            <a:schemeClr val="accent1"/>
-          </a:effectRef>
-          <a:fontRef idx="minor">
-            <a:schemeClr val="lt1"/>
-          </a:fontRef>
-        </p:style>
-        <p:txBody>
-          <a:bodyPr rtlCol="0" anchor="ctr"/>
-          <a:lstStyle/>
-          <a:p>
-            <a:pPr algn="ctr"/>
-          </a:p>
-        </p:txBody>
-      </p:sp>
-      <p:sp>
-        <p:nvSpPr>
-          <p:cNvPr id="6" name="TextBox 5"/>
-          <p:cNvSpPr txBox="1"/>
-          <p:nvPr/>
-        </p:nvSpPr>
-        <p:spPr>
-          <a:xfrm>
-            <a:off x="960120" y="1783080"/>
-            <a:ext cx="4480560" cy="4297680"/>
-          </a:xfrm>
-          <a:prstGeom prst="rect">
-            <a:avLst/>
-          </a:prstGeom>
-          <a:noFill/>
-        </p:spPr>
-        <p:txBody>
-          <a:bodyPr wrap="square" lIns="0" tIns="0" rIns="0" bIns="0">
-            <a:spAutoFit/>
-          </a:bodyPr>
-          <a:lstStyle/>
-          <a:p>
-            <a:pPr>
-              <a:defRPr sz="1400" b="1">
-                <a:solidFill>
-                  <a:srgbClr val="0284C7"/>
-                </a:solidFill>
-                <a:latin typeface="Segoe UI"/>
-              </a:defRPr>
-            </a:pPr>
-            <a:r>
-              <a:t>Telegram Alerting System</a:t>
-            </a:r>
-          </a:p>
-          <a:p>
-            <a:pPr>
-              <a:spcAft>
-                <a:spcPts val="500"/>
-              </a:spcAft>
-              <a:defRPr sz="1000" b="1">
-                <a:solidFill>
-                  <a:srgbClr val="0F172A"/>
-                </a:solidFill>
-                <a:latin typeface="Segoe UI"/>
-              </a:defRPr>
-            </a:pPr>
-            <a:r>
-              <a:t>• Automated Post-Action Callbacks: </a:t>
-            </a:r>
-            <a:r>
-              <a:rPr b="0">
-                <a:solidFill>
-                  <a:srgbClr val="64748B"/>
-                </a:solidFill>
-              </a:rPr>
-              <a:t>Integrated directly into Jenkinsfile post { success { ... } failure { ... } } blocks.</a:t>
-            </a:r>
-          </a:p>
-          <a:p>
-            <a:pPr>
-              <a:spcAft>
-                <a:spcPts val="500"/>
-              </a:spcAft>
-              <a:defRPr sz="1000" b="1">
-                <a:solidFill>
-                  <a:srgbClr val="0F172A"/>
-                </a:solidFill>
-                <a:latin typeface="Segoe UI"/>
-              </a:defRPr>
-            </a:pPr>
-            <a:r>
-              <a:t>• Distinct Success &amp; Failure Alerts: </a:t>
-            </a:r>
-            <a:r>
-              <a:rPr b="0">
-                <a:solidFill>
-                  <a:srgbClr val="64748B"/>
-                </a:solidFill>
-              </a:rPr>
-              <a:t>Sends formatted markdown messages reporting Job name, Build #, Git SHA, and Target cluster.</a:t>
-            </a:r>
-          </a:p>
-          <a:p>
-            <a:pPr>
-              <a:spcAft>
-                <a:spcPts val="500"/>
-              </a:spcAft>
-              <a:defRPr sz="1000" b="1">
-                <a:solidFill>
-                  <a:srgbClr val="0F172A"/>
-                </a:solidFill>
-                <a:latin typeface="Segoe UI"/>
-              </a:defRPr>
-            </a:pPr>
-            <a:r>
-              <a:t>• Secure Credential Injection: </a:t>
-            </a:r>
-            <a:r>
-              <a:rPr b="0">
-                <a:solidFill>
-                  <a:srgbClr val="64748B"/>
-                </a:solidFill>
-              </a:rPr>
-              <a:t>Bot token and Chat ID are fetched dynamically via Jenkins withCredentials, preventing credential leaks.</a:t>
-            </a:r>
-          </a:p>
-          <a:p>
-            <a:pPr>
-              <a:spcAft>
-                <a:spcPts val="500"/>
-              </a:spcAft>
-              <a:defRPr sz="1000" b="1">
-                <a:solidFill>
-                  <a:srgbClr val="0F172A"/>
-                </a:solidFill>
-                <a:latin typeface="Segoe UI"/>
-              </a:defRPr>
-            </a:pPr>
-            <a:r>
-              <a:t>• Non-Blocking Resilient Design: </a:t>
-            </a:r>
-            <a:r>
-              <a:rPr b="0">
-                <a:solidFill>
-                  <a:srgbClr val="64748B"/>
-                </a:solidFill>
-              </a:rPr>
-              <a:t>Wrapped in try/catch with fallback logging so builds succeed even if notifications are skipped.</a:t>
-            </a:r>
-          </a:p>
-          <a:p>
-            <a:pPr>
-              <a:spcAft>
-                <a:spcPts val="500"/>
-              </a:spcAft>
-              <a:defRPr sz="1000" b="1">
-                <a:solidFill>
-                  <a:srgbClr val="0F172A"/>
-                </a:solidFill>
-                <a:latin typeface="Segoe UI"/>
-              </a:defRPr>
-            </a:pPr>
-            <a:r>
-              <a:t>• Mobile &amp; Desktop Instant Delivery: </a:t>
-            </a:r>
-            <a:r>
-              <a:rPr b="0">
-                <a:solidFill>
-                  <a:srgbClr val="64748B"/>
-                </a:solidFill>
-              </a:rPr>
-              <a:t>DevOps engineers receive push notifications seconds after pipeline completion on mobile devices.</a:t>
-            </a:r>
-          </a:p>
-        </p:txBody>
-      </p:sp>
-      <p:sp>
-        <p:nvSpPr>
-          <p:cNvPr id="7" name="Rounded Rectangle 6"/>
-          <p:cNvSpPr/>
-          <p:nvPr/>
-        </p:nvSpPr>
-        <p:spPr>
-          <a:xfrm>
-            <a:off x="5943600" y="1645920"/>
-            <a:ext cx="5486400" cy="4663440"/>
-          </a:xfrm>
-          <a:prstGeom prst="roundRect">
-            <a:avLst/>
-          </a:prstGeom>
-          <a:solidFill>
-            <a:srgbClr val="F1F5F9"/>
-          </a:solidFill>
-          <a:ln w="12700">
-            <a:solidFill>
-              <a:srgbClr val="CBD5E1"/>
-            </a:solidFill>
-          </a:ln>
-        </p:spPr>
-        <p:style>
-          <a:lnRef idx="1">
-            <a:schemeClr val="accent1"/>
-          </a:lnRef>
-          <a:fillRef idx="3">
-            <a:schemeClr val="accent1"/>
-          </a:fillRef>
-          <a:effectRef idx="2">
-            <a:schemeClr val="accent1"/>
-          </a:effectRef>
-          <a:fontRef idx="minor">
-            <a:schemeClr val="lt1"/>
-          </a:fontRef>
-        </p:style>
-        <p:txBody>
-          <a:bodyPr rtlCol="0" anchor="ctr"/>
-          <a:lstStyle/>
-          <a:p>
-            <a:pPr algn="ctr"/>
-          </a:p>
-        </p:txBody>
-      </p:sp>
-      <p:pic>
-        <p:nvPicPr>
-          <p:cNvPr id="8" name="Picture 7" descr="telegram_notification.png"/>
-          <p:cNvPicPr>
-            <a:picLocks noChangeAspect="1"/>
-          </p:cNvPicPr>
-          <p:nvPr/>
-        </p:nvPicPr>
-        <p:blipFill>
-          <a:blip r:embed="rId2"/>
-          <a:stretch>
-            <a:fillRect/>
-          </a:stretch>
-        </p:blipFill>
-        <p:spPr>
-          <a:xfrm>
-            <a:off x="6080760" y="2011680"/>
-            <a:ext cx="5212080" cy="4039362"/>
+            <a:off x="6096000" y="2071052"/>
+            <a:ext cx="5049520" cy="3924627"/>
           </a:xfrm>
           <a:prstGeom prst="rect">
             <a:avLst/>
